--- a/经验技巧总结/演讲：客户价值规划/我为什么可以持续成长.pptx
+++ b/经验技巧总结/演讲：客户价值规划/我为什么可以持续成长.pptx
@@ -5,53 +5,59 @@
     <p:sldMasterId id="2147483840" r:id="rId2"/>
   </p:sldMasterIdLst>
   <p:notesMasterIdLst>
-    <p:notesMasterId r:id="rId6"/>
+    <p:notesMasterId r:id="rId12"/>
   </p:notesMasterIdLst>
   <p:handoutMasterIdLst>
-    <p:handoutMasterId r:id="rId7"/>
+    <p:handoutMasterId r:id="rId13"/>
   </p:handoutMasterIdLst>
   <p:sldIdLst>
     <p:sldId id="258" r:id="rId3"/>
     <p:sldId id="259" r:id="rId4"/>
     <p:sldId id="257" r:id="rId5"/>
+    <p:sldId id="260" r:id="rId6"/>
+    <p:sldId id="261" r:id="rId7"/>
+    <p:sldId id="262" r:id="rId8"/>
+    <p:sldId id="263" r:id="rId9"/>
+    <p:sldId id="264" r:id="rId10"/>
+    <p:sldId id="265" r:id="rId11"/>
   </p:sldIdLst>
   <p:sldSz cx="12192000" cy="6858000"/>
   <p:notesSz cx="6858000" cy="9144000"/>
   <p:embeddedFontLst>
     <p:embeddedFont>
       <p:font typeface="方正静蕾简体" panose="02000000000000000000" pitchFamily="2" charset="-122"/>
-      <p:regular r:id="rId8"/>
+      <p:regular r:id="rId14"/>
+    </p:embeddedFont>
+    <p:embeddedFont>
+      <p:font typeface="方正铁筋隶书简体" panose="03000509000000000000" pitchFamily="65" charset="-122"/>
+      <p:regular r:id="rId15"/>
     </p:embeddedFont>
     <p:embeddedFont>
       <p:font typeface="微软雅黑" panose="020B0503020204020204" pitchFamily="34" charset="-122"/>
-      <p:regular r:id="rId9"/>
-      <p:bold r:id="rId10"/>
+      <p:regular r:id="rId16"/>
+      <p:bold r:id="rId17"/>
     </p:embeddedFont>
     <p:embeddedFont>
       <p:font typeface="Calibri" panose="020F0502020204030204" pitchFamily="34" charset="0"/>
-      <p:regular r:id="rId11"/>
-      <p:bold r:id="rId12"/>
-      <p:italic r:id="rId13"/>
-      <p:boldItalic r:id="rId14"/>
+      <p:regular r:id="rId18"/>
+      <p:bold r:id="rId19"/>
+      <p:italic r:id="rId20"/>
+      <p:boldItalic r:id="rId21"/>
     </p:embeddedFont>
     <p:embeddedFont>
       <p:font typeface="Wingdings 2" panose="05020102010507070707" pitchFamily="18" charset="2"/>
-      <p:regular r:id="rId15"/>
+      <p:regular r:id="rId22"/>
     </p:embeddedFont>
     <p:embeddedFont>
       <p:font typeface="Verdana" panose="020B0604030504040204" pitchFamily="34" charset="0"/>
-      <p:regular r:id="rId16"/>
-      <p:bold r:id="rId17"/>
-      <p:italic r:id="rId18"/>
-      <p:boldItalic r:id="rId19"/>
-    </p:embeddedFont>
-    <p:embeddedFont>
-      <p:font typeface="方正铁筋隶书简体" panose="03000509000000000000" pitchFamily="65" charset="-122"/>
-      <p:regular r:id="rId20"/>
+      <p:regular r:id="rId23"/>
+      <p:bold r:id="rId24"/>
+      <p:italic r:id="rId25"/>
+      <p:boldItalic r:id="rId26"/>
     </p:embeddedFont>
     <p:embeddedFont>
       <p:font typeface="方正胖娃简体" panose="03000509000000000000" pitchFamily="65" charset="-122"/>
-      <p:regular r:id="rId21"/>
+      <p:regular r:id="rId27"/>
     </p:embeddedFont>
   </p:embeddedFontLst>
   <p:defaultTextStyle>
@@ -1104,61 +1110,6 @@
         </a:p>
       </dgm:t>
     </dgm:pt>
-    <dgm:pt modelId="{28E50F4E-A211-4387-B97C-8204D2D63C7E}">
-      <dgm:prSet phldrT="[文本]"/>
-      <dgm:spPr>
-        <a:xfrm rot="17700000">
-          <a:off x="290642" y="1339948"/>
-          <a:ext cx="1022729" cy="492876"/>
-        </a:xfrm>
-      </dgm:spPr>
-      <dgm:t>
-        <a:bodyPr/>
-        <a:lstStyle/>
-        <a:p>
-          <a:r>
-            <a:rPr lang="zh-CN" dirty="0">
-              <a:latin typeface="微软雅黑" panose="020B0503020204020204" pitchFamily="34" charset="-122"/>
-              <a:ea typeface="微软雅黑" panose="020B0503020204020204" pitchFamily="34" charset="-122"/>
-              <a:cs typeface="+mn-cs"/>
-            </a:rPr>
-            <a:t>日期</a:t>
-          </a:r>
-          <a:endParaRPr lang="zh-CN" dirty="0">
-            <a:latin typeface="微软雅黑" panose="020B0503020204020204" pitchFamily="34" charset="-122"/>
-            <a:ea typeface="微软雅黑" panose="020B0503020204020204" pitchFamily="34" charset="-122"/>
-          </a:endParaRPr>
-        </a:p>
-      </dgm:t>
-    </dgm:pt>
-    <dgm:pt modelId="{3ECDEA85-0997-4DE7-BDA1-9D27574A1BE6}" type="parTrans" cxnId="{22B998FB-6DA3-44DE-8039-70A44451540E}">
-      <dgm:prSet/>
-      <dgm:spPr/>
-      <dgm:t>
-        <a:bodyPr/>
-        <a:lstStyle/>
-        <a:p>
-          <a:endParaRPr lang="zh-CN">
-            <a:latin typeface="微软雅黑" panose="020B0503020204020204" pitchFamily="34" charset="-122"/>
-            <a:ea typeface="微软雅黑" panose="020B0503020204020204" pitchFamily="34" charset="-122"/>
-          </a:endParaRPr>
-        </a:p>
-      </dgm:t>
-    </dgm:pt>
-    <dgm:pt modelId="{7E88C0FE-9E9F-45D8-9EB3-4AB6E6B956AA}" type="sibTrans" cxnId="{22B998FB-6DA3-44DE-8039-70A44451540E}">
-      <dgm:prSet/>
-      <dgm:spPr/>
-      <dgm:t>
-        <a:bodyPr/>
-        <a:lstStyle/>
-        <a:p>
-          <a:endParaRPr lang="zh-CN">
-            <a:latin typeface="微软雅黑" panose="020B0503020204020204" pitchFamily="34" charset="-122"/>
-            <a:ea typeface="微软雅黑" panose="020B0503020204020204" pitchFamily="34" charset="-122"/>
-          </a:endParaRPr>
-        </a:p>
-      </dgm:t>
-    </dgm:pt>
     <dgm:pt modelId="{4197E540-D10F-4BDA-84C9-B2027B240EEB}">
       <dgm:prSet phldrT="[文本]"/>
       <dgm:spPr>
@@ -1172,13 +1123,18 @@
         <a:lstStyle/>
         <a:p>
           <a:r>
-            <a:rPr lang="zh-CN">
+            <a:rPr lang="zh-CN" altLang="en-US" dirty="0" smtClean="0">
               <a:latin typeface="微软雅黑" panose="020B0503020204020204" pitchFamily="34" charset="-122"/>
               <a:ea typeface="微软雅黑" panose="020B0503020204020204" pitchFamily="34" charset="-122"/>
               <a:cs typeface="+mn-cs"/>
             </a:rPr>
-            <a:t>活动标题</a:t>
+            <a:t>专业服务支持</a:t>
           </a:r>
+          <a:endParaRPr lang="zh-CN" dirty="0">
+            <a:latin typeface="微软雅黑" panose="020B0503020204020204" pitchFamily="34" charset="-122"/>
+            <a:ea typeface="微软雅黑" panose="020B0503020204020204" pitchFamily="34" charset="-122"/>
+            <a:cs typeface="+mn-cs"/>
+          </a:endParaRPr>
         </a:p>
       </dgm:t>
     </dgm:pt>
@@ -1210,57 +1166,6 @@
         </a:p>
       </dgm:t>
     </dgm:pt>
-    <dgm:pt modelId="{0AEA99DD-79F2-454B-89E9-FC77396C9F1D}">
-      <dgm:prSet phldrT="[文本]"/>
-      <dgm:spPr>
-        <a:xfrm rot="17700000">
-          <a:off x="868614" y="2802844"/>
-          <a:ext cx="884708" cy="426573"/>
-        </a:xfrm>
-      </dgm:spPr>
-      <dgm:t>
-        <a:bodyPr/>
-        <a:lstStyle/>
-        <a:p>
-          <a:r>
-            <a:rPr lang="zh-CN">
-              <a:latin typeface="微软雅黑" panose="020B0503020204020204" pitchFamily="34" charset="-122"/>
-              <a:ea typeface="微软雅黑" panose="020B0503020204020204" pitchFamily="34" charset="-122"/>
-              <a:cs typeface="+mn-cs"/>
-            </a:rPr>
-            <a:t>活动标题</a:t>
-          </a:r>
-        </a:p>
-      </dgm:t>
-    </dgm:pt>
-    <dgm:pt modelId="{A2D73402-9AD4-47A3-93FB-B3C18E3B4F0C}" type="parTrans" cxnId="{B4E4664C-2BB7-4195-971F-F79B38F44C6E}">
-      <dgm:prSet/>
-      <dgm:spPr/>
-      <dgm:t>
-        <a:bodyPr/>
-        <a:lstStyle/>
-        <a:p>
-          <a:endParaRPr lang="zh-CN">
-            <a:latin typeface="微软雅黑" panose="020B0503020204020204" pitchFamily="34" charset="-122"/>
-            <a:ea typeface="微软雅黑" panose="020B0503020204020204" pitchFamily="34" charset="-122"/>
-          </a:endParaRPr>
-        </a:p>
-      </dgm:t>
-    </dgm:pt>
-    <dgm:pt modelId="{602E552B-1247-4A9C-B655-B1B1185966C0}" type="sibTrans" cxnId="{B4E4664C-2BB7-4195-971F-F79B38F44C6E}">
-      <dgm:prSet/>
-      <dgm:spPr/>
-      <dgm:t>
-        <a:bodyPr/>
-        <a:lstStyle/>
-        <a:p>
-          <a:endParaRPr lang="zh-CN">
-            <a:latin typeface="微软雅黑" panose="020B0503020204020204" pitchFamily="34" charset="-122"/>
-            <a:ea typeface="微软雅黑" panose="020B0503020204020204" pitchFamily="34" charset="-122"/>
-          </a:endParaRPr>
-        </a:p>
-      </dgm:t>
-    </dgm:pt>
     <dgm:pt modelId="{5A22019F-6F97-4DC3-963A-583D3D54A632}">
       <dgm:prSet phldrT="[文本]"/>
       <dgm:spPr>
@@ -1274,13 +1179,26 @@
         <a:lstStyle/>
         <a:p>
           <a:r>
-            <a:rPr lang="zh-CN" dirty="0">
+            <a:rPr lang="en-US" altLang="zh-CN" dirty="0" smtClean="0">
               <a:latin typeface="微软雅黑" panose="020B0503020204020204" pitchFamily="34" charset="-122"/>
               <a:ea typeface="微软雅黑" panose="020B0503020204020204" pitchFamily="34" charset="-122"/>
               <a:cs typeface="+mn-cs"/>
             </a:rPr>
-            <a:t>日期</a:t>
+            <a:t>2008</a:t>
           </a:r>
+          <a:r>
+            <a:rPr lang="zh-CN" altLang="en-US" dirty="0" smtClean="0">
+              <a:latin typeface="微软雅黑" panose="020B0503020204020204" pitchFamily="34" charset="-122"/>
+              <a:ea typeface="微软雅黑" panose="020B0503020204020204" pitchFamily="34" charset="-122"/>
+              <a:cs typeface="+mn-cs"/>
+            </a:rPr>
+            <a:t>年</a:t>
+          </a:r>
+          <a:endParaRPr lang="zh-CN" dirty="0">
+            <a:latin typeface="微软雅黑" panose="020B0503020204020204" pitchFamily="34" charset="-122"/>
+            <a:ea typeface="微软雅黑" panose="020B0503020204020204" pitchFamily="34" charset="-122"/>
+            <a:cs typeface="+mn-cs"/>
+          </a:endParaRPr>
         </a:p>
       </dgm:t>
     </dgm:pt>
@@ -1325,13 +1243,34 @@
         <a:lstStyle/>
         <a:p>
           <a:r>
-            <a:rPr lang="zh-CN">
+            <a:rPr lang="zh-CN" altLang="en-US" dirty="0" smtClean="0">
               <a:latin typeface="微软雅黑" panose="020B0503020204020204" pitchFamily="34" charset="-122"/>
               <a:ea typeface="微软雅黑" panose="020B0503020204020204" pitchFamily="34" charset="-122"/>
               <a:cs typeface="+mn-cs"/>
             </a:rPr>
-            <a:t>活动标题</a:t>
+            <a:t>建行</a:t>
           </a:r>
+          <a:r>
+            <a:rPr lang="en-US" altLang="zh-CN" dirty="0" smtClean="0">
+              <a:latin typeface="微软雅黑" panose="020B0503020204020204" pitchFamily="34" charset="-122"/>
+              <a:ea typeface="微软雅黑" panose="020B0503020204020204" pitchFamily="34" charset="-122"/>
+              <a:cs typeface="+mn-cs"/>
+            </a:rPr>
+            <a:t>SUP2</a:t>
+          </a:r>
+          <a:r>
+            <a:rPr lang="zh-CN" altLang="en-US" dirty="0" smtClean="0">
+              <a:latin typeface="微软雅黑" panose="020B0503020204020204" pitchFamily="34" charset="-122"/>
+              <a:ea typeface="微软雅黑" panose="020B0503020204020204" pitchFamily="34" charset="-122"/>
+              <a:cs typeface="+mn-cs"/>
+            </a:rPr>
+            <a:t>平台</a:t>
+          </a:r>
+          <a:endParaRPr lang="zh-CN" dirty="0">
+            <a:latin typeface="微软雅黑" panose="020B0503020204020204" pitchFamily="34" charset="-122"/>
+            <a:ea typeface="微软雅黑" panose="020B0503020204020204" pitchFamily="34" charset="-122"/>
+            <a:cs typeface="+mn-cs"/>
+          </a:endParaRPr>
         </a:p>
       </dgm:t>
     </dgm:pt>
@@ -1376,13 +1315,26 @@
         <a:lstStyle/>
         <a:p>
           <a:r>
-            <a:rPr lang="zh-CN" dirty="0">
+            <a:rPr lang="en-US" altLang="zh-CN" dirty="0" smtClean="0">
               <a:latin typeface="微软雅黑" panose="020B0503020204020204" pitchFamily="34" charset="-122"/>
               <a:ea typeface="微软雅黑" panose="020B0503020204020204" pitchFamily="34" charset="-122"/>
               <a:cs typeface="+mn-cs"/>
             </a:rPr>
-            <a:t>日期</a:t>
+            <a:t>2010</a:t>
           </a:r>
+          <a:r>
+            <a:rPr lang="zh-CN" altLang="en-US" dirty="0" smtClean="0">
+              <a:latin typeface="微软雅黑" panose="020B0503020204020204" pitchFamily="34" charset="-122"/>
+              <a:ea typeface="微软雅黑" panose="020B0503020204020204" pitchFamily="34" charset="-122"/>
+              <a:cs typeface="+mn-cs"/>
+            </a:rPr>
+            <a:t>年</a:t>
+          </a:r>
+          <a:endParaRPr lang="zh-CN" dirty="0">
+            <a:latin typeface="微软雅黑" panose="020B0503020204020204" pitchFamily="34" charset="-122"/>
+            <a:ea typeface="微软雅黑" panose="020B0503020204020204" pitchFamily="34" charset="-122"/>
+            <a:cs typeface="+mn-cs"/>
+          </a:endParaRPr>
         </a:p>
       </dgm:t>
     </dgm:pt>
@@ -1427,13 +1379,34 @@
         <a:lstStyle/>
         <a:p>
           <a:r>
-            <a:rPr lang="zh-CN">
+            <a:rPr lang="zh-CN" altLang="en-US" dirty="0" smtClean="0">
               <a:latin typeface="微软雅黑" panose="020B0503020204020204" pitchFamily="34" charset="-122"/>
               <a:ea typeface="微软雅黑" panose="020B0503020204020204" pitchFamily="34" charset="-122"/>
               <a:cs typeface="+mn-cs"/>
             </a:rPr>
-            <a:t>活动标题</a:t>
+            <a:t>中信</a:t>
           </a:r>
+          <a:r>
+            <a:rPr lang="en-US" altLang="zh-CN" dirty="0" smtClean="0">
+              <a:latin typeface="微软雅黑" panose="020B0503020204020204" pitchFamily="34" charset="-122"/>
+              <a:ea typeface="微软雅黑" panose="020B0503020204020204" pitchFamily="34" charset="-122"/>
+              <a:cs typeface="+mn-cs"/>
+            </a:rPr>
+            <a:t>CBJUP</a:t>
+          </a:r>
+          <a:r>
+            <a:rPr lang="zh-CN" altLang="en-US" dirty="0" smtClean="0">
+              <a:latin typeface="微软雅黑" panose="020B0503020204020204" pitchFamily="34" charset="-122"/>
+              <a:ea typeface="微软雅黑" panose="020B0503020204020204" pitchFamily="34" charset="-122"/>
+              <a:cs typeface="+mn-cs"/>
+            </a:rPr>
+            <a:t>平台</a:t>
+          </a:r>
+          <a:endParaRPr lang="zh-CN" dirty="0">
+            <a:latin typeface="微软雅黑" panose="020B0503020204020204" pitchFamily="34" charset="-122"/>
+            <a:ea typeface="微软雅黑" panose="020B0503020204020204" pitchFamily="34" charset="-122"/>
+            <a:cs typeface="+mn-cs"/>
+          </a:endParaRPr>
         </a:p>
       </dgm:t>
     </dgm:pt>
@@ -1465,57 +1438,6 @@
         </a:p>
       </dgm:t>
     </dgm:pt>
-    <dgm:pt modelId="{4270397F-DBF8-4AC4-AA3F-CA10089E7FBE}">
-      <dgm:prSet phldrT="[文本]"/>
-      <dgm:spPr>
-        <a:xfrm rot="17700000">
-          <a:off x="4104961" y="2802844"/>
-          <a:ext cx="884708" cy="426573"/>
-        </a:xfrm>
-      </dgm:spPr>
-      <dgm:t>
-        <a:bodyPr/>
-        <a:lstStyle/>
-        <a:p>
-          <a:r>
-            <a:rPr lang="zh-CN">
-              <a:latin typeface="微软雅黑" panose="020B0503020204020204" pitchFamily="34" charset="-122"/>
-              <a:ea typeface="微软雅黑" panose="020B0503020204020204" pitchFamily="34" charset="-122"/>
-              <a:cs typeface="+mn-cs"/>
-            </a:rPr>
-            <a:t>活动标题</a:t>
-          </a:r>
-        </a:p>
-      </dgm:t>
-    </dgm:pt>
-    <dgm:pt modelId="{75FF98B8-82E9-41E5-83D6-CFAB184BF2CA}" type="parTrans" cxnId="{9E4E564B-7449-488A-A98A-627F84C86B7B}">
-      <dgm:prSet/>
-      <dgm:spPr/>
-      <dgm:t>
-        <a:bodyPr/>
-        <a:lstStyle/>
-        <a:p>
-          <a:endParaRPr lang="zh-CN">
-            <a:latin typeface="微软雅黑" panose="020B0503020204020204" pitchFamily="34" charset="-122"/>
-            <a:ea typeface="微软雅黑" panose="020B0503020204020204" pitchFamily="34" charset="-122"/>
-          </a:endParaRPr>
-        </a:p>
-      </dgm:t>
-    </dgm:pt>
-    <dgm:pt modelId="{4C7CC020-5C91-4D36-A3D2-5B6892F678CD}" type="sibTrans" cxnId="{9E4E564B-7449-488A-A98A-627F84C86B7B}">
-      <dgm:prSet/>
-      <dgm:spPr/>
-      <dgm:t>
-        <a:bodyPr/>
-        <a:lstStyle/>
-        <a:p>
-          <a:endParaRPr lang="zh-CN">
-            <a:latin typeface="微软雅黑" panose="020B0503020204020204" pitchFamily="34" charset="-122"/>
-            <a:ea typeface="微软雅黑" panose="020B0503020204020204" pitchFamily="34" charset="-122"/>
-          </a:endParaRPr>
-        </a:p>
-      </dgm:t>
-    </dgm:pt>
     <dgm:pt modelId="{1EAF32EF-2685-41DE-B527-A19EA257EFF2}">
       <dgm:prSet phldrT="[文本]"/>
       <dgm:spPr>
@@ -1529,13 +1451,26 @@
         <a:lstStyle/>
         <a:p>
           <a:r>
-            <a:rPr lang="zh-CN" dirty="0">
+            <a:rPr lang="en-US" altLang="zh-CN" dirty="0" smtClean="0">
               <a:latin typeface="微软雅黑" panose="020B0503020204020204" pitchFamily="34" charset="-122"/>
               <a:ea typeface="微软雅黑" panose="020B0503020204020204" pitchFamily="34" charset="-122"/>
               <a:cs typeface="+mn-cs"/>
             </a:rPr>
-            <a:t>日期</a:t>
+            <a:t>2013</a:t>
           </a:r>
+          <a:r>
+            <a:rPr lang="zh-CN" altLang="en-US" dirty="0" smtClean="0">
+              <a:latin typeface="微软雅黑" panose="020B0503020204020204" pitchFamily="34" charset="-122"/>
+              <a:ea typeface="微软雅黑" panose="020B0503020204020204" pitchFamily="34" charset="-122"/>
+              <a:cs typeface="+mn-cs"/>
+            </a:rPr>
+            <a:t>年</a:t>
+          </a:r>
+          <a:endParaRPr lang="zh-CN" dirty="0">
+            <a:latin typeface="微软雅黑" panose="020B0503020204020204" pitchFamily="34" charset="-122"/>
+            <a:ea typeface="微软雅黑" panose="020B0503020204020204" pitchFamily="34" charset="-122"/>
+            <a:cs typeface="+mn-cs"/>
+          </a:endParaRPr>
         </a:p>
       </dgm:t>
     </dgm:pt>
@@ -1580,13 +1515,34 @@
         <a:lstStyle/>
         <a:p>
           <a:r>
-            <a:rPr lang="zh-CN">
+            <a:rPr lang="zh-CN" altLang="en-US" dirty="0" smtClean="0">
               <a:latin typeface="微软雅黑" panose="020B0503020204020204" pitchFamily="34" charset="-122"/>
               <a:ea typeface="微软雅黑" panose="020B0503020204020204" pitchFamily="34" charset="-122"/>
               <a:cs typeface="+mn-cs"/>
             </a:rPr>
-            <a:t>活动标题</a:t>
+            <a:t>远光</a:t>
           </a:r>
+          <a:r>
+            <a:rPr lang="en-US" altLang="zh-CN" dirty="0" smtClean="0">
+              <a:latin typeface="微软雅黑" panose="020B0503020204020204" pitchFamily="34" charset="-122"/>
+              <a:ea typeface="微软雅黑" panose="020B0503020204020204" pitchFamily="34" charset="-122"/>
+              <a:cs typeface="+mn-cs"/>
+            </a:rPr>
+            <a:t>ECP</a:t>
+          </a:r>
+          <a:r>
+            <a:rPr lang="zh-CN" altLang="en-US" dirty="0" smtClean="0">
+              <a:latin typeface="微软雅黑" panose="020B0503020204020204" pitchFamily="34" charset="-122"/>
+              <a:ea typeface="微软雅黑" panose="020B0503020204020204" pitchFamily="34" charset="-122"/>
+              <a:cs typeface="+mn-cs"/>
+            </a:rPr>
+            <a:t>平台</a:t>
+          </a:r>
+          <a:endParaRPr lang="zh-CN" dirty="0">
+            <a:latin typeface="微软雅黑" panose="020B0503020204020204" pitchFamily="34" charset="-122"/>
+            <a:ea typeface="微软雅黑" panose="020B0503020204020204" pitchFamily="34" charset="-122"/>
+            <a:cs typeface="+mn-cs"/>
+          </a:endParaRPr>
         </a:p>
       </dgm:t>
     </dgm:pt>
@@ -1631,13 +1587,26 @@
         <a:lstStyle/>
         <a:p>
           <a:r>
-            <a:rPr lang="zh-CN">
+            <a:rPr lang="en-US" altLang="zh-CN" dirty="0" smtClean="0">
               <a:latin typeface="微软雅黑" panose="020B0503020204020204" pitchFamily="34" charset="-122"/>
               <a:ea typeface="微软雅黑" panose="020B0503020204020204" pitchFamily="34" charset="-122"/>
               <a:cs typeface="+mn-cs"/>
             </a:rPr>
-            <a:t>日期</a:t>
+            <a:t>2015</a:t>
           </a:r>
+          <a:r>
+            <a:rPr lang="zh-CN" altLang="en-US" dirty="0" smtClean="0">
+              <a:latin typeface="微软雅黑" panose="020B0503020204020204" pitchFamily="34" charset="-122"/>
+              <a:ea typeface="微软雅黑" panose="020B0503020204020204" pitchFamily="34" charset="-122"/>
+              <a:cs typeface="+mn-cs"/>
+            </a:rPr>
+            <a:t>年</a:t>
+          </a:r>
+          <a:endParaRPr lang="zh-CN" dirty="0">
+            <a:latin typeface="微软雅黑" panose="020B0503020204020204" pitchFamily="34" charset="-122"/>
+            <a:ea typeface="微软雅黑" panose="020B0503020204020204" pitchFamily="34" charset="-122"/>
+            <a:cs typeface="+mn-cs"/>
+          </a:endParaRPr>
         </a:p>
       </dgm:t>
     </dgm:pt>
@@ -1682,13 +1651,34 @@
         <a:lstStyle/>
         <a:p>
           <a:r>
-            <a:rPr lang="zh-CN">
+            <a:rPr lang="zh-CN" altLang="en-US" dirty="0" smtClean="0">
               <a:latin typeface="微软雅黑" panose="020B0503020204020204" pitchFamily="34" charset="-122"/>
               <a:ea typeface="微软雅黑" panose="020B0503020204020204" pitchFamily="34" charset="-122"/>
               <a:cs typeface="+mn-cs"/>
             </a:rPr>
-            <a:t>活动标题</a:t>
+            <a:t>普元</a:t>
           </a:r>
+          <a:r>
+            <a:rPr lang="en-US" altLang="zh-CN" dirty="0" smtClean="0">
+              <a:latin typeface="微软雅黑" panose="020B0503020204020204" pitchFamily="34" charset="-122"/>
+              <a:ea typeface="微软雅黑" panose="020B0503020204020204" pitchFamily="34" charset="-122"/>
+              <a:cs typeface="+mn-cs"/>
+            </a:rPr>
+            <a:t>BIIP</a:t>
+          </a:r>
+          <a:r>
+            <a:rPr lang="zh-CN" altLang="en-US" dirty="0" smtClean="0">
+              <a:latin typeface="微软雅黑" panose="020B0503020204020204" pitchFamily="34" charset="-122"/>
+              <a:ea typeface="微软雅黑" panose="020B0503020204020204" pitchFamily="34" charset="-122"/>
+              <a:cs typeface="+mn-cs"/>
+            </a:rPr>
+            <a:t>平台</a:t>
+          </a:r>
+          <a:endParaRPr lang="zh-CN" dirty="0">
+            <a:latin typeface="微软雅黑" panose="020B0503020204020204" pitchFamily="34" charset="-122"/>
+            <a:ea typeface="微软雅黑" panose="020B0503020204020204" pitchFamily="34" charset="-122"/>
+            <a:cs typeface="+mn-cs"/>
+          </a:endParaRPr>
         </a:p>
       </dgm:t>
     </dgm:pt>
@@ -1717,6 +1707,164 @@
             <a:latin typeface="微软雅黑" panose="020B0503020204020204" pitchFamily="34" charset="-122"/>
             <a:ea typeface="微软雅黑" panose="020B0503020204020204" pitchFamily="34" charset="-122"/>
           </a:endParaRPr>
+        </a:p>
+      </dgm:t>
+    </dgm:pt>
+    <dgm:pt modelId="{744753AB-D893-4316-BFC3-F9FDB847355A}">
+      <dgm:prSet phldrT="[文本]"/>
+      <dgm:spPr>
+        <a:xfrm rot="17700000">
+          <a:off x="290642" y="1339948"/>
+          <a:ext cx="1022729" cy="492876"/>
+        </a:xfrm>
+      </dgm:spPr>
+      <dgm:t>
+        <a:bodyPr/>
+        <a:lstStyle/>
+        <a:p>
+          <a:r>
+            <a:rPr lang="en-US" altLang="zh-CN" dirty="0" smtClean="0">
+              <a:latin typeface="微软雅黑" panose="020B0503020204020204" pitchFamily="34" charset="-122"/>
+              <a:ea typeface="微软雅黑" panose="020B0503020204020204" pitchFamily="34" charset="-122"/>
+            </a:rPr>
+            <a:t>2007</a:t>
+          </a:r>
+          <a:r>
+            <a:rPr lang="zh-CN" altLang="en-US" dirty="0" smtClean="0">
+              <a:latin typeface="微软雅黑" panose="020B0503020204020204" pitchFamily="34" charset="-122"/>
+              <a:ea typeface="微软雅黑" panose="020B0503020204020204" pitchFamily="34" charset="-122"/>
+            </a:rPr>
+            <a:t>之前</a:t>
+          </a:r>
+          <a:endParaRPr lang="zh-CN" dirty="0">
+            <a:latin typeface="微软雅黑" panose="020B0503020204020204" pitchFamily="34" charset="-122"/>
+            <a:ea typeface="微软雅黑" panose="020B0503020204020204" pitchFamily="34" charset="-122"/>
+          </a:endParaRPr>
+        </a:p>
+      </dgm:t>
+    </dgm:pt>
+    <dgm:pt modelId="{4F23A9AC-6D0F-45B0-9264-B0CDB1165326}" type="parTrans" cxnId="{863EFA21-C54E-4210-BDE7-A560B0A519BC}">
+      <dgm:prSet/>
+      <dgm:spPr/>
+      <dgm:t>
+        <a:bodyPr/>
+        <a:lstStyle/>
+        <a:p>
+          <a:endParaRPr lang="zh-CN" altLang="en-US"/>
+        </a:p>
+      </dgm:t>
+    </dgm:pt>
+    <dgm:pt modelId="{6A235716-E6C4-4C48-BBF8-9EDE254CFC59}" type="sibTrans" cxnId="{863EFA21-C54E-4210-BDE7-A560B0A519BC}">
+      <dgm:prSet/>
+      <dgm:spPr/>
+      <dgm:t>
+        <a:bodyPr/>
+        <a:lstStyle/>
+        <a:p>
+          <a:endParaRPr lang="zh-CN" altLang="en-US"/>
+        </a:p>
+      </dgm:t>
+    </dgm:pt>
+    <dgm:pt modelId="{B117579F-3172-4837-8052-C96FE3E92213}">
+      <dgm:prSet phldrT="[文本]"/>
+      <dgm:spPr>
+        <a:xfrm rot="17700000">
+          <a:off x="290642" y="1339948"/>
+          <a:ext cx="1022729" cy="492876"/>
+        </a:xfrm>
+      </dgm:spPr>
+      <dgm:t>
+        <a:bodyPr/>
+        <a:lstStyle/>
+        <a:p>
+          <a:r>
+            <a:rPr lang="en-US" altLang="zh-CN" dirty="0" smtClean="0">
+              <a:latin typeface="微软雅黑" panose="020B0503020204020204" pitchFamily="34" charset="-122"/>
+              <a:ea typeface="微软雅黑" panose="020B0503020204020204" pitchFamily="34" charset="-122"/>
+            </a:rPr>
+            <a:t>2007</a:t>
+          </a:r>
+          <a:r>
+            <a:rPr lang="zh-CN" altLang="en-US" dirty="0" smtClean="0">
+              <a:latin typeface="微软雅黑" panose="020B0503020204020204" pitchFamily="34" charset="-122"/>
+              <a:ea typeface="微软雅黑" panose="020B0503020204020204" pitchFamily="34" charset="-122"/>
+            </a:rPr>
+            <a:t>年</a:t>
+          </a:r>
+          <a:endParaRPr lang="zh-CN" dirty="0">
+            <a:latin typeface="微软雅黑" panose="020B0503020204020204" pitchFamily="34" charset="-122"/>
+            <a:ea typeface="微软雅黑" panose="020B0503020204020204" pitchFamily="34" charset="-122"/>
+          </a:endParaRPr>
+        </a:p>
+      </dgm:t>
+    </dgm:pt>
+    <dgm:pt modelId="{448C9103-6AF6-4EE2-9022-F70A54726CD5}" type="parTrans" cxnId="{CF1040A0-C48E-458F-8677-C8F9CD1F9ACB}">
+      <dgm:prSet/>
+      <dgm:spPr/>
+      <dgm:t>
+        <a:bodyPr/>
+        <a:lstStyle/>
+        <a:p>
+          <a:endParaRPr lang="zh-CN" altLang="en-US"/>
+        </a:p>
+      </dgm:t>
+    </dgm:pt>
+    <dgm:pt modelId="{E1CAED68-694D-409C-8E40-0C344C008673}" type="sibTrans" cxnId="{CF1040A0-C48E-458F-8677-C8F9CD1F9ACB}">
+      <dgm:prSet/>
+      <dgm:spPr/>
+      <dgm:t>
+        <a:bodyPr/>
+        <a:lstStyle/>
+        <a:p>
+          <a:endParaRPr lang="zh-CN" altLang="en-US"/>
+        </a:p>
+      </dgm:t>
+    </dgm:pt>
+    <dgm:pt modelId="{27CD36B1-0E0B-4ABA-ABCB-288F2C9E2DC9}">
+      <dgm:prSet phldrT="[文本]"/>
+      <dgm:spPr>
+        <a:xfrm rot="17700000">
+          <a:off x="290642" y="1339948"/>
+          <a:ext cx="1022729" cy="492876"/>
+        </a:xfrm>
+      </dgm:spPr>
+      <dgm:t>
+        <a:bodyPr/>
+        <a:lstStyle/>
+        <a:p>
+          <a:r>
+            <a:rPr lang="zh-CN" altLang="en-US" dirty="0" smtClean="0">
+              <a:latin typeface="微软雅黑" panose="020B0503020204020204" pitchFamily="34" charset="-122"/>
+              <a:ea typeface="微软雅黑" panose="020B0503020204020204" pitchFamily="34" charset="-122"/>
+            </a:rPr>
+            <a:t>银行应用开发</a:t>
+          </a:r>
+          <a:endParaRPr lang="zh-CN" dirty="0">
+            <a:latin typeface="微软雅黑" panose="020B0503020204020204" pitchFamily="34" charset="-122"/>
+            <a:ea typeface="微软雅黑" panose="020B0503020204020204" pitchFamily="34" charset="-122"/>
+          </a:endParaRPr>
+        </a:p>
+      </dgm:t>
+    </dgm:pt>
+    <dgm:pt modelId="{5C483E7F-5130-4220-A8C0-C9E7B9C77FAA}" type="parTrans" cxnId="{880B01CE-D12B-4982-8970-2E587779E38A}">
+      <dgm:prSet/>
+      <dgm:spPr/>
+      <dgm:t>
+        <a:bodyPr/>
+        <a:lstStyle/>
+        <a:p>
+          <a:endParaRPr lang="zh-CN" altLang="en-US"/>
+        </a:p>
+      </dgm:t>
+    </dgm:pt>
+    <dgm:pt modelId="{18F8ECF6-33A9-452D-9F41-5C01054DDA42}" type="sibTrans" cxnId="{880B01CE-D12B-4982-8970-2E587779E38A}">
+      <dgm:prSet/>
+      <dgm:spPr/>
+      <dgm:t>
+        <a:bodyPr/>
+        <a:lstStyle/>
+        <a:p>
+          <a:endParaRPr lang="zh-CN" altLang="en-US"/>
         </a:p>
       </dgm:t>
     </dgm:pt>
@@ -1735,16 +1883,125 @@
         </a:p>
       </dgm:t>
     </dgm:pt>
-    <dgm:pt modelId="{E2E3C590-7FC4-4000-9B21-30C11C32C517}" type="pres">
-      <dgm:prSet presAssocID="{28E50F4E-A211-4387-B97C-8204D2D63C7E}" presName="parComposite" presStyleCnt="0"/>
+    <dgm:pt modelId="{C6B3E2C5-6D6C-496F-AB52-F7CC056EC993}" type="pres">
+      <dgm:prSet presAssocID="{744753AB-D893-4316-BFC3-F9FDB847355A}" presName="parComposite" presStyleCnt="0"/>
       <dgm:spPr/>
     </dgm:pt>
-    <dgm:pt modelId="{28017CDB-A29D-4E6F-AB4C-798EBE6DA64D}" type="pres">
-      <dgm:prSet presAssocID="{28E50F4E-A211-4387-B97C-8204D2D63C7E}" presName="parBigCircle" presStyleLbl="node0" presStyleIdx="0" presStyleCnt="5"/>
+    <dgm:pt modelId="{9FE30771-6069-40B1-AF64-E56310F06FAB}" type="pres">
+      <dgm:prSet presAssocID="{744753AB-D893-4316-BFC3-F9FDB847355A}" presName="parBigCircle" presStyleLbl="node0" presStyleIdx="0" presStyleCnt="6"/>
       <dgm:spPr/>
     </dgm:pt>
-    <dgm:pt modelId="{66FE321E-6221-430D-95E7-19DBF56E205F}" type="pres">
-      <dgm:prSet presAssocID="{28E50F4E-A211-4387-B97C-8204D2D63C7E}" presName="parTx" presStyleLbl="revTx" presStyleIdx="0" presStyleCnt="19"/>
+    <dgm:pt modelId="{04BACD90-9830-4A1B-97D6-187F0E533766}" type="pres">
+      <dgm:prSet presAssocID="{744753AB-D893-4316-BFC3-F9FDB847355A}" presName="parTx" presStyleLbl="revTx" presStyleIdx="0" presStyleCnt="18"/>
+      <dgm:spPr>
+        <a:prstGeom prst="rect">
+          <a:avLst/>
+        </a:prstGeom>
+      </dgm:spPr>
+      <dgm:t>
+        <a:bodyPr/>
+        <a:lstStyle/>
+        <a:p>
+          <a:endParaRPr lang="zh-CN" altLang="en-US"/>
+        </a:p>
+      </dgm:t>
+    </dgm:pt>
+    <dgm:pt modelId="{2CE2FFB1-87B5-4B99-9256-0F90B78554C4}" type="pres">
+      <dgm:prSet presAssocID="{744753AB-D893-4316-BFC3-F9FDB847355A}" presName="bSpace" presStyleCnt="0"/>
+      <dgm:spPr/>
+    </dgm:pt>
+    <dgm:pt modelId="{02AF4702-8FC0-43A5-823C-4D55F5741771}" type="pres">
+      <dgm:prSet presAssocID="{744753AB-D893-4316-BFC3-F9FDB847355A}" presName="parBackupNorm" presStyleCnt="0"/>
+      <dgm:spPr/>
+    </dgm:pt>
+    <dgm:pt modelId="{A0766F71-7A2D-42C4-AEF4-F2F5600DB3E9}" type="pres">
+      <dgm:prSet presAssocID="{6A235716-E6C4-4C48-BBF8-9EDE254CFC59}" presName="parSpace" presStyleCnt="0"/>
+      <dgm:spPr/>
+    </dgm:pt>
+    <dgm:pt modelId="{2A4D7A28-35A9-4420-AE42-AAA3E22F9D0D}" type="pres">
+      <dgm:prSet presAssocID="{27CD36B1-0E0B-4ABA-ABCB-288F2C9E2DC9}" presName="desBackupLeftNorm" presStyleCnt="0"/>
+      <dgm:spPr/>
+    </dgm:pt>
+    <dgm:pt modelId="{F73C5570-DF01-4FA7-975B-F58FD8B6177A}" type="pres">
+      <dgm:prSet presAssocID="{27CD36B1-0E0B-4ABA-ABCB-288F2C9E2DC9}" presName="desComposite" presStyleCnt="0"/>
+      <dgm:spPr/>
+    </dgm:pt>
+    <dgm:pt modelId="{85C2DF8B-FA99-44FA-9B26-A20E12B532F5}" type="pres">
+      <dgm:prSet presAssocID="{27CD36B1-0E0B-4ABA-ABCB-288F2C9E2DC9}" presName="desCircle" presStyleLbl="node1" presStyleIdx="0" presStyleCnt="6"/>
+      <dgm:spPr/>
+    </dgm:pt>
+    <dgm:pt modelId="{2482210D-4F2F-435E-A11D-371BBB750FCB}" type="pres">
+      <dgm:prSet presAssocID="{27CD36B1-0E0B-4ABA-ABCB-288F2C9E2DC9}" presName="chTx" presStyleLbl="revTx" presStyleIdx="1" presStyleCnt="18"/>
+      <dgm:spPr/>
+      <dgm:t>
+        <a:bodyPr/>
+        <a:lstStyle/>
+        <a:p>
+          <a:endParaRPr lang="zh-CN" altLang="en-US"/>
+        </a:p>
+      </dgm:t>
+    </dgm:pt>
+    <dgm:pt modelId="{76131B10-D1B0-491E-8F17-3D8AA226E0B3}" type="pres">
+      <dgm:prSet presAssocID="{27CD36B1-0E0B-4ABA-ABCB-288F2C9E2DC9}" presName="desTx" presStyleLbl="revTx" presStyleIdx="2" presStyleCnt="18">
+        <dgm:presLayoutVars>
+          <dgm:bulletEnabled val="1"/>
+        </dgm:presLayoutVars>
+      </dgm:prSet>
+      <dgm:spPr/>
+    </dgm:pt>
+    <dgm:pt modelId="{7DB28B2E-E637-4E70-AD48-AB3F145E6D88}" type="pres">
+      <dgm:prSet presAssocID="{27CD36B1-0E0B-4ABA-ABCB-288F2C9E2DC9}" presName="desBackupRightNorm" presStyleCnt="0"/>
+      <dgm:spPr/>
+    </dgm:pt>
+    <dgm:pt modelId="{104F1F78-B0EA-46F5-80D7-51C397678BE4}" type="pres">
+      <dgm:prSet presAssocID="{18F8ECF6-33A9-452D-9F41-5C01054DDA42}" presName="desSpace" presStyleCnt="0"/>
+      <dgm:spPr/>
+    </dgm:pt>
+    <dgm:pt modelId="{8AE27E61-7FEE-4D72-89FB-B33FD4DBEF37}" type="pres">
+      <dgm:prSet presAssocID="{B117579F-3172-4837-8052-C96FE3E92213}" presName="parComposite" presStyleCnt="0"/>
+      <dgm:spPr/>
+    </dgm:pt>
+    <dgm:pt modelId="{1A1B2C4B-B1AF-4914-BA74-D77A74321F6D}" type="pres">
+      <dgm:prSet presAssocID="{B117579F-3172-4837-8052-C96FE3E92213}" presName="parBigCircle" presStyleLbl="node0" presStyleIdx="1" presStyleCnt="6"/>
+      <dgm:spPr/>
+    </dgm:pt>
+    <dgm:pt modelId="{674D326D-980D-4EAE-8718-54D436AD70BB}" type="pres">
+      <dgm:prSet presAssocID="{B117579F-3172-4837-8052-C96FE3E92213}" presName="parTx" presStyleLbl="revTx" presStyleIdx="3" presStyleCnt="18"/>
+      <dgm:spPr/>
+      <dgm:t>
+        <a:bodyPr/>
+        <a:lstStyle/>
+        <a:p>
+          <a:endParaRPr lang="zh-CN" altLang="en-US"/>
+        </a:p>
+      </dgm:t>
+    </dgm:pt>
+    <dgm:pt modelId="{EB667CC2-B2AB-4317-9980-5E210206A7E1}" type="pres">
+      <dgm:prSet presAssocID="{B117579F-3172-4837-8052-C96FE3E92213}" presName="bSpace" presStyleCnt="0"/>
+      <dgm:spPr/>
+    </dgm:pt>
+    <dgm:pt modelId="{3BC13DCF-1C49-40AE-AE65-0978B5BA874F}" type="pres">
+      <dgm:prSet presAssocID="{B117579F-3172-4837-8052-C96FE3E92213}" presName="parBackupNorm" presStyleCnt="0"/>
+      <dgm:spPr/>
+    </dgm:pt>
+    <dgm:pt modelId="{76CD20FD-5A2B-4CEB-B317-518316916950}" type="pres">
+      <dgm:prSet presAssocID="{E1CAED68-694D-409C-8E40-0C344C008673}" presName="parSpace" presStyleCnt="0"/>
+      <dgm:spPr/>
+    </dgm:pt>
+    <dgm:pt modelId="{CCD12751-D9E3-4387-BBF9-8F2AF6D49D1B}" type="pres">
+      <dgm:prSet presAssocID="{4197E540-D10F-4BDA-84C9-B2027B240EEB}" presName="desBackupLeftNorm" presStyleCnt="0"/>
+      <dgm:spPr/>
+    </dgm:pt>
+    <dgm:pt modelId="{B394CEEB-24B6-4BA8-A206-1534BEDAD694}" type="pres">
+      <dgm:prSet presAssocID="{4197E540-D10F-4BDA-84C9-B2027B240EEB}" presName="desComposite" presStyleCnt="0"/>
+      <dgm:spPr/>
+    </dgm:pt>
+    <dgm:pt modelId="{51C5ACA6-33FD-4668-B3B1-157C98F240BE}" type="pres">
+      <dgm:prSet presAssocID="{4197E540-D10F-4BDA-84C9-B2027B240EEB}" presName="desCircle" presStyleLbl="node1" presStyleIdx="1" presStyleCnt="6"/>
+      <dgm:spPr/>
+    </dgm:pt>
+    <dgm:pt modelId="{D80838CA-4B5F-4759-A83E-18025D22CD8E}" type="pres">
+      <dgm:prSet presAssocID="{4197E540-D10F-4BDA-84C9-B2027B240EEB}" presName="chTx" presStyleLbl="revTx" presStyleIdx="4" presStyleCnt="18"/>
       <dgm:spPr>
         <a:prstGeom prst="rect">
           <a:avLst/>
@@ -1758,32 +2015,32 @@
         </a:p>
       </dgm:t>
     </dgm:pt>
-    <dgm:pt modelId="{1BA0E56F-434D-4EE4-89C5-185FC0CE6AAD}" type="pres">
-      <dgm:prSet presAssocID="{28E50F4E-A211-4387-B97C-8204D2D63C7E}" presName="bSpace" presStyleCnt="0"/>
+    <dgm:pt modelId="{47163255-F5AC-461E-9A86-3B86DCAB719C}" type="pres">
+      <dgm:prSet presAssocID="{4197E540-D10F-4BDA-84C9-B2027B240EEB}" presName="desTx" presStyleLbl="revTx" presStyleIdx="5" presStyleCnt="18">
+        <dgm:presLayoutVars>
+          <dgm:bulletEnabled val="1"/>
+        </dgm:presLayoutVars>
+      </dgm:prSet>
       <dgm:spPr/>
     </dgm:pt>
-    <dgm:pt modelId="{EAEC0C39-E95A-4854-99AC-F1FAA31657FA}" type="pres">
-      <dgm:prSet presAssocID="{28E50F4E-A211-4387-B97C-8204D2D63C7E}" presName="parBackupNorm" presStyleCnt="0"/>
+    <dgm:pt modelId="{88A42219-4A4E-4479-8CC6-055AA19695B3}" type="pres">
+      <dgm:prSet presAssocID="{4197E540-D10F-4BDA-84C9-B2027B240EEB}" presName="desBackupRightNorm" presStyleCnt="0"/>
       <dgm:spPr/>
     </dgm:pt>
-    <dgm:pt modelId="{5744958A-2933-4B47-B6EB-7D7C8BFCEF84}" type="pres">
-      <dgm:prSet presAssocID="{7E88C0FE-9E9F-45D8-9EB3-4AB6E6B956AA}" presName="parSpace" presStyleCnt="0"/>
+    <dgm:pt modelId="{B7BAD771-7165-4F0A-8CDC-9C674DDAC5A6}" type="pres">
+      <dgm:prSet presAssocID="{6EE9F422-00AE-4222-BD4F-062656D802FD}" presName="desSpace" presStyleCnt="0"/>
       <dgm:spPr/>
     </dgm:pt>
-    <dgm:pt modelId="{CCD12751-D9E3-4387-BBF9-8F2AF6D49D1B}" type="pres">
-      <dgm:prSet presAssocID="{4197E540-D10F-4BDA-84C9-B2027B240EEB}" presName="desBackupLeftNorm" presStyleCnt="0"/>
+    <dgm:pt modelId="{C15A6055-885F-4223-8889-DE40F9C71E47}" type="pres">
+      <dgm:prSet presAssocID="{5A22019F-6F97-4DC3-963A-583D3D54A632}" presName="parComposite" presStyleCnt="0"/>
       <dgm:spPr/>
     </dgm:pt>
-    <dgm:pt modelId="{B394CEEB-24B6-4BA8-A206-1534BEDAD694}" type="pres">
-      <dgm:prSet presAssocID="{4197E540-D10F-4BDA-84C9-B2027B240EEB}" presName="desComposite" presStyleCnt="0"/>
+    <dgm:pt modelId="{9125244F-CAD2-40B8-B03E-EE53F57528C6}" type="pres">
+      <dgm:prSet presAssocID="{5A22019F-6F97-4DC3-963A-583D3D54A632}" presName="parBigCircle" presStyleLbl="node0" presStyleIdx="2" presStyleCnt="6"/>
       <dgm:spPr/>
     </dgm:pt>
-    <dgm:pt modelId="{51C5ACA6-33FD-4668-B3B1-157C98F240BE}" type="pres">
-      <dgm:prSet presAssocID="{4197E540-D10F-4BDA-84C9-B2027B240EEB}" presName="desCircle" presStyleLbl="node1" presStyleIdx="0" presStyleCnt="7"/>
-      <dgm:spPr/>
-    </dgm:pt>
-    <dgm:pt modelId="{D80838CA-4B5F-4759-A83E-18025D22CD8E}" type="pres">
-      <dgm:prSet presAssocID="{4197E540-D10F-4BDA-84C9-B2027B240EEB}" presName="chTx" presStyleLbl="revTx" presStyleIdx="1" presStyleCnt="19"/>
+    <dgm:pt modelId="{7D6BBD8D-95C7-4AC1-BA07-93F97F0B736B}" type="pres">
+      <dgm:prSet presAssocID="{5A22019F-6F97-4DC3-963A-583D3D54A632}" presName="parTx" presStyleLbl="revTx" presStyleIdx="6" presStyleCnt="18"/>
       <dgm:spPr>
         <a:prstGeom prst="rect">
           <a:avLst/>
@@ -1797,36 +2054,32 @@
         </a:p>
       </dgm:t>
     </dgm:pt>
-    <dgm:pt modelId="{47163255-F5AC-461E-9A86-3B86DCAB719C}" type="pres">
-      <dgm:prSet presAssocID="{4197E540-D10F-4BDA-84C9-B2027B240EEB}" presName="desTx" presStyleLbl="revTx" presStyleIdx="2" presStyleCnt="19">
-        <dgm:presLayoutVars>
-          <dgm:bulletEnabled val="1"/>
-        </dgm:presLayoutVars>
-      </dgm:prSet>
+    <dgm:pt modelId="{5AE3A114-82A7-404F-9E4B-DAE75E8E67F0}" type="pres">
+      <dgm:prSet presAssocID="{5A22019F-6F97-4DC3-963A-583D3D54A632}" presName="bSpace" presStyleCnt="0"/>
       <dgm:spPr/>
     </dgm:pt>
-    <dgm:pt modelId="{88A42219-4A4E-4479-8CC6-055AA19695B3}" type="pres">
-      <dgm:prSet presAssocID="{4197E540-D10F-4BDA-84C9-B2027B240EEB}" presName="desBackupRightNorm" presStyleCnt="0"/>
+    <dgm:pt modelId="{618FA1BC-D374-4EBB-922E-5A921DD9E5E1}" type="pres">
+      <dgm:prSet presAssocID="{5A22019F-6F97-4DC3-963A-583D3D54A632}" presName="parBackupNorm" presStyleCnt="0"/>
       <dgm:spPr/>
     </dgm:pt>
-    <dgm:pt modelId="{B7BAD771-7165-4F0A-8CDC-9C674DDAC5A6}" type="pres">
-      <dgm:prSet presAssocID="{6EE9F422-00AE-4222-BD4F-062656D802FD}" presName="desSpace" presStyleCnt="0"/>
+    <dgm:pt modelId="{8ADF5B02-C638-4F58-9A6C-30C09AC73306}" type="pres">
+      <dgm:prSet presAssocID="{40C46F67-A448-4DFF-9ACB-C354C5196E83}" presName="parSpace" presStyleCnt="0"/>
       <dgm:spPr/>
     </dgm:pt>
-    <dgm:pt modelId="{02DBAD80-0D72-42CC-B864-98974252703D}" type="pres">
-      <dgm:prSet presAssocID="{0AEA99DD-79F2-454B-89E9-FC77396C9F1D}" presName="desBackupLeftNorm" presStyleCnt="0"/>
+    <dgm:pt modelId="{02FA4610-B442-40C7-9DF1-5F9F97BE02EF}" type="pres">
+      <dgm:prSet presAssocID="{0AE14328-0EE2-49D7-98C5-68FCA23BDFFA}" presName="desBackupLeftNorm" presStyleCnt="0"/>
       <dgm:spPr/>
     </dgm:pt>
-    <dgm:pt modelId="{4FBFD1CE-5323-445E-AADD-EF55B1C740B1}" type="pres">
-      <dgm:prSet presAssocID="{0AEA99DD-79F2-454B-89E9-FC77396C9F1D}" presName="desComposite" presStyleCnt="0"/>
+    <dgm:pt modelId="{4FA3D958-E36A-4F8D-B2D9-8F7D4695CA93}" type="pres">
+      <dgm:prSet presAssocID="{0AE14328-0EE2-49D7-98C5-68FCA23BDFFA}" presName="desComposite" presStyleCnt="0"/>
       <dgm:spPr/>
     </dgm:pt>
-    <dgm:pt modelId="{5A8C3FAB-CD74-4F8F-AD16-04074F9041BF}" type="pres">
-      <dgm:prSet presAssocID="{0AEA99DD-79F2-454B-89E9-FC77396C9F1D}" presName="desCircle" presStyleLbl="node1" presStyleIdx="1" presStyleCnt="7"/>
+    <dgm:pt modelId="{49AD36DC-D62B-4D81-B989-C0C6E821265F}" type="pres">
+      <dgm:prSet presAssocID="{0AE14328-0EE2-49D7-98C5-68FCA23BDFFA}" presName="desCircle" presStyleLbl="node1" presStyleIdx="2" presStyleCnt="6"/>
       <dgm:spPr/>
     </dgm:pt>
-    <dgm:pt modelId="{FDF47E5F-174C-4606-A5A6-ED4628A0F400}" type="pres">
-      <dgm:prSet presAssocID="{0AEA99DD-79F2-454B-89E9-FC77396C9F1D}" presName="chTx" presStyleLbl="revTx" presStyleIdx="3" presStyleCnt="19"/>
+    <dgm:pt modelId="{BCF3A686-42B8-400D-ADAB-FFC1CE9C6893}" type="pres">
+      <dgm:prSet presAssocID="{0AE14328-0EE2-49D7-98C5-68FCA23BDFFA}" presName="chTx" presStyleLbl="revTx" presStyleIdx="7" presStyleCnt="18"/>
       <dgm:spPr>
         <a:prstGeom prst="rect">
           <a:avLst/>
@@ -1840,32 +2093,32 @@
         </a:p>
       </dgm:t>
     </dgm:pt>
-    <dgm:pt modelId="{703A9274-6AA5-4BA7-9F0C-49F5E848C1A2}" type="pres">
-      <dgm:prSet presAssocID="{0AEA99DD-79F2-454B-89E9-FC77396C9F1D}" presName="desTx" presStyleLbl="revTx" presStyleIdx="4" presStyleCnt="19">
+    <dgm:pt modelId="{C5E960F3-64F7-451A-9F71-5CC76AE5F505}" type="pres">
+      <dgm:prSet presAssocID="{0AE14328-0EE2-49D7-98C5-68FCA23BDFFA}" presName="desTx" presStyleLbl="revTx" presStyleIdx="8" presStyleCnt="18">
         <dgm:presLayoutVars>
           <dgm:bulletEnabled val="1"/>
         </dgm:presLayoutVars>
       </dgm:prSet>
       <dgm:spPr/>
     </dgm:pt>
-    <dgm:pt modelId="{5285B23C-3CF9-42E9-8D77-077E19872D98}" type="pres">
-      <dgm:prSet presAssocID="{0AEA99DD-79F2-454B-89E9-FC77396C9F1D}" presName="desBackupRightNorm" presStyleCnt="0"/>
+    <dgm:pt modelId="{B3721555-6618-4C3A-BD1F-E92CFD9683AB}" type="pres">
+      <dgm:prSet presAssocID="{0AE14328-0EE2-49D7-98C5-68FCA23BDFFA}" presName="desBackupRightNorm" presStyleCnt="0"/>
       <dgm:spPr/>
     </dgm:pt>
-    <dgm:pt modelId="{6876C169-0105-4B0F-8AF0-8569EB893E0E}" type="pres">
-      <dgm:prSet presAssocID="{602E552B-1247-4A9C-B655-B1B1185966C0}" presName="desSpace" presStyleCnt="0"/>
+    <dgm:pt modelId="{5AE349D2-CEB4-4AC6-AE04-44A62924D7CF}" type="pres">
+      <dgm:prSet presAssocID="{5E40F6E7-1E16-499D-BD19-570269F4F62E}" presName="desSpace" presStyleCnt="0"/>
       <dgm:spPr/>
     </dgm:pt>
-    <dgm:pt modelId="{C15A6055-885F-4223-8889-DE40F9C71E47}" type="pres">
-      <dgm:prSet presAssocID="{5A22019F-6F97-4DC3-963A-583D3D54A632}" presName="parComposite" presStyleCnt="0"/>
+    <dgm:pt modelId="{98C1E74A-8C95-49B9-99D3-43E036DDBE09}" type="pres">
+      <dgm:prSet presAssocID="{7FC2D584-30A6-449E-B7CA-341F5F62FAF5}" presName="parComposite" presStyleCnt="0"/>
       <dgm:spPr/>
     </dgm:pt>
-    <dgm:pt modelId="{9125244F-CAD2-40B8-B03E-EE53F57528C6}" type="pres">
-      <dgm:prSet presAssocID="{5A22019F-6F97-4DC3-963A-583D3D54A632}" presName="parBigCircle" presStyleLbl="node0" presStyleIdx="1" presStyleCnt="5"/>
+    <dgm:pt modelId="{625298DF-66F0-44EC-B355-04318A84B0F2}" type="pres">
+      <dgm:prSet presAssocID="{7FC2D584-30A6-449E-B7CA-341F5F62FAF5}" presName="parBigCircle" presStyleLbl="node0" presStyleIdx="3" presStyleCnt="6"/>
       <dgm:spPr/>
     </dgm:pt>
-    <dgm:pt modelId="{7D6BBD8D-95C7-4AC1-BA07-93F97F0B736B}" type="pres">
-      <dgm:prSet presAssocID="{5A22019F-6F97-4DC3-963A-583D3D54A632}" presName="parTx" presStyleLbl="revTx" presStyleIdx="5" presStyleCnt="19"/>
+    <dgm:pt modelId="{2B4BD85E-C901-45C5-8EB9-6B9FEE12A7BE}" type="pres">
+      <dgm:prSet presAssocID="{7FC2D584-30A6-449E-B7CA-341F5F62FAF5}" presName="parTx" presStyleLbl="revTx" presStyleIdx="9" presStyleCnt="18"/>
       <dgm:spPr>
         <a:prstGeom prst="rect">
           <a:avLst/>
@@ -1879,32 +2132,32 @@
         </a:p>
       </dgm:t>
     </dgm:pt>
-    <dgm:pt modelId="{5AE3A114-82A7-404F-9E4B-DAE75E8E67F0}" type="pres">
-      <dgm:prSet presAssocID="{5A22019F-6F97-4DC3-963A-583D3D54A632}" presName="bSpace" presStyleCnt="0"/>
+    <dgm:pt modelId="{761EFD8F-410E-414C-A480-BA932E71A143}" type="pres">
+      <dgm:prSet presAssocID="{7FC2D584-30A6-449E-B7CA-341F5F62FAF5}" presName="bSpace" presStyleCnt="0"/>
       <dgm:spPr/>
     </dgm:pt>
-    <dgm:pt modelId="{618FA1BC-D374-4EBB-922E-5A921DD9E5E1}" type="pres">
-      <dgm:prSet presAssocID="{5A22019F-6F97-4DC3-963A-583D3D54A632}" presName="parBackupNorm" presStyleCnt="0"/>
+    <dgm:pt modelId="{B82C08B3-DB74-4E36-B2E9-76F2AEEFB24B}" type="pres">
+      <dgm:prSet presAssocID="{7FC2D584-30A6-449E-B7CA-341F5F62FAF5}" presName="parBackupNorm" presStyleCnt="0"/>
       <dgm:spPr/>
     </dgm:pt>
-    <dgm:pt modelId="{8ADF5B02-C638-4F58-9A6C-30C09AC73306}" type="pres">
-      <dgm:prSet presAssocID="{40C46F67-A448-4DFF-9ACB-C354C5196E83}" presName="parSpace" presStyleCnt="0"/>
+    <dgm:pt modelId="{E0DB4E77-87D5-45B6-AD70-2CE9930ABB87}" type="pres">
+      <dgm:prSet presAssocID="{9BCC6C0B-54DD-42A5-A6A4-57FEEA70C7B5}" presName="parSpace" presStyleCnt="0"/>
       <dgm:spPr/>
     </dgm:pt>
-    <dgm:pt modelId="{02FA4610-B442-40C7-9DF1-5F9F97BE02EF}" type="pres">
-      <dgm:prSet presAssocID="{0AE14328-0EE2-49D7-98C5-68FCA23BDFFA}" presName="desBackupLeftNorm" presStyleCnt="0"/>
+    <dgm:pt modelId="{050B9D53-6469-4729-A9BE-E42DCEA4252C}" type="pres">
+      <dgm:prSet presAssocID="{65A643D8-FAD8-427F-B77E-324519DFF77F}" presName="desBackupLeftNorm" presStyleCnt="0"/>
       <dgm:spPr/>
     </dgm:pt>
-    <dgm:pt modelId="{4FA3D958-E36A-4F8D-B2D9-8F7D4695CA93}" type="pres">
-      <dgm:prSet presAssocID="{0AE14328-0EE2-49D7-98C5-68FCA23BDFFA}" presName="desComposite" presStyleCnt="0"/>
+    <dgm:pt modelId="{A169135A-8620-4269-A500-0BFE5F166735}" type="pres">
+      <dgm:prSet presAssocID="{65A643D8-FAD8-427F-B77E-324519DFF77F}" presName="desComposite" presStyleCnt="0"/>
       <dgm:spPr/>
     </dgm:pt>
-    <dgm:pt modelId="{49AD36DC-D62B-4D81-B989-C0C6E821265F}" type="pres">
-      <dgm:prSet presAssocID="{0AE14328-0EE2-49D7-98C5-68FCA23BDFFA}" presName="desCircle" presStyleLbl="node1" presStyleIdx="2" presStyleCnt="7"/>
+    <dgm:pt modelId="{DF89BFF2-B2D4-4325-85A2-579AFC2E967F}" type="pres">
+      <dgm:prSet presAssocID="{65A643D8-FAD8-427F-B77E-324519DFF77F}" presName="desCircle" presStyleLbl="node1" presStyleIdx="3" presStyleCnt="6"/>
       <dgm:spPr/>
     </dgm:pt>
-    <dgm:pt modelId="{BCF3A686-42B8-400D-ADAB-FFC1CE9C6893}" type="pres">
-      <dgm:prSet presAssocID="{0AE14328-0EE2-49D7-98C5-68FCA23BDFFA}" presName="chTx" presStyleLbl="revTx" presStyleIdx="6" presStyleCnt="19"/>
+    <dgm:pt modelId="{DB665163-915F-40A6-83DE-D9E80507F79D}" type="pres">
+      <dgm:prSet presAssocID="{65A643D8-FAD8-427F-B77E-324519DFF77F}" presName="chTx" presStyleLbl="revTx" presStyleIdx="10" presStyleCnt="18"/>
       <dgm:spPr>
         <a:prstGeom prst="rect">
           <a:avLst/>
@@ -1918,32 +2171,32 @@
         </a:p>
       </dgm:t>
     </dgm:pt>
-    <dgm:pt modelId="{C5E960F3-64F7-451A-9F71-5CC76AE5F505}" type="pres">
-      <dgm:prSet presAssocID="{0AE14328-0EE2-49D7-98C5-68FCA23BDFFA}" presName="desTx" presStyleLbl="revTx" presStyleIdx="7" presStyleCnt="19">
+    <dgm:pt modelId="{B929AC72-0696-4EEE-AFB6-7E192A81CD7E}" type="pres">
+      <dgm:prSet presAssocID="{65A643D8-FAD8-427F-B77E-324519DFF77F}" presName="desTx" presStyleLbl="revTx" presStyleIdx="11" presStyleCnt="18">
         <dgm:presLayoutVars>
           <dgm:bulletEnabled val="1"/>
         </dgm:presLayoutVars>
       </dgm:prSet>
       <dgm:spPr/>
     </dgm:pt>
-    <dgm:pt modelId="{B3721555-6618-4C3A-BD1F-E92CFD9683AB}" type="pres">
-      <dgm:prSet presAssocID="{0AE14328-0EE2-49D7-98C5-68FCA23BDFFA}" presName="desBackupRightNorm" presStyleCnt="0"/>
+    <dgm:pt modelId="{4C54F472-8EC0-43AD-AD8B-7B532BC9203C}" type="pres">
+      <dgm:prSet presAssocID="{65A643D8-FAD8-427F-B77E-324519DFF77F}" presName="desBackupRightNorm" presStyleCnt="0"/>
       <dgm:spPr/>
     </dgm:pt>
-    <dgm:pt modelId="{5AE349D2-CEB4-4AC6-AE04-44A62924D7CF}" type="pres">
-      <dgm:prSet presAssocID="{5E40F6E7-1E16-499D-BD19-570269F4F62E}" presName="desSpace" presStyleCnt="0"/>
+    <dgm:pt modelId="{A5C2DB3F-F2F5-4831-9AD1-C5C2EEE15AC9}" type="pres">
+      <dgm:prSet presAssocID="{A1CFAE85-B44C-4654-BCFF-0F4929233B2A}" presName="desSpace" presStyleCnt="0"/>
       <dgm:spPr/>
     </dgm:pt>
-    <dgm:pt modelId="{98C1E74A-8C95-49B9-99D3-43E036DDBE09}" type="pres">
-      <dgm:prSet presAssocID="{7FC2D584-30A6-449E-B7CA-341F5F62FAF5}" presName="parComposite" presStyleCnt="0"/>
+    <dgm:pt modelId="{4EF7231C-C9F1-4F91-8D1C-C63638405F91}" type="pres">
+      <dgm:prSet presAssocID="{1EAF32EF-2685-41DE-B527-A19EA257EFF2}" presName="parComposite" presStyleCnt="0"/>
       <dgm:spPr/>
     </dgm:pt>
-    <dgm:pt modelId="{625298DF-66F0-44EC-B355-04318A84B0F2}" type="pres">
-      <dgm:prSet presAssocID="{7FC2D584-30A6-449E-B7CA-341F5F62FAF5}" presName="parBigCircle" presStyleLbl="node0" presStyleIdx="2" presStyleCnt="5"/>
+    <dgm:pt modelId="{4AF980F5-1CFE-4F1C-8701-2120CCF8F1AB}" type="pres">
+      <dgm:prSet presAssocID="{1EAF32EF-2685-41DE-B527-A19EA257EFF2}" presName="parBigCircle" presStyleLbl="node0" presStyleIdx="4" presStyleCnt="6"/>
       <dgm:spPr/>
     </dgm:pt>
-    <dgm:pt modelId="{2B4BD85E-C901-45C5-8EB9-6B9FEE12A7BE}" type="pres">
-      <dgm:prSet presAssocID="{7FC2D584-30A6-449E-B7CA-341F5F62FAF5}" presName="parTx" presStyleLbl="revTx" presStyleIdx="8" presStyleCnt="19"/>
+    <dgm:pt modelId="{C21B92A9-8E32-499C-902E-F133C5092D1A}" type="pres">
+      <dgm:prSet presAssocID="{1EAF32EF-2685-41DE-B527-A19EA257EFF2}" presName="parTx" presStyleLbl="revTx" presStyleIdx="12" presStyleCnt="18"/>
       <dgm:spPr>
         <a:prstGeom prst="rect">
           <a:avLst/>
@@ -1957,32 +2210,32 @@
         </a:p>
       </dgm:t>
     </dgm:pt>
-    <dgm:pt modelId="{761EFD8F-410E-414C-A480-BA932E71A143}" type="pres">
-      <dgm:prSet presAssocID="{7FC2D584-30A6-449E-B7CA-341F5F62FAF5}" presName="bSpace" presStyleCnt="0"/>
+    <dgm:pt modelId="{1092A734-3D43-4CCE-BAAB-D03B6FB8C520}" type="pres">
+      <dgm:prSet presAssocID="{1EAF32EF-2685-41DE-B527-A19EA257EFF2}" presName="bSpace" presStyleCnt="0"/>
       <dgm:spPr/>
     </dgm:pt>
-    <dgm:pt modelId="{B82C08B3-DB74-4E36-B2E9-76F2AEEFB24B}" type="pres">
-      <dgm:prSet presAssocID="{7FC2D584-30A6-449E-B7CA-341F5F62FAF5}" presName="parBackupNorm" presStyleCnt="0"/>
+    <dgm:pt modelId="{8D515D9C-EF43-47B9-AC9A-09A87EDF6F3D}" type="pres">
+      <dgm:prSet presAssocID="{1EAF32EF-2685-41DE-B527-A19EA257EFF2}" presName="parBackupNorm" presStyleCnt="0"/>
       <dgm:spPr/>
     </dgm:pt>
-    <dgm:pt modelId="{E0DB4E77-87D5-45B6-AD70-2CE9930ABB87}" type="pres">
-      <dgm:prSet presAssocID="{9BCC6C0B-54DD-42A5-A6A4-57FEEA70C7B5}" presName="parSpace" presStyleCnt="0"/>
+    <dgm:pt modelId="{FAD7D391-55A1-4EEA-A99A-64E1406DFE67}" type="pres">
+      <dgm:prSet presAssocID="{C8B63689-AE32-480F-B66B-8481F7137AF6}" presName="parSpace" presStyleCnt="0"/>
       <dgm:spPr/>
     </dgm:pt>
-    <dgm:pt modelId="{050B9D53-6469-4729-A9BE-E42DCEA4252C}" type="pres">
-      <dgm:prSet presAssocID="{65A643D8-FAD8-427F-B77E-324519DFF77F}" presName="desBackupLeftNorm" presStyleCnt="0"/>
+    <dgm:pt modelId="{56DDD952-6F6A-4029-9D17-840952762844}" type="pres">
+      <dgm:prSet presAssocID="{8A6DB3FE-C39B-447E-9F35-B0AA149632E9}" presName="desBackupLeftNorm" presStyleCnt="0"/>
       <dgm:spPr/>
     </dgm:pt>
-    <dgm:pt modelId="{A169135A-8620-4269-A500-0BFE5F166735}" type="pres">
-      <dgm:prSet presAssocID="{65A643D8-FAD8-427F-B77E-324519DFF77F}" presName="desComposite" presStyleCnt="0"/>
+    <dgm:pt modelId="{BCEAA212-1E21-473A-810B-7B4A20144AC7}" type="pres">
+      <dgm:prSet presAssocID="{8A6DB3FE-C39B-447E-9F35-B0AA149632E9}" presName="desComposite" presStyleCnt="0"/>
       <dgm:spPr/>
     </dgm:pt>
-    <dgm:pt modelId="{DF89BFF2-B2D4-4325-85A2-579AFC2E967F}" type="pres">
-      <dgm:prSet presAssocID="{65A643D8-FAD8-427F-B77E-324519DFF77F}" presName="desCircle" presStyleLbl="node1" presStyleIdx="3" presStyleCnt="7"/>
+    <dgm:pt modelId="{E29272B0-1840-4ADB-9A86-4D800BA7660B}" type="pres">
+      <dgm:prSet presAssocID="{8A6DB3FE-C39B-447E-9F35-B0AA149632E9}" presName="desCircle" presStyleLbl="node1" presStyleIdx="4" presStyleCnt="6"/>
       <dgm:spPr/>
     </dgm:pt>
-    <dgm:pt modelId="{DB665163-915F-40A6-83DE-D9E80507F79D}" type="pres">
-      <dgm:prSet presAssocID="{65A643D8-FAD8-427F-B77E-324519DFF77F}" presName="chTx" presStyleLbl="revTx" presStyleIdx="9" presStyleCnt="19"/>
+    <dgm:pt modelId="{C289158A-F0C2-472A-B26B-AE3903472886}" type="pres">
+      <dgm:prSet presAssocID="{8A6DB3FE-C39B-447E-9F35-B0AA149632E9}" presName="chTx" presStyleLbl="revTx" presStyleIdx="13" presStyleCnt="18"/>
       <dgm:spPr>
         <a:prstGeom prst="rect">
           <a:avLst/>
@@ -1996,36 +2249,32 @@
         </a:p>
       </dgm:t>
     </dgm:pt>
-    <dgm:pt modelId="{B929AC72-0696-4EEE-AFB6-7E192A81CD7E}" type="pres">
-      <dgm:prSet presAssocID="{65A643D8-FAD8-427F-B77E-324519DFF77F}" presName="desTx" presStyleLbl="revTx" presStyleIdx="10" presStyleCnt="19">
+    <dgm:pt modelId="{C83A00C4-4E87-475C-B373-0648A481D8EB}" type="pres">
+      <dgm:prSet presAssocID="{8A6DB3FE-C39B-447E-9F35-B0AA149632E9}" presName="desTx" presStyleLbl="revTx" presStyleIdx="14" presStyleCnt="18">
         <dgm:presLayoutVars>
           <dgm:bulletEnabled val="1"/>
         </dgm:presLayoutVars>
       </dgm:prSet>
       <dgm:spPr/>
     </dgm:pt>
-    <dgm:pt modelId="{4C54F472-8EC0-43AD-AD8B-7B532BC9203C}" type="pres">
-      <dgm:prSet presAssocID="{65A643D8-FAD8-427F-B77E-324519DFF77F}" presName="desBackupRightNorm" presStyleCnt="0"/>
+    <dgm:pt modelId="{A93CA49B-3551-4E15-9F16-87C9D8940AB2}" type="pres">
+      <dgm:prSet presAssocID="{8A6DB3FE-C39B-447E-9F35-B0AA149632E9}" presName="desBackupRightNorm" presStyleCnt="0"/>
       <dgm:spPr/>
     </dgm:pt>
-    <dgm:pt modelId="{A5C2DB3F-F2F5-4831-9AD1-C5C2EEE15AC9}" type="pres">
-      <dgm:prSet presAssocID="{A1CFAE85-B44C-4654-BCFF-0F4929233B2A}" presName="desSpace" presStyleCnt="0"/>
+    <dgm:pt modelId="{4BAB3AD8-192C-45AF-ABFF-EB2AC676A747}" type="pres">
+      <dgm:prSet presAssocID="{092AA806-E93B-48B2-8CC6-74C5945CE54C}" presName="desSpace" presStyleCnt="0"/>
       <dgm:spPr/>
     </dgm:pt>
-    <dgm:pt modelId="{B8B811F7-882B-401A-954A-0AD56A2EE973}" type="pres">
-      <dgm:prSet presAssocID="{4270397F-DBF8-4AC4-AA3F-CA10089E7FBE}" presName="desBackupLeftNorm" presStyleCnt="0"/>
+    <dgm:pt modelId="{BDD180BB-E7D6-424B-BB10-543442B20526}" type="pres">
+      <dgm:prSet presAssocID="{C4843CC7-1E96-4B59-9DC6-ACB4F823B6CA}" presName="parComposite" presStyleCnt="0"/>
       <dgm:spPr/>
     </dgm:pt>
-    <dgm:pt modelId="{CB96842E-0788-4F05-AA79-9548A70F8222}" type="pres">
-      <dgm:prSet presAssocID="{4270397F-DBF8-4AC4-AA3F-CA10089E7FBE}" presName="desComposite" presStyleCnt="0"/>
+    <dgm:pt modelId="{C91E5157-B099-45D6-9AF6-5D780FCC0741}" type="pres">
+      <dgm:prSet presAssocID="{C4843CC7-1E96-4B59-9DC6-ACB4F823B6CA}" presName="parBigCircle" presStyleLbl="node0" presStyleIdx="5" presStyleCnt="6"/>
       <dgm:spPr/>
     </dgm:pt>
-    <dgm:pt modelId="{F624D2FA-8824-4453-8B9E-084D7FB18D3E}" type="pres">
-      <dgm:prSet presAssocID="{4270397F-DBF8-4AC4-AA3F-CA10089E7FBE}" presName="desCircle" presStyleLbl="node1" presStyleIdx="4" presStyleCnt="7"/>
-      <dgm:spPr/>
-    </dgm:pt>
-    <dgm:pt modelId="{31799780-C26C-41A7-A8A3-0C5BAE591647}" type="pres">
-      <dgm:prSet presAssocID="{4270397F-DBF8-4AC4-AA3F-CA10089E7FBE}" presName="chTx" presStyleLbl="revTx" presStyleIdx="11" presStyleCnt="19"/>
+    <dgm:pt modelId="{BD32F408-1A1D-4F3B-9E8F-4018961D8EE0}" type="pres">
+      <dgm:prSet presAssocID="{C4843CC7-1E96-4B59-9DC6-ACB4F823B6CA}" presName="parTx" presStyleLbl="revTx" presStyleIdx="15" presStyleCnt="18"/>
       <dgm:spPr>
         <a:prstGeom prst="rect">
           <a:avLst/>
@@ -2039,32 +2288,32 @@
         </a:p>
       </dgm:t>
     </dgm:pt>
-    <dgm:pt modelId="{036BAE8B-0596-41F6-8DFC-775AE3DB2F75}" type="pres">
-      <dgm:prSet presAssocID="{4270397F-DBF8-4AC4-AA3F-CA10089E7FBE}" presName="desTx" presStyleLbl="revTx" presStyleIdx="12" presStyleCnt="19">
-        <dgm:presLayoutVars>
-          <dgm:bulletEnabled val="1"/>
-        </dgm:presLayoutVars>
-      </dgm:prSet>
+    <dgm:pt modelId="{AFA50EA1-01B9-4434-81F0-09F78468F491}" type="pres">
+      <dgm:prSet presAssocID="{C4843CC7-1E96-4B59-9DC6-ACB4F823B6CA}" presName="bSpace" presStyleCnt="0"/>
       <dgm:spPr/>
     </dgm:pt>
-    <dgm:pt modelId="{FB53BAAE-1CD1-48B9-A5BE-862EFED7558E}" type="pres">
-      <dgm:prSet presAssocID="{4270397F-DBF8-4AC4-AA3F-CA10089E7FBE}" presName="desBackupRightNorm" presStyleCnt="0"/>
+    <dgm:pt modelId="{A8705CB7-3A00-47B5-9D67-6B49167A9F5F}" type="pres">
+      <dgm:prSet presAssocID="{C4843CC7-1E96-4B59-9DC6-ACB4F823B6CA}" presName="parBackupNorm" presStyleCnt="0"/>
       <dgm:spPr/>
     </dgm:pt>
-    <dgm:pt modelId="{B2162B41-715E-4E22-A94D-F9469031B90D}" type="pres">
-      <dgm:prSet presAssocID="{4C7CC020-5C91-4D36-A3D2-5B6892F678CD}" presName="desSpace" presStyleCnt="0"/>
+    <dgm:pt modelId="{5F85F400-DB07-4C0F-B47D-3E3A119A97E2}" type="pres">
+      <dgm:prSet presAssocID="{E03609D5-4748-4E3C-8F59-7CA6A6BDD666}" presName="parSpace" presStyleCnt="0"/>
       <dgm:spPr/>
     </dgm:pt>
-    <dgm:pt modelId="{4EF7231C-C9F1-4F91-8D1C-C63638405F91}" type="pres">
-      <dgm:prSet presAssocID="{1EAF32EF-2685-41DE-B527-A19EA257EFF2}" presName="parComposite" presStyleCnt="0"/>
+    <dgm:pt modelId="{4CC69F9E-9C44-4FE7-A5D1-837B7F7500F9}" type="pres">
+      <dgm:prSet presAssocID="{EA1701F6-7B57-4B04-9E00-64FC8D153085}" presName="desBackupLeftNorm" presStyleCnt="0"/>
       <dgm:spPr/>
     </dgm:pt>
-    <dgm:pt modelId="{4AF980F5-1CFE-4F1C-8701-2120CCF8F1AB}" type="pres">
-      <dgm:prSet presAssocID="{1EAF32EF-2685-41DE-B527-A19EA257EFF2}" presName="parBigCircle" presStyleLbl="node0" presStyleIdx="3" presStyleCnt="5"/>
+    <dgm:pt modelId="{DC1E3BC9-F45A-46BD-AE86-CB151878B25B}" type="pres">
+      <dgm:prSet presAssocID="{EA1701F6-7B57-4B04-9E00-64FC8D153085}" presName="desComposite" presStyleCnt="0"/>
       <dgm:spPr/>
     </dgm:pt>
-    <dgm:pt modelId="{C21B92A9-8E32-499C-902E-F133C5092D1A}" type="pres">
-      <dgm:prSet presAssocID="{1EAF32EF-2685-41DE-B527-A19EA257EFF2}" presName="parTx" presStyleLbl="revTx" presStyleIdx="13" presStyleCnt="19"/>
+    <dgm:pt modelId="{FA37A83F-DCFE-4930-B762-BA4ACC7C2CF7}" type="pres">
+      <dgm:prSet presAssocID="{EA1701F6-7B57-4B04-9E00-64FC8D153085}" presName="desCircle" presStyleLbl="node1" presStyleIdx="5" presStyleCnt="6"/>
+      <dgm:spPr/>
+    </dgm:pt>
+    <dgm:pt modelId="{C74C4CD4-620A-4D12-877A-4F2671E6851F}" type="pres">
+      <dgm:prSet presAssocID="{EA1701F6-7B57-4B04-9E00-64FC8D153085}" presName="chTx" presStyleLbl="revTx" presStyleIdx="16" presStyleCnt="18"/>
       <dgm:spPr>
         <a:prstGeom prst="rect">
           <a:avLst/>
@@ -2078,131 +2327,14 @@
         </a:p>
       </dgm:t>
     </dgm:pt>
-    <dgm:pt modelId="{1092A734-3D43-4CCE-BAAB-D03B6FB8C520}" type="pres">
-      <dgm:prSet presAssocID="{1EAF32EF-2685-41DE-B527-A19EA257EFF2}" presName="bSpace" presStyleCnt="0"/>
-      <dgm:spPr/>
-    </dgm:pt>
-    <dgm:pt modelId="{8D515D9C-EF43-47B9-AC9A-09A87EDF6F3D}" type="pres">
-      <dgm:prSet presAssocID="{1EAF32EF-2685-41DE-B527-A19EA257EFF2}" presName="parBackupNorm" presStyleCnt="0"/>
-      <dgm:spPr/>
-    </dgm:pt>
-    <dgm:pt modelId="{FAD7D391-55A1-4EEA-A99A-64E1406DFE67}" type="pres">
-      <dgm:prSet presAssocID="{C8B63689-AE32-480F-B66B-8481F7137AF6}" presName="parSpace" presStyleCnt="0"/>
-      <dgm:spPr/>
-    </dgm:pt>
-    <dgm:pt modelId="{56DDD952-6F6A-4029-9D17-840952762844}" type="pres">
-      <dgm:prSet presAssocID="{8A6DB3FE-C39B-447E-9F35-B0AA149632E9}" presName="desBackupLeftNorm" presStyleCnt="0"/>
-      <dgm:spPr/>
-    </dgm:pt>
-    <dgm:pt modelId="{BCEAA212-1E21-473A-810B-7B4A20144AC7}" type="pres">
-      <dgm:prSet presAssocID="{8A6DB3FE-C39B-447E-9F35-B0AA149632E9}" presName="desComposite" presStyleCnt="0"/>
-      <dgm:spPr/>
-    </dgm:pt>
-    <dgm:pt modelId="{E29272B0-1840-4ADB-9A86-4D800BA7660B}" type="pres">
-      <dgm:prSet presAssocID="{8A6DB3FE-C39B-447E-9F35-B0AA149632E9}" presName="desCircle" presStyleLbl="node1" presStyleIdx="5" presStyleCnt="7"/>
-      <dgm:spPr/>
-    </dgm:pt>
-    <dgm:pt modelId="{C289158A-F0C2-472A-B26B-AE3903472886}" type="pres">
-      <dgm:prSet presAssocID="{8A6DB3FE-C39B-447E-9F35-B0AA149632E9}" presName="chTx" presStyleLbl="revTx" presStyleIdx="14" presStyleCnt="19"/>
-      <dgm:spPr>
-        <a:prstGeom prst="rect">
-          <a:avLst/>
-        </a:prstGeom>
-      </dgm:spPr>
-      <dgm:t>
-        <a:bodyPr/>
-        <a:lstStyle/>
-        <a:p>
-          <a:endParaRPr lang="zh-CN"/>
-        </a:p>
-      </dgm:t>
-    </dgm:pt>
-    <dgm:pt modelId="{C83A00C4-4E87-475C-B373-0648A481D8EB}" type="pres">
-      <dgm:prSet presAssocID="{8A6DB3FE-C39B-447E-9F35-B0AA149632E9}" presName="desTx" presStyleLbl="revTx" presStyleIdx="15" presStyleCnt="19">
+    <dgm:pt modelId="{FCF7FA09-DF88-4A61-9695-0DC36D268D20}" type="pres">
+      <dgm:prSet presAssocID="{EA1701F6-7B57-4B04-9E00-64FC8D153085}" presName="desTx" presStyleLbl="revTx" presStyleIdx="17" presStyleCnt="18">
         <dgm:presLayoutVars>
           <dgm:bulletEnabled val="1"/>
         </dgm:presLayoutVars>
       </dgm:prSet>
       <dgm:spPr/>
     </dgm:pt>
-    <dgm:pt modelId="{A93CA49B-3551-4E15-9F16-87C9D8940AB2}" type="pres">
-      <dgm:prSet presAssocID="{8A6DB3FE-C39B-447E-9F35-B0AA149632E9}" presName="desBackupRightNorm" presStyleCnt="0"/>
-      <dgm:spPr/>
-    </dgm:pt>
-    <dgm:pt modelId="{4BAB3AD8-192C-45AF-ABFF-EB2AC676A747}" type="pres">
-      <dgm:prSet presAssocID="{092AA806-E93B-48B2-8CC6-74C5945CE54C}" presName="desSpace" presStyleCnt="0"/>
-      <dgm:spPr/>
-    </dgm:pt>
-    <dgm:pt modelId="{BDD180BB-E7D6-424B-BB10-543442B20526}" type="pres">
-      <dgm:prSet presAssocID="{C4843CC7-1E96-4B59-9DC6-ACB4F823B6CA}" presName="parComposite" presStyleCnt="0"/>
-      <dgm:spPr/>
-    </dgm:pt>
-    <dgm:pt modelId="{C91E5157-B099-45D6-9AF6-5D780FCC0741}" type="pres">
-      <dgm:prSet presAssocID="{C4843CC7-1E96-4B59-9DC6-ACB4F823B6CA}" presName="parBigCircle" presStyleLbl="node0" presStyleIdx="4" presStyleCnt="5"/>
-      <dgm:spPr/>
-    </dgm:pt>
-    <dgm:pt modelId="{BD32F408-1A1D-4F3B-9E8F-4018961D8EE0}" type="pres">
-      <dgm:prSet presAssocID="{C4843CC7-1E96-4B59-9DC6-ACB4F823B6CA}" presName="parTx" presStyleLbl="revTx" presStyleIdx="16" presStyleCnt="19"/>
-      <dgm:spPr>
-        <a:prstGeom prst="rect">
-          <a:avLst/>
-        </a:prstGeom>
-      </dgm:spPr>
-      <dgm:t>
-        <a:bodyPr/>
-        <a:lstStyle/>
-        <a:p>
-          <a:endParaRPr lang="zh-CN"/>
-        </a:p>
-      </dgm:t>
-    </dgm:pt>
-    <dgm:pt modelId="{AFA50EA1-01B9-4434-81F0-09F78468F491}" type="pres">
-      <dgm:prSet presAssocID="{C4843CC7-1E96-4B59-9DC6-ACB4F823B6CA}" presName="bSpace" presStyleCnt="0"/>
-      <dgm:spPr/>
-    </dgm:pt>
-    <dgm:pt modelId="{A8705CB7-3A00-47B5-9D67-6B49167A9F5F}" type="pres">
-      <dgm:prSet presAssocID="{C4843CC7-1E96-4B59-9DC6-ACB4F823B6CA}" presName="parBackupNorm" presStyleCnt="0"/>
-      <dgm:spPr/>
-    </dgm:pt>
-    <dgm:pt modelId="{5F85F400-DB07-4C0F-B47D-3E3A119A97E2}" type="pres">
-      <dgm:prSet presAssocID="{E03609D5-4748-4E3C-8F59-7CA6A6BDD666}" presName="parSpace" presStyleCnt="0"/>
-      <dgm:spPr/>
-    </dgm:pt>
-    <dgm:pt modelId="{4CC69F9E-9C44-4FE7-A5D1-837B7F7500F9}" type="pres">
-      <dgm:prSet presAssocID="{EA1701F6-7B57-4B04-9E00-64FC8D153085}" presName="desBackupLeftNorm" presStyleCnt="0"/>
-      <dgm:spPr/>
-    </dgm:pt>
-    <dgm:pt modelId="{DC1E3BC9-F45A-46BD-AE86-CB151878B25B}" type="pres">
-      <dgm:prSet presAssocID="{EA1701F6-7B57-4B04-9E00-64FC8D153085}" presName="desComposite" presStyleCnt="0"/>
-      <dgm:spPr/>
-    </dgm:pt>
-    <dgm:pt modelId="{FA37A83F-DCFE-4930-B762-BA4ACC7C2CF7}" type="pres">
-      <dgm:prSet presAssocID="{EA1701F6-7B57-4B04-9E00-64FC8D153085}" presName="desCircle" presStyleLbl="node1" presStyleIdx="6" presStyleCnt="7"/>
-      <dgm:spPr/>
-    </dgm:pt>
-    <dgm:pt modelId="{C74C4CD4-620A-4D12-877A-4F2671E6851F}" type="pres">
-      <dgm:prSet presAssocID="{EA1701F6-7B57-4B04-9E00-64FC8D153085}" presName="chTx" presStyleLbl="revTx" presStyleIdx="17" presStyleCnt="19"/>
-      <dgm:spPr>
-        <a:prstGeom prst="rect">
-          <a:avLst/>
-        </a:prstGeom>
-      </dgm:spPr>
-      <dgm:t>
-        <a:bodyPr/>
-        <a:lstStyle/>
-        <a:p>
-          <a:endParaRPr lang="zh-CN"/>
-        </a:p>
-      </dgm:t>
-    </dgm:pt>
-    <dgm:pt modelId="{FCF7FA09-DF88-4A61-9695-0DC36D268D20}" type="pres">
-      <dgm:prSet presAssocID="{EA1701F6-7B57-4B04-9E00-64FC8D153085}" presName="desTx" presStyleLbl="revTx" presStyleIdx="18" presStyleCnt="19">
-        <dgm:presLayoutVars>
-          <dgm:bulletEnabled val="1"/>
-        </dgm:presLayoutVars>
-      </dgm:prSet>
-      <dgm:spPr/>
-    </dgm:pt>
     <dgm:pt modelId="{7F95D454-9277-4E23-8DA0-31E0BC467B99}" type="pres">
       <dgm:prSet presAssocID="{EA1701F6-7B57-4B04-9E00-64FC8D153085}" presName="desBackupRightNorm" presStyleCnt="0"/>
       <dgm:spPr/>
@@ -2213,110 +2345,109 @@
     </dgm:pt>
   </dgm:ptLst>
   <dgm:cxnLst>
-    <dgm:cxn modelId="{39AF9F84-592C-4715-B816-2A454335FA6D}" srcId="{E4EAE2BA-E6E9-47BE-90DA-7CC8F543793A}" destId="{5A22019F-6F97-4DC3-963A-583D3D54A632}" srcOrd="1" destOrd="0" parTransId="{B9D94E7B-0198-4684-BCA7-D1F15AB8F901}" sibTransId="{40C46F67-A448-4DFF-9ACB-C354C5196E83}"/>
-    <dgm:cxn modelId="{9E4E564B-7449-488A-A98A-627F84C86B7B}" srcId="{7FC2D584-30A6-449E-B7CA-341F5F62FAF5}" destId="{4270397F-DBF8-4AC4-AA3F-CA10089E7FBE}" srcOrd="1" destOrd="0" parTransId="{75FF98B8-82E9-41E5-83D6-CFAB184BF2CA}" sibTransId="{4C7CC020-5C91-4D36-A3D2-5B6892F678CD}"/>
+    <dgm:cxn modelId="{39AF9F84-592C-4715-B816-2A454335FA6D}" srcId="{E4EAE2BA-E6E9-47BE-90DA-7CC8F543793A}" destId="{5A22019F-6F97-4DC3-963A-583D3D54A632}" srcOrd="2" destOrd="0" parTransId="{B9D94E7B-0198-4684-BCA7-D1F15AB8F901}" sibTransId="{40C46F67-A448-4DFF-9ACB-C354C5196E83}"/>
     <dgm:cxn modelId="{59B5F25D-30E8-4569-8419-4CD75F6417C0}" type="presOf" srcId="{65A643D8-FAD8-427F-B77E-324519DFF77F}" destId="{DB665163-915F-40A6-83DE-D9E80507F79D}" srcOrd="0" destOrd="0" presId="urn:microsoft.com/office/officeart/2008/layout/CircleAccentTimeline"/>
     <dgm:cxn modelId="{DE067B6E-5705-40C5-95E8-34489ECF6FE3}" srcId="{1EAF32EF-2685-41DE-B527-A19EA257EFF2}" destId="{8A6DB3FE-C39B-447E-9F35-B0AA149632E9}" srcOrd="0" destOrd="0" parTransId="{59337257-76BB-40A8-A3C4-453905802E16}" sibTransId="{092AA806-E93B-48B2-8CC6-74C5945CE54C}"/>
-    <dgm:cxn modelId="{22B998FB-6DA3-44DE-8039-70A44451540E}" srcId="{E4EAE2BA-E6E9-47BE-90DA-7CC8F543793A}" destId="{28E50F4E-A211-4387-B97C-8204D2D63C7E}" srcOrd="0" destOrd="0" parTransId="{3ECDEA85-0997-4DE7-BDA1-9D27574A1BE6}" sibTransId="{7E88C0FE-9E9F-45D8-9EB3-4AB6E6B956AA}"/>
     <dgm:cxn modelId="{C6F2B1DC-45B7-4671-950A-8EB8536BE227}" type="presOf" srcId="{0AE14328-0EE2-49D7-98C5-68FCA23BDFFA}" destId="{BCF3A686-42B8-400D-ADAB-FFC1CE9C6893}" srcOrd="0" destOrd="0" presId="urn:microsoft.com/office/officeart/2008/layout/CircleAccentTimeline"/>
-    <dgm:cxn modelId="{037D1ED7-9660-475E-907C-F4AD249CA9F1}" srcId="{28E50F4E-A211-4387-B97C-8204D2D63C7E}" destId="{4197E540-D10F-4BDA-84C9-B2027B240EEB}" srcOrd="0" destOrd="0" parTransId="{78BB0D03-C1B0-4614-BB63-23D6CFFED62B}" sibTransId="{6EE9F422-00AE-4222-BD4F-062656D802FD}"/>
+    <dgm:cxn modelId="{037D1ED7-9660-475E-907C-F4AD249CA9F1}" srcId="{B117579F-3172-4837-8052-C96FE3E92213}" destId="{4197E540-D10F-4BDA-84C9-B2027B240EEB}" srcOrd="0" destOrd="0" parTransId="{78BB0D03-C1B0-4614-BB63-23D6CFFED62B}" sibTransId="{6EE9F422-00AE-4222-BD4F-062656D802FD}"/>
     <dgm:cxn modelId="{E018242C-1169-433E-8AA7-F111377B7F25}" type="presOf" srcId="{5A22019F-6F97-4DC3-963A-583D3D54A632}" destId="{7D6BBD8D-95C7-4AC1-BA07-93F97F0B736B}" srcOrd="0" destOrd="0" presId="urn:microsoft.com/office/officeart/2008/layout/CircleAccentTimeline"/>
     <dgm:cxn modelId="{5943E10D-D01C-48EB-A84E-085470923B17}" type="presOf" srcId="{1EAF32EF-2685-41DE-B527-A19EA257EFF2}" destId="{C21B92A9-8E32-499C-902E-F133C5092D1A}" srcOrd="0" destOrd="0" presId="urn:microsoft.com/office/officeart/2008/layout/CircleAccentTimeline"/>
     <dgm:cxn modelId="{3603CE7F-B3FC-4746-835B-FEBA7784AF37}" srcId="{7FC2D584-30A6-449E-B7CA-341F5F62FAF5}" destId="{65A643D8-FAD8-427F-B77E-324519DFF77F}" srcOrd="0" destOrd="0" parTransId="{9B490BD3-91C5-4AD9-B795-4720D22F1C89}" sibTransId="{A1CFAE85-B44C-4654-BCFF-0F4929233B2A}"/>
+    <dgm:cxn modelId="{863EFA21-C54E-4210-BDE7-A560B0A519BC}" srcId="{E4EAE2BA-E6E9-47BE-90DA-7CC8F543793A}" destId="{744753AB-D893-4316-BFC3-F9FDB847355A}" srcOrd="0" destOrd="0" parTransId="{4F23A9AC-6D0F-45B0-9264-B0CDB1165326}" sibTransId="{6A235716-E6C4-4C48-BBF8-9EDE254CFC59}"/>
     <dgm:cxn modelId="{14650854-4170-4942-A8CA-8BDABCA8AAC5}" type="presOf" srcId="{8A6DB3FE-C39B-447E-9F35-B0AA149632E9}" destId="{C289158A-F0C2-472A-B26B-AE3903472886}" srcOrd="0" destOrd="0" presId="urn:microsoft.com/office/officeart/2008/layout/CircleAccentTimeline"/>
     <dgm:cxn modelId="{29AFF724-CA27-4788-8EDC-9CA3F39AD51A}" type="presOf" srcId="{7FC2D584-30A6-449E-B7CA-341F5F62FAF5}" destId="{2B4BD85E-C901-45C5-8EB9-6B9FEE12A7BE}" srcOrd="0" destOrd="0" presId="urn:microsoft.com/office/officeart/2008/layout/CircleAccentTimeline"/>
-    <dgm:cxn modelId="{F3DB4BDB-5680-409E-AD72-10A094822C37}" type="presOf" srcId="{0AEA99DD-79F2-454B-89E9-FC77396C9F1D}" destId="{FDF47E5F-174C-4606-A5A6-ED4628A0F400}" srcOrd="0" destOrd="0" presId="urn:microsoft.com/office/officeart/2008/layout/CircleAccentTimeline"/>
-    <dgm:cxn modelId="{92BC2B9A-152A-4382-BEB0-4E0D07B20719}" type="presOf" srcId="{28E50F4E-A211-4387-B97C-8204D2D63C7E}" destId="{66FE321E-6221-430D-95E7-19DBF56E205F}" srcOrd="0" destOrd="0" presId="urn:microsoft.com/office/officeart/2008/layout/CircleAccentTimeline"/>
-    <dgm:cxn modelId="{270815E9-4A88-4DB4-9040-920BB982ABD8}" srcId="{E4EAE2BA-E6E9-47BE-90DA-7CC8F543793A}" destId="{1EAF32EF-2685-41DE-B527-A19EA257EFF2}" srcOrd="3" destOrd="0" parTransId="{180ECF10-61BF-4891-A06A-93E397C04263}" sibTransId="{C8B63689-AE32-480F-B66B-8481F7137AF6}"/>
+    <dgm:cxn modelId="{880B01CE-D12B-4982-8970-2E587779E38A}" srcId="{744753AB-D893-4316-BFC3-F9FDB847355A}" destId="{27CD36B1-0E0B-4ABA-ABCB-288F2C9E2DC9}" srcOrd="0" destOrd="0" parTransId="{5C483E7F-5130-4220-A8C0-C9E7B9C77FAA}" sibTransId="{18F8ECF6-33A9-452D-9F41-5C01054DDA42}"/>
+    <dgm:cxn modelId="{6BF08915-1464-4211-A240-45D1ADE87FEB}" type="presOf" srcId="{27CD36B1-0E0B-4ABA-ABCB-288F2C9E2DC9}" destId="{2482210D-4F2F-435E-A11D-371BBB750FCB}" srcOrd="0" destOrd="0" presId="urn:microsoft.com/office/officeart/2008/layout/CircleAccentTimeline"/>
+    <dgm:cxn modelId="{E9B384BE-395A-414F-86A0-496E38C1C3CC}" type="presOf" srcId="{744753AB-D893-4316-BFC3-F9FDB847355A}" destId="{04BACD90-9830-4A1B-97D6-187F0E533766}" srcOrd="0" destOrd="0" presId="urn:microsoft.com/office/officeart/2008/layout/CircleAccentTimeline"/>
+    <dgm:cxn modelId="{270815E9-4A88-4DB4-9040-920BB982ABD8}" srcId="{E4EAE2BA-E6E9-47BE-90DA-7CC8F543793A}" destId="{1EAF32EF-2685-41DE-B527-A19EA257EFF2}" srcOrd="4" destOrd="0" parTransId="{180ECF10-61BF-4891-A06A-93E397C04263}" sibTransId="{C8B63689-AE32-480F-B66B-8481F7137AF6}"/>
     <dgm:cxn modelId="{4E6CF8B6-3BDF-44AC-84F1-C22534B9AB33}" type="presOf" srcId="{4197E540-D10F-4BDA-84C9-B2027B240EEB}" destId="{D80838CA-4B5F-4759-A83E-18025D22CD8E}" srcOrd="0" destOrd="0" presId="urn:microsoft.com/office/officeart/2008/layout/CircleAccentTimeline"/>
     <dgm:cxn modelId="{7B499043-54DA-41CA-902C-2E1F7343C8CF}" type="presOf" srcId="{E4EAE2BA-E6E9-47BE-90DA-7CC8F543793A}" destId="{C666E99A-EA2A-4513-B163-536A725EC1D4}" srcOrd="0" destOrd="0" presId="urn:microsoft.com/office/officeart/2008/layout/CircleAccentTimeline"/>
-    <dgm:cxn modelId="{A81889D7-B4F1-469E-A91B-D36894BED34C}" srcId="{E4EAE2BA-E6E9-47BE-90DA-7CC8F543793A}" destId="{C4843CC7-1E96-4B59-9DC6-ACB4F823B6CA}" srcOrd="4" destOrd="0" parTransId="{B45DE71B-8C61-4A29-BBB0-5AA953CF7542}" sibTransId="{E03609D5-4748-4E3C-8F59-7CA6A6BDD666}"/>
+    <dgm:cxn modelId="{A81889D7-B4F1-469E-A91B-D36894BED34C}" srcId="{E4EAE2BA-E6E9-47BE-90DA-7CC8F543793A}" destId="{C4843CC7-1E96-4B59-9DC6-ACB4F823B6CA}" srcOrd="5" destOrd="0" parTransId="{B45DE71B-8C61-4A29-BBB0-5AA953CF7542}" sibTransId="{E03609D5-4748-4E3C-8F59-7CA6A6BDD666}"/>
+    <dgm:cxn modelId="{CF1040A0-C48E-458F-8677-C8F9CD1F9ACB}" srcId="{E4EAE2BA-E6E9-47BE-90DA-7CC8F543793A}" destId="{B117579F-3172-4837-8052-C96FE3E92213}" srcOrd="1" destOrd="0" parTransId="{448C9103-6AF6-4EE2-9022-F70A54726CD5}" sibTransId="{E1CAED68-694D-409C-8E40-0C344C008673}"/>
     <dgm:cxn modelId="{AA493673-DAC7-4571-B247-A7E1C831035C}" srcId="{C4843CC7-1E96-4B59-9DC6-ACB4F823B6CA}" destId="{EA1701F6-7B57-4B04-9E00-64FC8D153085}" srcOrd="0" destOrd="0" parTransId="{A6530B81-68FB-4CB6-934B-339EA4E796B5}" sibTransId="{7CDBA56F-B9FD-42B0-9B00-3DC230E39858}"/>
     <dgm:cxn modelId="{B4B25CA1-CE95-45E6-AB63-0DF1EBA23F1D}" type="presOf" srcId="{EA1701F6-7B57-4B04-9E00-64FC8D153085}" destId="{C74C4CD4-620A-4D12-877A-4F2671E6851F}" srcOrd="0" destOrd="0" presId="urn:microsoft.com/office/officeart/2008/layout/CircleAccentTimeline"/>
-    <dgm:cxn modelId="{283F8578-61AB-4F3A-B8D5-79928B6E421A}" srcId="{E4EAE2BA-E6E9-47BE-90DA-7CC8F543793A}" destId="{7FC2D584-30A6-449E-B7CA-341F5F62FAF5}" srcOrd="2" destOrd="0" parTransId="{5B8A5422-3BF7-4359-9198-DC33B9CC121C}" sibTransId="{9BCC6C0B-54DD-42A5-A6A4-57FEEA70C7B5}"/>
-    <dgm:cxn modelId="{B4E4664C-2BB7-4195-971F-F79B38F44C6E}" srcId="{28E50F4E-A211-4387-B97C-8204D2D63C7E}" destId="{0AEA99DD-79F2-454B-89E9-FC77396C9F1D}" srcOrd="1" destOrd="0" parTransId="{A2D73402-9AD4-47A3-93FB-B3C18E3B4F0C}" sibTransId="{602E552B-1247-4A9C-B655-B1B1185966C0}"/>
+    <dgm:cxn modelId="{D6CB384A-90A6-45E8-AD86-D97C41743D3D}" type="presOf" srcId="{B117579F-3172-4837-8052-C96FE3E92213}" destId="{674D326D-980D-4EAE-8718-54D436AD70BB}" srcOrd="0" destOrd="0" presId="urn:microsoft.com/office/officeart/2008/layout/CircleAccentTimeline"/>
+    <dgm:cxn modelId="{283F8578-61AB-4F3A-B8D5-79928B6E421A}" srcId="{E4EAE2BA-E6E9-47BE-90DA-7CC8F543793A}" destId="{7FC2D584-30A6-449E-B7CA-341F5F62FAF5}" srcOrd="3" destOrd="0" parTransId="{5B8A5422-3BF7-4359-9198-DC33B9CC121C}" sibTransId="{9BCC6C0B-54DD-42A5-A6A4-57FEEA70C7B5}"/>
     <dgm:cxn modelId="{B632C927-E97E-441C-97E1-63C23589AE7E}" type="presOf" srcId="{C4843CC7-1E96-4B59-9DC6-ACB4F823B6CA}" destId="{BD32F408-1A1D-4F3B-9E8F-4018961D8EE0}" srcOrd="0" destOrd="0" presId="urn:microsoft.com/office/officeart/2008/layout/CircleAccentTimeline"/>
-    <dgm:cxn modelId="{34488931-96C4-4A48-9AF4-D99DA12E3C16}" type="presOf" srcId="{4270397F-DBF8-4AC4-AA3F-CA10089E7FBE}" destId="{31799780-C26C-41A7-A8A3-0C5BAE591647}" srcOrd="0" destOrd="0" presId="urn:microsoft.com/office/officeart/2008/layout/CircleAccentTimeline"/>
     <dgm:cxn modelId="{8A722DB8-690F-4486-8D68-C5FBE3FBBBBD}" srcId="{5A22019F-6F97-4DC3-963A-583D3D54A632}" destId="{0AE14328-0EE2-49D7-98C5-68FCA23BDFFA}" srcOrd="0" destOrd="0" parTransId="{EA9DC085-EAD3-474C-B8A0-5119234F5699}" sibTransId="{5E40F6E7-1E16-499D-BD19-570269F4F62E}"/>
-    <dgm:cxn modelId="{6B7B29F3-0184-4EC1-B7FB-F93586D24594}" type="presParOf" srcId="{C666E99A-EA2A-4513-B163-536A725EC1D4}" destId="{E2E3C590-7FC4-4000-9B21-30C11C32C517}" srcOrd="0" destOrd="0" presId="urn:microsoft.com/office/officeart/2008/layout/CircleAccentTimeline"/>
-    <dgm:cxn modelId="{806F0E3D-0DEB-4CA0-A1AF-C635535D6A51}" type="presParOf" srcId="{E2E3C590-7FC4-4000-9B21-30C11C32C517}" destId="{28017CDB-A29D-4E6F-AB4C-798EBE6DA64D}" srcOrd="0" destOrd="0" presId="urn:microsoft.com/office/officeart/2008/layout/CircleAccentTimeline"/>
-    <dgm:cxn modelId="{9125341B-4B9A-44CB-B8A2-83D1461A7A71}" type="presParOf" srcId="{E2E3C590-7FC4-4000-9B21-30C11C32C517}" destId="{66FE321E-6221-430D-95E7-19DBF56E205F}" srcOrd="1" destOrd="0" presId="urn:microsoft.com/office/officeart/2008/layout/CircleAccentTimeline"/>
-    <dgm:cxn modelId="{75D65238-6A9C-44D1-A4DC-22DA752396DB}" type="presParOf" srcId="{E2E3C590-7FC4-4000-9B21-30C11C32C517}" destId="{1BA0E56F-434D-4EE4-89C5-185FC0CE6AAD}" srcOrd="2" destOrd="0" presId="urn:microsoft.com/office/officeart/2008/layout/CircleAccentTimeline"/>
-    <dgm:cxn modelId="{03BFF396-B874-4373-9B8C-3CED9A231CCB}" type="presParOf" srcId="{C666E99A-EA2A-4513-B163-536A725EC1D4}" destId="{EAEC0C39-E95A-4854-99AC-F1FAA31657FA}" srcOrd="1" destOrd="0" presId="urn:microsoft.com/office/officeart/2008/layout/CircleAccentTimeline"/>
-    <dgm:cxn modelId="{BDE7E1B9-2525-4213-B687-A763C84A79AD}" type="presParOf" srcId="{C666E99A-EA2A-4513-B163-536A725EC1D4}" destId="{5744958A-2933-4B47-B6EB-7D7C8BFCEF84}" srcOrd="2" destOrd="0" presId="urn:microsoft.com/office/officeart/2008/layout/CircleAccentTimeline"/>
-    <dgm:cxn modelId="{B53C7978-C1D3-4BC0-B664-3BD0DCC047C5}" type="presParOf" srcId="{C666E99A-EA2A-4513-B163-536A725EC1D4}" destId="{CCD12751-D9E3-4387-BBF9-8F2AF6D49D1B}" srcOrd="3" destOrd="0" presId="urn:microsoft.com/office/officeart/2008/layout/CircleAccentTimeline"/>
-    <dgm:cxn modelId="{A8F51BAF-F105-4379-890D-4080AD374D90}" type="presParOf" srcId="{C666E99A-EA2A-4513-B163-536A725EC1D4}" destId="{B394CEEB-24B6-4BA8-A206-1534BEDAD694}" srcOrd="4" destOrd="0" presId="urn:microsoft.com/office/officeart/2008/layout/CircleAccentTimeline"/>
+    <dgm:cxn modelId="{4AF66683-88FE-48A6-B4E6-0A85587DD088}" type="presParOf" srcId="{C666E99A-EA2A-4513-B163-536A725EC1D4}" destId="{C6B3E2C5-6D6C-496F-AB52-F7CC056EC993}" srcOrd="0" destOrd="0" presId="urn:microsoft.com/office/officeart/2008/layout/CircleAccentTimeline"/>
+    <dgm:cxn modelId="{D96FE74E-F017-4CA0-9A42-2D62357701C1}" type="presParOf" srcId="{C6B3E2C5-6D6C-496F-AB52-F7CC056EC993}" destId="{9FE30771-6069-40B1-AF64-E56310F06FAB}" srcOrd="0" destOrd="0" presId="urn:microsoft.com/office/officeart/2008/layout/CircleAccentTimeline"/>
+    <dgm:cxn modelId="{33B94E0A-2E12-4CA8-8FCE-CED153F1F8FC}" type="presParOf" srcId="{C6B3E2C5-6D6C-496F-AB52-F7CC056EC993}" destId="{04BACD90-9830-4A1B-97D6-187F0E533766}" srcOrd="1" destOrd="0" presId="urn:microsoft.com/office/officeart/2008/layout/CircleAccentTimeline"/>
+    <dgm:cxn modelId="{EB592827-548E-423A-9683-EFFE60924664}" type="presParOf" srcId="{C6B3E2C5-6D6C-496F-AB52-F7CC056EC993}" destId="{2CE2FFB1-87B5-4B99-9256-0F90B78554C4}" srcOrd="2" destOrd="0" presId="urn:microsoft.com/office/officeart/2008/layout/CircleAccentTimeline"/>
+    <dgm:cxn modelId="{8A2A86CA-94AB-447A-A09E-A1B0992C9B7A}" type="presParOf" srcId="{C666E99A-EA2A-4513-B163-536A725EC1D4}" destId="{02AF4702-8FC0-43A5-823C-4D55F5741771}" srcOrd="1" destOrd="0" presId="urn:microsoft.com/office/officeart/2008/layout/CircleAccentTimeline"/>
+    <dgm:cxn modelId="{5E179F0D-8DA0-472F-9362-45C87BA8258E}" type="presParOf" srcId="{C666E99A-EA2A-4513-B163-536A725EC1D4}" destId="{A0766F71-7A2D-42C4-AEF4-F2F5600DB3E9}" srcOrd="2" destOrd="0" presId="urn:microsoft.com/office/officeart/2008/layout/CircleAccentTimeline"/>
+    <dgm:cxn modelId="{64DCB860-F643-40BF-909F-A78D6A4AB5D5}" type="presParOf" srcId="{C666E99A-EA2A-4513-B163-536A725EC1D4}" destId="{2A4D7A28-35A9-4420-AE42-AAA3E22F9D0D}" srcOrd="3" destOrd="0" presId="urn:microsoft.com/office/officeart/2008/layout/CircleAccentTimeline"/>
+    <dgm:cxn modelId="{1AEE7F9A-538D-4468-B691-2113440670DE}" type="presParOf" srcId="{C666E99A-EA2A-4513-B163-536A725EC1D4}" destId="{F73C5570-DF01-4FA7-975B-F58FD8B6177A}" srcOrd="4" destOrd="0" presId="urn:microsoft.com/office/officeart/2008/layout/CircleAccentTimeline"/>
+    <dgm:cxn modelId="{E9B028CB-2E69-486C-9668-261D3EFD1FC6}" type="presParOf" srcId="{F73C5570-DF01-4FA7-975B-F58FD8B6177A}" destId="{85C2DF8B-FA99-44FA-9B26-A20E12B532F5}" srcOrd="0" destOrd="0" presId="urn:microsoft.com/office/officeart/2008/layout/CircleAccentTimeline"/>
+    <dgm:cxn modelId="{29120524-B6FA-4A09-BAE9-287A26B9A9F7}" type="presParOf" srcId="{F73C5570-DF01-4FA7-975B-F58FD8B6177A}" destId="{2482210D-4F2F-435E-A11D-371BBB750FCB}" srcOrd="1" destOrd="0" presId="urn:microsoft.com/office/officeart/2008/layout/CircleAccentTimeline"/>
+    <dgm:cxn modelId="{40146531-48D2-4DA0-B94A-067CB54D473C}" type="presParOf" srcId="{F73C5570-DF01-4FA7-975B-F58FD8B6177A}" destId="{76131B10-D1B0-491E-8F17-3D8AA226E0B3}" srcOrd="2" destOrd="0" presId="urn:microsoft.com/office/officeart/2008/layout/CircleAccentTimeline"/>
+    <dgm:cxn modelId="{4BD02958-20AA-4FBC-BADC-111A91A35497}" type="presParOf" srcId="{C666E99A-EA2A-4513-B163-536A725EC1D4}" destId="{7DB28B2E-E637-4E70-AD48-AB3F145E6D88}" srcOrd="5" destOrd="0" presId="urn:microsoft.com/office/officeart/2008/layout/CircleAccentTimeline"/>
+    <dgm:cxn modelId="{016C538D-889C-4A05-86FA-104AA714AEF3}" type="presParOf" srcId="{C666E99A-EA2A-4513-B163-536A725EC1D4}" destId="{104F1F78-B0EA-46F5-80D7-51C397678BE4}" srcOrd="6" destOrd="0" presId="urn:microsoft.com/office/officeart/2008/layout/CircleAccentTimeline"/>
+    <dgm:cxn modelId="{C9BF8CE2-951F-49C5-86FE-CE5E62BB3F1D}" type="presParOf" srcId="{C666E99A-EA2A-4513-B163-536A725EC1D4}" destId="{8AE27E61-7FEE-4D72-89FB-B33FD4DBEF37}" srcOrd="7" destOrd="0" presId="urn:microsoft.com/office/officeart/2008/layout/CircleAccentTimeline"/>
+    <dgm:cxn modelId="{ADF0BD2B-8B2F-4C1A-9C86-92A502358863}" type="presParOf" srcId="{8AE27E61-7FEE-4D72-89FB-B33FD4DBEF37}" destId="{1A1B2C4B-B1AF-4914-BA74-D77A74321F6D}" srcOrd="0" destOrd="0" presId="urn:microsoft.com/office/officeart/2008/layout/CircleAccentTimeline"/>
+    <dgm:cxn modelId="{81B229B6-1463-4C2F-828B-9121DACD259E}" type="presParOf" srcId="{8AE27E61-7FEE-4D72-89FB-B33FD4DBEF37}" destId="{674D326D-980D-4EAE-8718-54D436AD70BB}" srcOrd="1" destOrd="0" presId="urn:microsoft.com/office/officeart/2008/layout/CircleAccentTimeline"/>
+    <dgm:cxn modelId="{C2C1EF6E-D98C-4E9B-ADBB-72F9691D5929}" type="presParOf" srcId="{8AE27E61-7FEE-4D72-89FB-B33FD4DBEF37}" destId="{EB667CC2-B2AB-4317-9980-5E210206A7E1}" srcOrd="2" destOrd="0" presId="urn:microsoft.com/office/officeart/2008/layout/CircleAccentTimeline"/>
+    <dgm:cxn modelId="{25DE51DA-4E78-4DC1-BCB7-4FB0A49C10C5}" type="presParOf" srcId="{C666E99A-EA2A-4513-B163-536A725EC1D4}" destId="{3BC13DCF-1C49-40AE-AE65-0978B5BA874F}" srcOrd="8" destOrd="0" presId="urn:microsoft.com/office/officeart/2008/layout/CircleAccentTimeline"/>
+    <dgm:cxn modelId="{4865B94E-31B1-48D3-AC4B-ABE158FD9689}" type="presParOf" srcId="{C666E99A-EA2A-4513-B163-536A725EC1D4}" destId="{76CD20FD-5A2B-4CEB-B317-518316916950}" srcOrd="9" destOrd="0" presId="urn:microsoft.com/office/officeart/2008/layout/CircleAccentTimeline"/>
+    <dgm:cxn modelId="{B53C7978-C1D3-4BC0-B664-3BD0DCC047C5}" type="presParOf" srcId="{C666E99A-EA2A-4513-B163-536A725EC1D4}" destId="{CCD12751-D9E3-4387-BBF9-8F2AF6D49D1B}" srcOrd="10" destOrd="0" presId="urn:microsoft.com/office/officeart/2008/layout/CircleAccentTimeline"/>
+    <dgm:cxn modelId="{A8F51BAF-F105-4379-890D-4080AD374D90}" type="presParOf" srcId="{C666E99A-EA2A-4513-B163-536A725EC1D4}" destId="{B394CEEB-24B6-4BA8-A206-1534BEDAD694}" srcOrd="11" destOrd="0" presId="urn:microsoft.com/office/officeart/2008/layout/CircleAccentTimeline"/>
     <dgm:cxn modelId="{B102D07C-53FA-4C2A-98F7-559DE8CC6F7F}" type="presParOf" srcId="{B394CEEB-24B6-4BA8-A206-1534BEDAD694}" destId="{51C5ACA6-33FD-4668-B3B1-157C98F240BE}" srcOrd="0" destOrd="0" presId="urn:microsoft.com/office/officeart/2008/layout/CircleAccentTimeline"/>
     <dgm:cxn modelId="{AD393FEA-ACA1-4DAE-84B7-B6B64A51D7EB}" type="presParOf" srcId="{B394CEEB-24B6-4BA8-A206-1534BEDAD694}" destId="{D80838CA-4B5F-4759-A83E-18025D22CD8E}" srcOrd="1" destOrd="0" presId="urn:microsoft.com/office/officeart/2008/layout/CircleAccentTimeline"/>
     <dgm:cxn modelId="{5F49715A-C2EA-4423-BB4F-E062481D00CD}" type="presParOf" srcId="{B394CEEB-24B6-4BA8-A206-1534BEDAD694}" destId="{47163255-F5AC-461E-9A86-3B86DCAB719C}" srcOrd="2" destOrd="0" presId="urn:microsoft.com/office/officeart/2008/layout/CircleAccentTimeline"/>
-    <dgm:cxn modelId="{820D0099-D79F-448C-8CD8-F6635DE4543A}" type="presParOf" srcId="{C666E99A-EA2A-4513-B163-536A725EC1D4}" destId="{88A42219-4A4E-4479-8CC6-055AA19695B3}" srcOrd="5" destOrd="0" presId="urn:microsoft.com/office/officeart/2008/layout/CircleAccentTimeline"/>
-    <dgm:cxn modelId="{1B98A850-4FA8-4324-B736-76A11B5A6A2C}" type="presParOf" srcId="{C666E99A-EA2A-4513-B163-536A725EC1D4}" destId="{B7BAD771-7165-4F0A-8CDC-9C674DDAC5A6}" srcOrd="6" destOrd="0" presId="urn:microsoft.com/office/officeart/2008/layout/CircleAccentTimeline"/>
-    <dgm:cxn modelId="{F1981FA5-ACDF-407F-90B1-9FFE42209CE7}" type="presParOf" srcId="{C666E99A-EA2A-4513-B163-536A725EC1D4}" destId="{02DBAD80-0D72-42CC-B864-98974252703D}" srcOrd="7" destOrd="0" presId="urn:microsoft.com/office/officeart/2008/layout/CircleAccentTimeline"/>
-    <dgm:cxn modelId="{886A8907-9F03-4B87-9CA7-56DA307DFB01}" type="presParOf" srcId="{C666E99A-EA2A-4513-B163-536A725EC1D4}" destId="{4FBFD1CE-5323-445E-AADD-EF55B1C740B1}" srcOrd="8" destOrd="0" presId="urn:microsoft.com/office/officeart/2008/layout/CircleAccentTimeline"/>
-    <dgm:cxn modelId="{BB709076-C7E6-48A9-8210-BF3D50F1709C}" type="presParOf" srcId="{4FBFD1CE-5323-445E-AADD-EF55B1C740B1}" destId="{5A8C3FAB-CD74-4F8F-AD16-04074F9041BF}" srcOrd="0" destOrd="0" presId="urn:microsoft.com/office/officeart/2008/layout/CircleAccentTimeline"/>
-    <dgm:cxn modelId="{73482E59-F422-4F1D-A247-02A1DF1A4417}" type="presParOf" srcId="{4FBFD1CE-5323-445E-AADD-EF55B1C740B1}" destId="{FDF47E5F-174C-4606-A5A6-ED4628A0F400}" srcOrd="1" destOrd="0" presId="urn:microsoft.com/office/officeart/2008/layout/CircleAccentTimeline"/>
-    <dgm:cxn modelId="{BC767F94-056C-4FDB-8B62-C212E3A3BE95}" type="presParOf" srcId="{4FBFD1CE-5323-445E-AADD-EF55B1C740B1}" destId="{703A9274-6AA5-4BA7-9F0C-49F5E848C1A2}" srcOrd="2" destOrd="0" presId="urn:microsoft.com/office/officeart/2008/layout/CircleAccentTimeline"/>
-    <dgm:cxn modelId="{266EBF6D-D555-4FB3-952F-E5BBB96410D6}" type="presParOf" srcId="{C666E99A-EA2A-4513-B163-536A725EC1D4}" destId="{5285B23C-3CF9-42E9-8D77-077E19872D98}" srcOrd="9" destOrd="0" presId="urn:microsoft.com/office/officeart/2008/layout/CircleAccentTimeline"/>
-    <dgm:cxn modelId="{53142895-7223-4D04-8283-DB52FBEBEA6C}" type="presParOf" srcId="{C666E99A-EA2A-4513-B163-536A725EC1D4}" destId="{6876C169-0105-4B0F-8AF0-8569EB893E0E}" srcOrd="10" destOrd="0" presId="urn:microsoft.com/office/officeart/2008/layout/CircleAccentTimeline"/>
-    <dgm:cxn modelId="{5E7E60EF-3F65-40FE-8454-4151F9CED020}" type="presParOf" srcId="{C666E99A-EA2A-4513-B163-536A725EC1D4}" destId="{C15A6055-885F-4223-8889-DE40F9C71E47}" srcOrd="11" destOrd="0" presId="urn:microsoft.com/office/officeart/2008/layout/CircleAccentTimeline"/>
+    <dgm:cxn modelId="{820D0099-D79F-448C-8CD8-F6635DE4543A}" type="presParOf" srcId="{C666E99A-EA2A-4513-B163-536A725EC1D4}" destId="{88A42219-4A4E-4479-8CC6-055AA19695B3}" srcOrd="12" destOrd="0" presId="urn:microsoft.com/office/officeart/2008/layout/CircleAccentTimeline"/>
+    <dgm:cxn modelId="{1B98A850-4FA8-4324-B736-76A11B5A6A2C}" type="presParOf" srcId="{C666E99A-EA2A-4513-B163-536A725EC1D4}" destId="{B7BAD771-7165-4F0A-8CDC-9C674DDAC5A6}" srcOrd="13" destOrd="0" presId="urn:microsoft.com/office/officeart/2008/layout/CircleAccentTimeline"/>
+    <dgm:cxn modelId="{5E7E60EF-3F65-40FE-8454-4151F9CED020}" type="presParOf" srcId="{C666E99A-EA2A-4513-B163-536A725EC1D4}" destId="{C15A6055-885F-4223-8889-DE40F9C71E47}" srcOrd="14" destOrd="0" presId="urn:microsoft.com/office/officeart/2008/layout/CircleAccentTimeline"/>
     <dgm:cxn modelId="{2F0B2796-6027-41D9-AB09-75619194C812}" type="presParOf" srcId="{C15A6055-885F-4223-8889-DE40F9C71E47}" destId="{9125244F-CAD2-40B8-B03E-EE53F57528C6}" srcOrd="0" destOrd="0" presId="urn:microsoft.com/office/officeart/2008/layout/CircleAccentTimeline"/>
     <dgm:cxn modelId="{B9A78D57-AC02-4019-A70F-F74194841E9F}" type="presParOf" srcId="{C15A6055-885F-4223-8889-DE40F9C71E47}" destId="{7D6BBD8D-95C7-4AC1-BA07-93F97F0B736B}" srcOrd="1" destOrd="0" presId="urn:microsoft.com/office/officeart/2008/layout/CircleAccentTimeline"/>
     <dgm:cxn modelId="{6B958643-CC03-43BE-B5AD-D70F18EF46A6}" type="presParOf" srcId="{C15A6055-885F-4223-8889-DE40F9C71E47}" destId="{5AE3A114-82A7-404F-9E4B-DAE75E8E67F0}" srcOrd="2" destOrd="0" presId="urn:microsoft.com/office/officeart/2008/layout/CircleAccentTimeline"/>
-    <dgm:cxn modelId="{6FD7B579-2D6F-4E14-9AA9-A998584C569A}" type="presParOf" srcId="{C666E99A-EA2A-4513-B163-536A725EC1D4}" destId="{618FA1BC-D374-4EBB-922E-5A921DD9E5E1}" srcOrd="12" destOrd="0" presId="urn:microsoft.com/office/officeart/2008/layout/CircleAccentTimeline"/>
-    <dgm:cxn modelId="{D0715D97-6762-4050-B0B8-30DD4F82F175}" type="presParOf" srcId="{C666E99A-EA2A-4513-B163-536A725EC1D4}" destId="{8ADF5B02-C638-4F58-9A6C-30C09AC73306}" srcOrd="13" destOrd="0" presId="urn:microsoft.com/office/officeart/2008/layout/CircleAccentTimeline"/>
-    <dgm:cxn modelId="{D7233B37-5879-4C3C-B887-C53C4892CCA8}" type="presParOf" srcId="{C666E99A-EA2A-4513-B163-536A725EC1D4}" destId="{02FA4610-B442-40C7-9DF1-5F9F97BE02EF}" srcOrd="14" destOrd="0" presId="urn:microsoft.com/office/officeart/2008/layout/CircleAccentTimeline"/>
-    <dgm:cxn modelId="{C85F168E-15C4-4982-9266-78407D2ABFF3}" type="presParOf" srcId="{C666E99A-EA2A-4513-B163-536A725EC1D4}" destId="{4FA3D958-E36A-4F8D-B2D9-8F7D4695CA93}" srcOrd="15" destOrd="0" presId="urn:microsoft.com/office/officeart/2008/layout/CircleAccentTimeline"/>
+    <dgm:cxn modelId="{6FD7B579-2D6F-4E14-9AA9-A998584C569A}" type="presParOf" srcId="{C666E99A-EA2A-4513-B163-536A725EC1D4}" destId="{618FA1BC-D374-4EBB-922E-5A921DD9E5E1}" srcOrd="15" destOrd="0" presId="urn:microsoft.com/office/officeart/2008/layout/CircleAccentTimeline"/>
+    <dgm:cxn modelId="{D0715D97-6762-4050-B0B8-30DD4F82F175}" type="presParOf" srcId="{C666E99A-EA2A-4513-B163-536A725EC1D4}" destId="{8ADF5B02-C638-4F58-9A6C-30C09AC73306}" srcOrd="16" destOrd="0" presId="urn:microsoft.com/office/officeart/2008/layout/CircleAccentTimeline"/>
+    <dgm:cxn modelId="{D7233B37-5879-4C3C-B887-C53C4892CCA8}" type="presParOf" srcId="{C666E99A-EA2A-4513-B163-536A725EC1D4}" destId="{02FA4610-B442-40C7-9DF1-5F9F97BE02EF}" srcOrd="17" destOrd="0" presId="urn:microsoft.com/office/officeart/2008/layout/CircleAccentTimeline"/>
+    <dgm:cxn modelId="{C85F168E-15C4-4982-9266-78407D2ABFF3}" type="presParOf" srcId="{C666E99A-EA2A-4513-B163-536A725EC1D4}" destId="{4FA3D958-E36A-4F8D-B2D9-8F7D4695CA93}" srcOrd="18" destOrd="0" presId="urn:microsoft.com/office/officeart/2008/layout/CircleAccentTimeline"/>
     <dgm:cxn modelId="{131F0D32-F16A-44D9-9071-EACD62E4AEED}" type="presParOf" srcId="{4FA3D958-E36A-4F8D-B2D9-8F7D4695CA93}" destId="{49AD36DC-D62B-4D81-B989-C0C6E821265F}" srcOrd="0" destOrd="0" presId="urn:microsoft.com/office/officeart/2008/layout/CircleAccentTimeline"/>
     <dgm:cxn modelId="{125DAAC1-4B2B-4D99-8015-21AFFF79A810}" type="presParOf" srcId="{4FA3D958-E36A-4F8D-B2D9-8F7D4695CA93}" destId="{BCF3A686-42B8-400D-ADAB-FFC1CE9C6893}" srcOrd="1" destOrd="0" presId="urn:microsoft.com/office/officeart/2008/layout/CircleAccentTimeline"/>
     <dgm:cxn modelId="{8E444A5F-7A3D-4E68-B1C1-D9E5D2FD2002}" type="presParOf" srcId="{4FA3D958-E36A-4F8D-B2D9-8F7D4695CA93}" destId="{C5E960F3-64F7-451A-9F71-5CC76AE5F505}" srcOrd="2" destOrd="0" presId="urn:microsoft.com/office/officeart/2008/layout/CircleAccentTimeline"/>
-    <dgm:cxn modelId="{7BDC8AF3-8A8B-4973-A6A9-1B51F937E1C3}" type="presParOf" srcId="{C666E99A-EA2A-4513-B163-536A725EC1D4}" destId="{B3721555-6618-4C3A-BD1F-E92CFD9683AB}" srcOrd="16" destOrd="0" presId="urn:microsoft.com/office/officeart/2008/layout/CircleAccentTimeline"/>
-    <dgm:cxn modelId="{57FBE147-01A0-4F93-B5B4-D87C5642BA03}" type="presParOf" srcId="{C666E99A-EA2A-4513-B163-536A725EC1D4}" destId="{5AE349D2-CEB4-4AC6-AE04-44A62924D7CF}" srcOrd="17" destOrd="0" presId="urn:microsoft.com/office/officeart/2008/layout/CircleAccentTimeline"/>
-    <dgm:cxn modelId="{A90A65CE-B690-4E3E-A09F-E3FAF7AE9156}" type="presParOf" srcId="{C666E99A-EA2A-4513-B163-536A725EC1D4}" destId="{98C1E74A-8C95-49B9-99D3-43E036DDBE09}" srcOrd="18" destOrd="0" presId="urn:microsoft.com/office/officeart/2008/layout/CircleAccentTimeline"/>
+    <dgm:cxn modelId="{7BDC8AF3-8A8B-4973-A6A9-1B51F937E1C3}" type="presParOf" srcId="{C666E99A-EA2A-4513-B163-536A725EC1D4}" destId="{B3721555-6618-4C3A-BD1F-E92CFD9683AB}" srcOrd="19" destOrd="0" presId="urn:microsoft.com/office/officeart/2008/layout/CircleAccentTimeline"/>
+    <dgm:cxn modelId="{57FBE147-01A0-4F93-B5B4-D87C5642BA03}" type="presParOf" srcId="{C666E99A-EA2A-4513-B163-536A725EC1D4}" destId="{5AE349D2-CEB4-4AC6-AE04-44A62924D7CF}" srcOrd="20" destOrd="0" presId="urn:microsoft.com/office/officeart/2008/layout/CircleAccentTimeline"/>
+    <dgm:cxn modelId="{A90A65CE-B690-4E3E-A09F-E3FAF7AE9156}" type="presParOf" srcId="{C666E99A-EA2A-4513-B163-536A725EC1D4}" destId="{98C1E74A-8C95-49B9-99D3-43E036DDBE09}" srcOrd="21" destOrd="0" presId="urn:microsoft.com/office/officeart/2008/layout/CircleAccentTimeline"/>
     <dgm:cxn modelId="{CF176CC5-5F58-4BF2-BCBD-3CA43DEBF721}" type="presParOf" srcId="{98C1E74A-8C95-49B9-99D3-43E036DDBE09}" destId="{625298DF-66F0-44EC-B355-04318A84B0F2}" srcOrd="0" destOrd="0" presId="urn:microsoft.com/office/officeart/2008/layout/CircleAccentTimeline"/>
     <dgm:cxn modelId="{F669BDA3-93ED-4B1C-B9BE-5AABAD77CF11}" type="presParOf" srcId="{98C1E74A-8C95-49B9-99D3-43E036DDBE09}" destId="{2B4BD85E-C901-45C5-8EB9-6B9FEE12A7BE}" srcOrd="1" destOrd="0" presId="urn:microsoft.com/office/officeart/2008/layout/CircleAccentTimeline"/>
     <dgm:cxn modelId="{5AC3ABE7-4B3A-4B37-BCF4-0C4600E4C258}" type="presParOf" srcId="{98C1E74A-8C95-49B9-99D3-43E036DDBE09}" destId="{761EFD8F-410E-414C-A480-BA932E71A143}" srcOrd="2" destOrd="0" presId="urn:microsoft.com/office/officeart/2008/layout/CircleAccentTimeline"/>
-    <dgm:cxn modelId="{6AE88287-C0E8-4048-AC2B-B6315CA86612}" type="presParOf" srcId="{C666E99A-EA2A-4513-B163-536A725EC1D4}" destId="{B82C08B3-DB74-4E36-B2E9-76F2AEEFB24B}" srcOrd="19" destOrd="0" presId="urn:microsoft.com/office/officeart/2008/layout/CircleAccentTimeline"/>
-    <dgm:cxn modelId="{CCADAD11-B601-480E-8927-6FE89F7EA486}" type="presParOf" srcId="{C666E99A-EA2A-4513-B163-536A725EC1D4}" destId="{E0DB4E77-87D5-45B6-AD70-2CE9930ABB87}" srcOrd="20" destOrd="0" presId="urn:microsoft.com/office/officeart/2008/layout/CircleAccentTimeline"/>
-    <dgm:cxn modelId="{AED8654A-61B9-487B-B140-5B05B227F523}" type="presParOf" srcId="{C666E99A-EA2A-4513-B163-536A725EC1D4}" destId="{050B9D53-6469-4729-A9BE-E42DCEA4252C}" srcOrd="21" destOrd="0" presId="urn:microsoft.com/office/officeart/2008/layout/CircleAccentTimeline"/>
-    <dgm:cxn modelId="{3B708182-0012-4306-A3C0-9C960FF62F52}" type="presParOf" srcId="{C666E99A-EA2A-4513-B163-536A725EC1D4}" destId="{A169135A-8620-4269-A500-0BFE5F166735}" srcOrd="22" destOrd="0" presId="urn:microsoft.com/office/officeart/2008/layout/CircleAccentTimeline"/>
+    <dgm:cxn modelId="{6AE88287-C0E8-4048-AC2B-B6315CA86612}" type="presParOf" srcId="{C666E99A-EA2A-4513-B163-536A725EC1D4}" destId="{B82C08B3-DB74-4E36-B2E9-76F2AEEFB24B}" srcOrd="22" destOrd="0" presId="urn:microsoft.com/office/officeart/2008/layout/CircleAccentTimeline"/>
+    <dgm:cxn modelId="{CCADAD11-B601-480E-8927-6FE89F7EA486}" type="presParOf" srcId="{C666E99A-EA2A-4513-B163-536A725EC1D4}" destId="{E0DB4E77-87D5-45B6-AD70-2CE9930ABB87}" srcOrd="23" destOrd="0" presId="urn:microsoft.com/office/officeart/2008/layout/CircleAccentTimeline"/>
+    <dgm:cxn modelId="{AED8654A-61B9-487B-B140-5B05B227F523}" type="presParOf" srcId="{C666E99A-EA2A-4513-B163-536A725EC1D4}" destId="{050B9D53-6469-4729-A9BE-E42DCEA4252C}" srcOrd="24" destOrd="0" presId="urn:microsoft.com/office/officeart/2008/layout/CircleAccentTimeline"/>
+    <dgm:cxn modelId="{3B708182-0012-4306-A3C0-9C960FF62F52}" type="presParOf" srcId="{C666E99A-EA2A-4513-B163-536A725EC1D4}" destId="{A169135A-8620-4269-A500-0BFE5F166735}" srcOrd="25" destOrd="0" presId="urn:microsoft.com/office/officeart/2008/layout/CircleAccentTimeline"/>
     <dgm:cxn modelId="{8E136D5B-8A27-4F18-BB51-5AF8AE430F5C}" type="presParOf" srcId="{A169135A-8620-4269-A500-0BFE5F166735}" destId="{DF89BFF2-B2D4-4325-85A2-579AFC2E967F}" srcOrd="0" destOrd="0" presId="urn:microsoft.com/office/officeart/2008/layout/CircleAccentTimeline"/>
     <dgm:cxn modelId="{4A1F3093-F5E7-4B9D-9FB2-6728E5862D85}" type="presParOf" srcId="{A169135A-8620-4269-A500-0BFE5F166735}" destId="{DB665163-915F-40A6-83DE-D9E80507F79D}" srcOrd="1" destOrd="0" presId="urn:microsoft.com/office/officeart/2008/layout/CircleAccentTimeline"/>
     <dgm:cxn modelId="{97A2C6A4-C2BA-4AD9-9889-6C0BFA5257C5}" type="presParOf" srcId="{A169135A-8620-4269-A500-0BFE5F166735}" destId="{B929AC72-0696-4EEE-AFB6-7E192A81CD7E}" srcOrd="2" destOrd="0" presId="urn:microsoft.com/office/officeart/2008/layout/CircleAccentTimeline"/>
-    <dgm:cxn modelId="{90A2D453-8355-4ABF-8D77-AC9B2F5A51A5}" type="presParOf" srcId="{C666E99A-EA2A-4513-B163-536A725EC1D4}" destId="{4C54F472-8EC0-43AD-AD8B-7B532BC9203C}" srcOrd="23" destOrd="0" presId="urn:microsoft.com/office/officeart/2008/layout/CircleAccentTimeline"/>
-    <dgm:cxn modelId="{0E769701-95BC-4670-BBB3-9E807D52E5E8}" type="presParOf" srcId="{C666E99A-EA2A-4513-B163-536A725EC1D4}" destId="{A5C2DB3F-F2F5-4831-9AD1-C5C2EEE15AC9}" srcOrd="24" destOrd="0" presId="urn:microsoft.com/office/officeart/2008/layout/CircleAccentTimeline"/>
-    <dgm:cxn modelId="{D6612880-C97C-41C9-B635-800EEF865953}" type="presParOf" srcId="{C666E99A-EA2A-4513-B163-536A725EC1D4}" destId="{B8B811F7-882B-401A-954A-0AD56A2EE973}" srcOrd="25" destOrd="0" presId="urn:microsoft.com/office/officeart/2008/layout/CircleAccentTimeline"/>
-    <dgm:cxn modelId="{6E0AEAEC-EE6B-48F9-81A8-7C9AFD0752D5}" type="presParOf" srcId="{C666E99A-EA2A-4513-B163-536A725EC1D4}" destId="{CB96842E-0788-4F05-AA79-9548A70F8222}" srcOrd="26" destOrd="0" presId="urn:microsoft.com/office/officeart/2008/layout/CircleAccentTimeline"/>
-    <dgm:cxn modelId="{C398105E-DEBE-4566-A208-95DB95A8410B}" type="presParOf" srcId="{CB96842E-0788-4F05-AA79-9548A70F8222}" destId="{F624D2FA-8824-4453-8B9E-084D7FB18D3E}" srcOrd="0" destOrd="0" presId="urn:microsoft.com/office/officeart/2008/layout/CircleAccentTimeline"/>
-    <dgm:cxn modelId="{C7BF06C9-514F-433D-9D1E-152647F91005}" type="presParOf" srcId="{CB96842E-0788-4F05-AA79-9548A70F8222}" destId="{31799780-C26C-41A7-A8A3-0C5BAE591647}" srcOrd="1" destOrd="0" presId="urn:microsoft.com/office/officeart/2008/layout/CircleAccentTimeline"/>
-    <dgm:cxn modelId="{01A402B5-FF37-4097-A548-B9F1BF18177F}" type="presParOf" srcId="{CB96842E-0788-4F05-AA79-9548A70F8222}" destId="{036BAE8B-0596-41F6-8DFC-775AE3DB2F75}" srcOrd="2" destOrd="0" presId="urn:microsoft.com/office/officeart/2008/layout/CircleAccentTimeline"/>
-    <dgm:cxn modelId="{1827D5B2-0E92-47A2-AE1E-EFA6FEB02DC9}" type="presParOf" srcId="{C666E99A-EA2A-4513-B163-536A725EC1D4}" destId="{FB53BAAE-1CD1-48B9-A5BE-862EFED7558E}" srcOrd="27" destOrd="0" presId="urn:microsoft.com/office/officeart/2008/layout/CircleAccentTimeline"/>
-    <dgm:cxn modelId="{F432C6E4-396C-4C77-8D3C-04ACE617AE33}" type="presParOf" srcId="{C666E99A-EA2A-4513-B163-536A725EC1D4}" destId="{B2162B41-715E-4E22-A94D-F9469031B90D}" srcOrd="28" destOrd="0" presId="urn:microsoft.com/office/officeart/2008/layout/CircleAccentTimeline"/>
-    <dgm:cxn modelId="{0E2D9C45-F625-410D-976A-D98FC767C523}" type="presParOf" srcId="{C666E99A-EA2A-4513-B163-536A725EC1D4}" destId="{4EF7231C-C9F1-4F91-8D1C-C63638405F91}" srcOrd="29" destOrd="0" presId="urn:microsoft.com/office/officeart/2008/layout/CircleAccentTimeline"/>
+    <dgm:cxn modelId="{90A2D453-8355-4ABF-8D77-AC9B2F5A51A5}" type="presParOf" srcId="{C666E99A-EA2A-4513-B163-536A725EC1D4}" destId="{4C54F472-8EC0-43AD-AD8B-7B532BC9203C}" srcOrd="26" destOrd="0" presId="urn:microsoft.com/office/officeart/2008/layout/CircleAccentTimeline"/>
+    <dgm:cxn modelId="{0E769701-95BC-4670-BBB3-9E807D52E5E8}" type="presParOf" srcId="{C666E99A-EA2A-4513-B163-536A725EC1D4}" destId="{A5C2DB3F-F2F5-4831-9AD1-C5C2EEE15AC9}" srcOrd="27" destOrd="0" presId="urn:microsoft.com/office/officeart/2008/layout/CircleAccentTimeline"/>
+    <dgm:cxn modelId="{0E2D9C45-F625-410D-976A-D98FC767C523}" type="presParOf" srcId="{C666E99A-EA2A-4513-B163-536A725EC1D4}" destId="{4EF7231C-C9F1-4F91-8D1C-C63638405F91}" srcOrd="28" destOrd="0" presId="urn:microsoft.com/office/officeart/2008/layout/CircleAccentTimeline"/>
     <dgm:cxn modelId="{ED828BF6-B845-4D06-AA09-88653016ABB1}" type="presParOf" srcId="{4EF7231C-C9F1-4F91-8D1C-C63638405F91}" destId="{4AF980F5-1CFE-4F1C-8701-2120CCF8F1AB}" srcOrd="0" destOrd="0" presId="urn:microsoft.com/office/officeart/2008/layout/CircleAccentTimeline"/>
     <dgm:cxn modelId="{BB042F8A-98B7-488A-B1AC-011CDE7C7A3A}" type="presParOf" srcId="{4EF7231C-C9F1-4F91-8D1C-C63638405F91}" destId="{C21B92A9-8E32-499C-902E-F133C5092D1A}" srcOrd="1" destOrd="0" presId="urn:microsoft.com/office/officeart/2008/layout/CircleAccentTimeline"/>
     <dgm:cxn modelId="{5767D511-FF18-4451-9928-B18FA2555F58}" type="presParOf" srcId="{4EF7231C-C9F1-4F91-8D1C-C63638405F91}" destId="{1092A734-3D43-4CCE-BAAB-D03B6FB8C520}" srcOrd="2" destOrd="0" presId="urn:microsoft.com/office/officeart/2008/layout/CircleAccentTimeline"/>
-    <dgm:cxn modelId="{24ACEC1F-50E7-4EF4-B7EF-CB1F12A50B37}" type="presParOf" srcId="{C666E99A-EA2A-4513-B163-536A725EC1D4}" destId="{8D515D9C-EF43-47B9-AC9A-09A87EDF6F3D}" srcOrd="30" destOrd="0" presId="urn:microsoft.com/office/officeart/2008/layout/CircleAccentTimeline"/>
-    <dgm:cxn modelId="{DEECF5B3-4894-49DA-87C3-06128E11EAF1}" type="presParOf" srcId="{C666E99A-EA2A-4513-B163-536A725EC1D4}" destId="{FAD7D391-55A1-4EEA-A99A-64E1406DFE67}" srcOrd="31" destOrd="0" presId="urn:microsoft.com/office/officeart/2008/layout/CircleAccentTimeline"/>
-    <dgm:cxn modelId="{7AE685BB-CF8D-45D1-AA7E-9E1115A40345}" type="presParOf" srcId="{C666E99A-EA2A-4513-B163-536A725EC1D4}" destId="{56DDD952-6F6A-4029-9D17-840952762844}" srcOrd="32" destOrd="0" presId="urn:microsoft.com/office/officeart/2008/layout/CircleAccentTimeline"/>
-    <dgm:cxn modelId="{E187B4D3-037C-480E-A07F-084085DA9B32}" type="presParOf" srcId="{C666E99A-EA2A-4513-B163-536A725EC1D4}" destId="{BCEAA212-1E21-473A-810B-7B4A20144AC7}" srcOrd="33" destOrd="0" presId="urn:microsoft.com/office/officeart/2008/layout/CircleAccentTimeline"/>
+    <dgm:cxn modelId="{24ACEC1F-50E7-4EF4-B7EF-CB1F12A50B37}" type="presParOf" srcId="{C666E99A-EA2A-4513-B163-536A725EC1D4}" destId="{8D515D9C-EF43-47B9-AC9A-09A87EDF6F3D}" srcOrd="29" destOrd="0" presId="urn:microsoft.com/office/officeart/2008/layout/CircleAccentTimeline"/>
+    <dgm:cxn modelId="{DEECF5B3-4894-49DA-87C3-06128E11EAF1}" type="presParOf" srcId="{C666E99A-EA2A-4513-B163-536A725EC1D4}" destId="{FAD7D391-55A1-4EEA-A99A-64E1406DFE67}" srcOrd="30" destOrd="0" presId="urn:microsoft.com/office/officeart/2008/layout/CircleAccentTimeline"/>
+    <dgm:cxn modelId="{7AE685BB-CF8D-45D1-AA7E-9E1115A40345}" type="presParOf" srcId="{C666E99A-EA2A-4513-B163-536A725EC1D4}" destId="{56DDD952-6F6A-4029-9D17-840952762844}" srcOrd="31" destOrd="0" presId="urn:microsoft.com/office/officeart/2008/layout/CircleAccentTimeline"/>
+    <dgm:cxn modelId="{E187B4D3-037C-480E-A07F-084085DA9B32}" type="presParOf" srcId="{C666E99A-EA2A-4513-B163-536A725EC1D4}" destId="{BCEAA212-1E21-473A-810B-7B4A20144AC7}" srcOrd="32" destOrd="0" presId="urn:microsoft.com/office/officeart/2008/layout/CircleAccentTimeline"/>
     <dgm:cxn modelId="{F1A44866-7D53-4109-8002-111947E20ADC}" type="presParOf" srcId="{BCEAA212-1E21-473A-810B-7B4A20144AC7}" destId="{E29272B0-1840-4ADB-9A86-4D800BA7660B}" srcOrd="0" destOrd="0" presId="urn:microsoft.com/office/officeart/2008/layout/CircleAccentTimeline"/>
     <dgm:cxn modelId="{F2985EF5-AF57-42CE-9179-DC297E86C13F}" type="presParOf" srcId="{BCEAA212-1E21-473A-810B-7B4A20144AC7}" destId="{C289158A-F0C2-472A-B26B-AE3903472886}" srcOrd="1" destOrd="0" presId="urn:microsoft.com/office/officeart/2008/layout/CircleAccentTimeline"/>
     <dgm:cxn modelId="{C4405D03-222D-4DD1-907A-033E95AF0AF3}" type="presParOf" srcId="{BCEAA212-1E21-473A-810B-7B4A20144AC7}" destId="{C83A00C4-4E87-475C-B373-0648A481D8EB}" srcOrd="2" destOrd="0" presId="urn:microsoft.com/office/officeart/2008/layout/CircleAccentTimeline"/>
-    <dgm:cxn modelId="{4EA480E6-F183-4262-86BD-C3A0003BC035}" type="presParOf" srcId="{C666E99A-EA2A-4513-B163-536A725EC1D4}" destId="{A93CA49B-3551-4E15-9F16-87C9D8940AB2}" srcOrd="34" destOrd="0" presId="urn:microsoft.com/office/officeart/2008/layout/CircleAccentTimeline"/>
-    <dgm:cxn modelId="{CC3D5F59-BDB0-4E57-B73F-FD6CF4F796EA}" type="presParOf" srcId="{C666E99A-EA2A-4513-B163-536A725EC1D4}" destId="{4BAB3AD8-192C-45AF-ABFF-EB2AC676A747}" srcOrd="35" destOrd="0" presId="urn:microsoft.com/office/officeart/2008/layout/CircleAccentTimeline"/>
-    <dgm:cxn modelId="{ED481ABC-4033-4F67-A4AC-B3C3CC0116E6}" type="presParOf" srcId="{C666E99A-EA2A-4513-B163-536A725EC1D4}" destId="{BDD180BB-E7D6-424B-BB10-543442B20526}" srcOrd="36" destOrd="0" presId="urn:microsoft.com/office/officeart/2008/layout/CircleAccentTimeline"/>
+    <dgm:cxn modelId="{4EA480E6-F183-4262-86BD-C3A0003BC035}" type="presParOf" srcId="{C666E99A-EA2A-4513-B163-536A725EC1D4}" destId="{A93CA49B-3551-4E15-9F16-87C9D8940AB2}" srcOrd="33" destOrd="0" presId="urn:microsoft.com/office/officeart/2008/layout/CircleAccentTimeline"/>
+    <dgm:cxn modelId="{CC3D5F59-BDB0-4E57-B73F-FD6CF4F796EA}" type="presParOf" srcId="{C666E99A-EA2A-4513-B163-536A725EC1D4}" destId="{4BAB3AD8-192C-45AF-ABFF-EB2AC676A747}" srcOrd="34" destOrd="0" presId="urn:microsoft.com/office/officeart/2008/layout/CircleAccentTimeline"/>
+    <dgm:cxn modelId="{ED481ABC-4033-4F67-A4AC-B3C3CC0116E6}" type="presParOf" srcId="{C666E99A-EA2A-4513-B163-536A725EC1D4}" destId="{BDD180BB-E7D6-424B-BB10-543442B20526}" srcOrd="35" destOrd="0" presId="urn:microsoft.com/office/officeart/2008/layout/CircleAccentTimeline"/>
     <dgm:cxn modelId="{20E31828-B9B9-45D6-9564-7AF6141BAFF1}" type="presParOf" srcId="{BDD180BB-E7D6-424B-BB10-543442B20526}" destId="{C91E5157-B099-45D6-9AF6-5D780FCC0741}" srcOrd="0" destOrd="0" presId="urn:microsoft.com/office/officeart/2008/layout/CircleAccentTimeline"/>
     <dgm:cxn modelId="{1D720328-BD59-47CA-A807-D11D13589287}" type="presParOf" srcId="{BDD180BB-E7D6-424B-BB10-543442B20526}" destId="{BD32F408-1A1D-4F3B-9E8F-4018961D8EE0}" srcOrd="1" destOrd="0" presId="urn:microsoft.com/office/officeart/2008/layout/CircleAccentTimeline"/>
     <dgm:cxn modelId="{16226E1A-3F70-47B2-A6FA-864CC27D948A}" type="presParOf" srcId="{BDD180BB-E7D6-424B-BB10-543442B20526}" destId="{AFA50EA1-01B9-4434-81F0-09F78468F491}" srcOrd="2" destOrd="0" presId="urn:microsoft.com/office/officeart/2008/layout/CircleAccentTimeline"/>
-    <dgm:cxn modelId="{58A65D42-3332-4CFF-B3CE-ABB5E459217A}" type="presParOf" srcId="{C666E99A-EA2A-4513-B163-536A725EC1D4}" destId="{A8705CB7-3A00-47B5-9D67-6B49167A9F5F}" srcOrd="37" destOrd="0" presId="urn:microsoft.com/office/officeart/2008/layout/CircleAccentTimeline"/>
-    <dgm:cxn modelId="{15753D17-5996-49B0-B2F3-91E3D2DDE5EC}" type="presParOf" srcId="{C666E99A-EA2A-4513-B163-536A725EC1D4}" destId="{5F85F400-DB07-4C0F-B47D-3E3A119A97E2}" srcOrd="38" destOrd="0" presId="urn:microsoft.com/office/officeart/2008/layout/CircleAccentTimeline"/>
-    <dgm:cxn modelId="{0F568343-C7D8-4A6D-A05F-54CFE542344C}" type="presParOf" srcId="{C666E99A-EA2A-4513-B163-536A725EC1D4}" destId="{4CC69F9E-9C44-4FE7-A5D1-837B7F7500F9}" srcOrd="39" destOrd="0" presId="urn:microsoft.com/office/officeart/2008/layout/CircleAccentTimeline"/>
-    <dgm:cxn modelId="{8C4A92AF-E74B-4AA8-9AE8-7BCAA485CA7F}" type="presParOf" srcId="{C666E99A-EA2A-4513-B163-536A725EC1D4}" destId="{DC1E3BC9-F45A-46BD-AE86-CB151878B25B}" srcOrd="40" destOrd="0" presId="urn:microsoft.com/office/officeart/2008/layout/CircleAccentTimeline"/>
+    <dgm:cxn modelId="{58A65D42-3332-4CFF-B3CE-ABB5E459217A}" type="presParOf" srcId="{C666E99A-EA2A-4513-B163-536A725EC1D4}" destId="{A8705CB7-3A00-47B5-9D67-6B49167A9F5F}" srcOrd="36" destOrd="0" presId="urn:microsoft.com/office/officeart/2008/layout/CircleAccentTimeline"/>
+    <dgm:cxn modelId="{15753D17-5996-49B0-B2F3-91E3D2DDE5EC}" type="presParOf" srcId="{C666E99A-EA2A-4513-B163-536A725EC1D4}" destId="{5F85F400-DB07-4C0F-B47D-3E3A119A97E2}" srcOrd="37" destOrd="0" presId="urn:microsoft.com/office/officeart/2008/layout/CircleAccentTimeline"/>
+    <dgm:cxn modelId="{0F568343-C7D8-4A6D-A05F-54CFE542344C}" type="presParOf" srcId="{C666E99A-EA2A-4513-B163-536A725EC1D4}" destId="{4CC69F9E-9C44-4FE7-A5D1-837B7F7500F9}" srcOrd="38" destOrd="0" presId="urn:microsoft.com/office/officeart/2008/layout/CircleAccentTimeline"/>
+    <dgm:cxn modelId="{8C4A92AF-E74B-4AA8-9AE8-7BCAA485CA7F}" type="presParOf" srcId="{C666E99A-EA2A-4513-B163-536A725EC1D4}" destId="{DC1E3BC9-F45A-46BD-AE86-CB151878B25B}" srcOrd="39" destOrd="0" presId="urn:microsoft.com/office/officeart/2008/layout/CircleAccentTimeline"/>
     <dgm:cxn modelId="{B6811C61-33C5-4083-946F-E331CC1688C8}" type="presParOf" srcId="{DC1E3BC9-F45A-46BD-AE86-CB151878B25B}" destId="{FA37A83F-DCFE-4930-B762-BA4ACC7C2CF7}" srcOrd="0" destOrd="0" presId="urn:microsoft.com/office/officeart/2008/layout/CircleAccentTimeline"/>
     <dgm:cxn modelId="{0592DE33-6E3B-4A61-870E-73DED6DADBDE}" type="presParOf" srcId="{DC1E3BC9-F45A-46BD-AE86-CB151878B25B}" destId="{C74C4CD4-620A-4D12-877A-4F2671E6851F}" srcOrd="1" destOrd="0" presId="urn:microsoft.com/office/officeart/2008/layout/CircleAccentTimeline"/>
     <dgm:cxn modelId="{438B9DA6-D0F4-4BB6-A967-17447868E945}" type="presParOf" srcId="{DC1E3BC9-F45A-46BD-AE86-CB151878B25B}" destId="{FCF7FA09-DF88-4A61-9695-0DC36D268D20}" srcOrd="2" destOrd="0" presId="urn:microsoft.com/office/officeart/2008/layout/CircleAccentTimeline"/>
-    <dgm:cxn modelId="{9FA38F49-119D-46B8-AE12-14243512A393}" type="presParOf" srcId="{C666E99A-EA2A-4513-B163-536A725EC1D4}" destId="{7F95D454-9277-4E23-8DA0-31E0BC467B99}" srcOrd="41" destOrd="0" presId="urn:microsoft.com/office/officeart/2008/layout/CircleAccentTimeline"/>
-    <dgm:cxn modelId="{E0AF502E-DEB2-494A-9F22-EC19F88266C4}" type="presParOf" srcId="{C666E99A-EA2A-4513-B163-536A725EC1D4}" destId="{55B19629-49BD-483E-9F18-BA61677B354C}" srcOrd="42" destOrd="0" presId="urn:microsoft.com/office/officeart/2008/layout/CircleAccentTimeline"/>
+    <dgm:cxn modelId="{9FA38F49-119D-46B8-AE12-14243512A393}" type="presParOf" srcId="{C666E99A-EA2A-4513-B163-536A725EC1D4}" destId="{7F95D454-9277-4E23-8DA0-31E0BC467B99}" srcOrd="40" destOrd="0" presId="urn:microsoft.com/office/officeart/2008/layout/CircleAccentTimeline"/>
+    <dgm:cxn modelId="{E0AF502E-DEB2-494A-9F22-EC19F88266C4}" type="presParOf" srcId="{C666E99A-EA2A-4513-B163-536A725EC1D4}" destId="{55B19629-49BD-483E-9F18-BA61677B354C}" srcOrd="41" destOrd="0" presId="urn:microsoft.com/office/officeart/2008/layout/CircleAccentTimeline"/>
   </dgm:cxnLst>
   <dgm:bg/>
   <dgm:whole/>
@@ -2336,15 +2467,15 @@
       <dsp:cNvGrpSpPr/>
     </dsp:nvGrpSpPr>
     <dsp:grpSpPr/>
-    <dsp:sp modelId="{28017CDB-A29D-4E6F-AB4C-798EBE6DA64D}">
+    <dsp:sp modelId="{9FE30771-6069-40B1-AF64-E56310F06FAB}">
       <dsp:nvSpPr>
         <dsp:cNvPr id="0" name=""/>
         <dsp:cNvSpPr/>
       </dsp:nvSpPr>
       <dsp:spPr>
         <a:xfrm>
-          <a:off x="2277" y="2398086"/>
-          <a:ext cx="1136974" cy="1136974"/>
+          <a:off x="7673" y="2414408"/>
+          <a:ext cx="1083762" cy="1083762"/>
         </a:xfrm>
         <a:prstGeom prst="donut">
           <a:avLst>
@@ -2405,15 +2536,15 @@
         </a:fontRef>
       </dsp:style>
     </dsp:sp>
-    <dsp:sp modelId="{66FE321E-6221-430D-95E7-19DBF56E205F}">
+    <dsp:sp modelId="{04BACD90-9830-4A1B-97D6-187F0E533766}">
       <dsp:nvSpPr>
         <dsp:cNvPr id="0" name=""/>
         <dsp:cNvSpPr/>
       </dsp:nvSpPr>
       <dsp:spPr>
         <a:xfrm rot="17700000">
-          <a:off x="402896" y="1471219"/>
-          <a:ext cx="1413385" cy="681142"/>
+          <a:off x="389542" y="1530920"/>
+          <a:ext cx="1347236" cy="649264"/>
         </a:xfrm>
         <a:prstGeom prst="rect">
           <a:avLst/>
@@ -2437,12 +2568,12 @@
         <a:fontRef idx="minor"/>
       </dsp:style>
       <dsp:txBody>
-        <a:bodyPr spcFirstLastPara="0" vert="horz" wrap="square" lIns="83820" tIns="0" rIns="0" bIns="0" numCol="1" spcCol="1270" anchor="ctr" anchorCtr="0">
+        <a:bodyPr spcFirstLastPara="0" vert="horz" wrap="square" lIns="58420" tIns="0" rIns="0" bIns="0" numCol="1" spcCol="1270" anchor="ctr" anchorCtr="0">
           <a:noAutofit/>
         </a:bodyPr>
         <a:lstStyle/>
         <a:p>
-          <a:pPr lvl="0" algn="l" defTabSz="1466850">
+          <a:pPr lvl="0" algn="l" defTabSz="1022350">
             <a:lnSpc>
               <a:spcPct val="90000"/>
             </a:lnSpc>
@@ -2454,33 +2585,39 @@
             </a:spcAft>
           </a:pPr>
           <a:r>
-            <a:rPr lang="zh-CN" sz="3300" kern="1200" dirty="0">
+            <a:rPr lang="en-US" altLang="zh-CN" sz="2300" kern="1200" dirty="0" smtClean="0">
               <a:latin typeface="微软雅黑" panose="020B0503020204020204" pitchFamily="34" charset="-122"/>
               <a:ea typeface="微软雅黑" panose="020B0503020204020204" pitchFamily="34" charset="-122"/>
-              <a:cs typeface="+mn-cs"/>
             </a:rPr>
-            <a:t>日期</a:t>
+            <a:t>2007</a:t>
           </a:r>
-          <a:endParaRPr lang="zh-CN" sz="3300" kern="1200" dirty="0">
+          <a:r>
+            <a:rPr lang="zh-CN" altLang="en-US" sz="2300" kern="1200" dirty="0" smtClean="0">
+              <a:latin typeface="微软雅黑" panose="020B0503020204020204" pitchFamily="34" charset="-122"/>
+              <a:ea typeface="微软雅黑" panose="020B0503020204020204" pitchFamily="34" charset="-122"/>
+            </a:rPr>
+            <a:t>之前</a:t>
+          </a:r>
+          <a:endParaRPr lang="zh-CN" sz="2300" kern="1200" dirty="0">
             <a:latin typeface="微软雅黑" panose="020B0503020204020204" pitchFamily="34" charset="-122"/>
             <a:ea typeface="微软雅黑" panose="020B0503020204020204" pitchFamily="34" charset="-122"/>
           </a:endParaRPr>
         </a:p>
       </dsp:txBody>
       <dsp:txXfrm>
-        <a:off x="402896" y="1471219"/>
-        <a:ext cx="1413385" cy="681142"/>
+        <a:off x="389542" y="1530920"/>
+        <a:ext cx="1347236" cy="649264"/>
       </dsp:txXfrm>
     </dsp:sp>
-    <dsp:sp modelId="{51C5ACA6-33FD-4668-B3B1-157C98F240BE}">
+    <dsp:sp modelId="{85C2DF8B-FA99-44FA-9B26-A20E12B532F5}">
       <dsp:nvSpPr>
         <dsp:cNvPr id="0" name=""/>
         <dsp:cNvSpPr/>
       </dsp:nvSpPr>
       <dsp:spPr>
         <a:xfrm>
-          <a:off x="1224893" y="2671492"/>
-          <a:ext cx="590161" cy="590161"/>
+          <a:off x="1173068" y="2675018"/>
+          <a:ext cx="562541" cy="562541"/>
         </a:xfrm>
         <a:prstGeom prst="ellipse">
           <a:avLst/>
@@ -2539,15 +2676,15 @@
         </a:fontRef>
       </dsp:style>
     </dsp:sp>
-    <dsp:sp modelId="{D80838CA-4B5F-4759-A83E-18025D22CD8E}">
+    <dsp:sp modelId="{2482210D-4F2F-435E-A11D-371BBB750FCB}">
       <dsp:nvSpPr>
         <dsp:cNvPr id="0" name=""/>
         <dsp:cNvSpPr/>
       </dsp:nvSpPr>
       <dsp:spPr>
         <a:xfrm rot="17700000">
-          <a:off x="525927" y="3492904"/>
-          <a:ext cx="1222645" cy="589513"/>
+          <a:off x="506815" y="3457987"/>
+          <a:ext cx="1165423" cy="561923"/>
         </a:xfrm>
         <a:prstGeom prst="rect">
           <a:avLst/>
@@ -2571,12 +2708,12 @@
         <a:fontRef idx="minor"/>
       </dsp:style>
       <dsp:txBody>
-        <a:bodyPr spcFirstLastPara="0" vert="horz" wrap="square" lIns="0" tIns="0" rIns="55880" bIns="0" numCol="1" spcCol="1270" anchor="ctr" anchorCtr="0">
+        <a:bodyPr spcFirstLastPara="0" vert="horz" wrap="square" lIns="0" tIns="0" rIns="35560" bIns="0" numCol="1" spcCol="1270" anchor="ctr" anchorCtr="0">
           <a:noAutofit/>
         </a:bodyPr>
         <a:lstStyle/>
         <a:p>
-          <a:pPr lvl="0" algn="r" defTabSz="977900">
+          <a:pPr lvl="0" algn="r" defTabSz="622300">
             <a:lnSpc>
               <a:spcPct val="90000"/>
             </a:lnSpc>
@@ -2588,29 +2725,32 @@
             </a:spcAft>
           </a:pPr>
           <a:r>
-            <a:rPr lang="zh-CN" sz="2200" kern="1200">
+            <a:rPr lang="zh-CN" altLang="en-US" sz="1400" kern="1200" dirty="0" smtClean="0">
               <a:latin typeface="微软雅黑" panose="020B0503020204020204" pitchFamily="34" charset="-122"/>
               <a:ea typeface="微软雅黑" panose="020B0503020204020204" pitchFamily="34" charset="-122"/>
-              <a:cs typeface="+mn-cs"/>
             </a:rPr>
-            <a:t>活动标题</a:t>
+            <a:t>银行应用开发</a:t>
           </a:r>
+          <a:endParaRPr lang="zh-CN" sz="1400" kern="1200" dirty="0">
+            <a:latin typeface="微软雅黑" panose="020B0503020204020204" pitchFamily="34" charset="-122"/>
+            <a:ea typeface="微软雅黑" panose="020B0503020204020204" pitchFamily="34" charset="-122"/>
+          </a:endParaRPr>
         </a:p>
       </dsp:txBody>
       <dsp:txXfrm>
-        <a:off x="525927" y="3492904"/>
-        <a:ext cx="1222645" cy="589513"/>
+        <a:off x="506815" y="3457987"/>
+        <a:ext cx="1165423" cy="561923"/>
       </dsp:txXfrm>
     </dsp:sp>
-    <dsp:sp modelId="{47163255-F5AC-461E-9A86-3B86DCAB719C}">
+    <dsp:sp modelId="{76131B10-D1B0-491E-8F17-3D8AA226E0B3}">
       <dsp:nvSpPr>
         <dsp:cNvPr id="0" name=""/>
         <dsp:cNvSpPr/>
       </dsp:nvSpPr>
       <dsp:spPr>
         <a:xfrm rot="17700000">
-          <a:off x="1291376" y="1850728"/>
-          <a:ext cx="1222645" cy="589513"/>
+          <a:off x="1236439" y="1892667"/>
+          <a:ext cx="1165423" cy="561923"/>
         </a:xfrm>
         <a:prstGeom prst="rect">
           <a:avLst/>
@@ -2634,15 +2774,157 @@
         <a:fontRef idx="minor"/>
       </dsp:style>
     </dsp:sp>
-    <dsp:sp modelId="{5A8C3FAB-CD74-4F8F-AD16-04074F9041BF}">
+    <dsp:sp modelId="{1A1B2C4B-B1AF-4914-BA74-D77A74321F6D}">
       <dsp:nvSpPr>
         <dsp:cNvPr id="0" name=""/>
         <dsp:cNvSpPr/>
       </dsp:nvSpPr>
       <dsp:spPr>
         <a:xfrm>
-          <a:off x="1900605" y="2671492"/>
-          <a:ext cx="590161" cy="590161"/>
+          <a:off x="1817242" y="2414408"/>
+          <a:ext cx="1083762" cy="1083762"/>
+        </a:xfrm>
+        <a:prstGeom prst="donut">
+          <a:avLst>
+            <a:gd name="adj" fmla="val 20000"/>
+          </a:avLst>
+        </a:prstGeom>
+        <a:gradFill rotWithShape="0">
+          <a:gsLst>
+            <a:gs pos="0">
+              <a:schemeClr val="accent1">
+                <a:hueOff val="0"/>
+                <a:satOff val="0"/>
+                <a:lumOff val="0"/>
+                <a:alphaOff val="0"/>
+                <a:satMod val="103000"/>
+                <a:lumMod val="118000"/>
+              </a:schemeClr>
+            </a:gs>
+            <a:gs pos="50000">
+              <a:schemeClr val="accent1">
+                <a:hueOff val="0"/>
+                <a:satOff val="0"/>
+                <a:lumOff val="0"/>
+                <a:alphaOff val="0"/>
+                <a:satMod val="89000"/>
+                <a:lumMod val="91000"/>
+              </a:schemeClr>
+            </a:gs>
+            <a:gs pos="100000">
+              <a:schemeClr val="accent1">
+                <a:hueOff val="0"/>
+                <a:satOff val="0"/>
+                <a:lumOff val="0"/>
+                <a:alphaOff val="0"/>
+                <a:lumMod val="69000"/>
+              </a:schemeClr>
+            </a:gs>
+          </a:gsLst>
+          <a:lin ang="5400000" scaled="0"/>
+        </a:gradFill>
+        <a:ln>
+          <a:noFill/>
+        </a:ln>
+        <a:effectLst/>
+      </dsp:spPr>
+      <dsp:style>
+        <a:lnRef idx="0">
+          <a:scrgbClr r="0" g="0" b="0"/>
+        </a:lnRef>
+        <a:fillRef idx="3">
+          <a:scrgbClr r="0" g="0" b="0"/>
+        </a:fillRef>
+        <a:effectRef idx="2">
+          <a:scrgbClr r="0" g="0" b="0"/>
+        </a:effectRef>
+        <a:fontRef idx="minor">
+          <a:schemeClr val="lt1"/>
+        </a:fontRef>
+      </dsp:style>
+    </dsp:sp>
+    <dsp:sp modelId="{674D326D-980D-4EAE-8718-54D436AD70BB}">
+      <dsp:nvSpPr>
+        <dsp:cNvPr id="0" name=""/>
+        <dsp:cNvSpPr/>
+      </dsp:nvSpPr>
+      <dsp:spPr>
+        <a:xfrm rot="17700000">
+          <a:off x="2199111" y="1530920"/>
+          <a:ext cx="1347236" cy="649264"/>
+        </a:xfrm>
+        <a:prstGeom prst="rect">
+          <a:avLst/>
+        </a:prstGeom>
+        <a:noFill/>
+        <a:ln>
+          <a:noFill/>
+        </a:ln>
+        <a:effectLst/>
+      </dsp:spPr>
+      <dsp:style>
+        <a:lnRef idx="0">
+          <a:scrgbClr r="0" g="0" b="0"/>
+        </a:lnRef>
+        <a:fillRef idx="0">
+          <a:scrgbClr r="0" g="0" b="0"/>
+        </a:fillRef>
+        <a:effectRef idx="0">
+          <a:scrgbClr r="0" g="0" b="0"/>
+        </a:effectRef>
+        <a:fontRef idx="minor"/>
+      </dsp:style>
+      <dsp:txBody>
+        <a:bodyPr spcFirstLastPara="0" vert="horz" wrap="square" lIns="58420" tIns="0" rIns="0" bIns="0" numCol="1" spcCol="1270" anchor="ctr" anchorCtr="0">
+          <a:noAutofit/>
+        </a:bodyPr>
+        <a:lstStyle/>
+        <a:p>
+          <a:pPr lvl="0" algn="l" defTabSz="1022350">
+            <a:lnSpc>
+              <a:spcPct val="90000"/>
+            </a:lnSpc>
+            <a:spcBef>
+              <a:spcPct val="0"/>
+            </a:spcBef>
+            <a:spcAft>
+              <a:spcPct val="35000"/>
+            </a:spcAft>
+          </a:pPr>
+          <a:r>
+            <a:rPr lang="en-US" altLang="zh-CN" sz="2300" kern="1200" dirty="0" smtClean="0">
+              <a:latin typeface="微软雅黑" panose="020B0503020204020204" pitchFamily="34" charset="-122"/>
+              <a:ea typeface="微软雅黑" panose="020B0503020204020204" pitchFamily="34" charset="-122"/>
+            </a:rPr>
+            <a:t>2007</a:t>
+          </a:r>
+          <a:r>
+            <a:rPr lang="zh-CN" altLang="en-US" sz="2300" kern="1200" dirty="0" smtClean="0">
+              <a:latin typeface="微软雅黑" panose="020B0503020204020204" pitchFamily="34" charset="-122"/>
+              <a:ea typeface="微软雅黑" panose="020B0503020204020204" pitchFamily="34" charset="-122"/>
+            </a:rPr>
+            <a:t>年</a:t>
+          </a:r>
+          <a:endParaRPr lang="zh-CN" sz="2300" kern="1200" dirty="0">
+            <a:latin typeface="微软雅黑" panose="020B0503020204020204" pitchFamily="34" charset="-122"/>
+            <a:ea typeface="微软雅黑" panose="020B0503020204020204" pitchFamily="34" charset="-122"/>
+          </a:endParaRPr>
+        </a:p>
+      </dsp:txBody>
+      <dsp:txXfrm>
+        <a:off x="2199111" y="1530920"/>
+        <a:ext cx="1347236" cy="649264"/>
+      </dsp:txXfrm>
+    </dsp:sp>
+    <dsp:sp modelId="{51C5ACA6-33FD-4668-B3B1-157C98F240BE}">
+      <dsp:nvSpPr>
+        <dsp:cNvPr id="0" name=""/>
+        <dsp:cNvSpPr/>
+      </dsp:nvSpPr>
+      <dsp:spPr>
+        <a:xfrm>
+          <a:off x="2982637" y="2675018"/>
+          <a:ext cx="562541" cy="562541"/>
         </a:xfrm>
         <a:prstGeom prst="ellipse">
           <a:avLst/>
@@ -2701,15 +2983,15 @@
         </a:fontRef>
       </dsp:style>
     </dsp:sp>
-    <dsp:sp modelId="{FDF47E5F-174C-4606-A5A6-ED4628A0F400}">
+    <dsp:sp modelId="{D80838CA-4B5F-4759-A83E-18025D22CD8E}">
       <dsp:nvSpPr>
         <dsp:cNvPr id="0" name=""/>
         <dsp:cNvSpPr/>
       </dsp:nvSpPr>
       <dsp:spPr>
         <a:xfrm rot="17700000">
-          <a:off x="1201639" y="3492904"/>
-          <a:ext cx="1222645" cy="589513"/>
+          <a:off x="2316384" y="3457987"/>
+          <a:ext cx="1165423" cy="561923"/>
         </a:xfrm>
         <a:prstGeom prst="rect">
           <a:avLst/>
@@ -2733,12 +3015,12 @@
         <a:fontRef idx="minor"/>
       </dsp:style>
       <dsp:txBody>
-        <a:bodyPr spcFirstLastPara="0" vert="horz" wrap="square" lIns="0" tIns="0" rIns="55880" bIns="0" numCol="1" spcCol="1270" anchor="ctr" anchorCtr="0">
+        <a:bodyPr spcFirstLastPara="0" vert="horz" wrap="square" lIns="0" tIns="0" rIns="35560" bIns="0" numCol="1" spcCol="1270" anchor="ctr" anchorCtr="0">
           <a:noAutofit/>
         </a:bodyPr>
         <a:lstStyle/>
         <a:p>
-          <a:pPr lvl="0" algn="r" defTabSz="977900">
+          <a:pPr lvl="0" algn="r" defTabSz="622300">
             <a:lnSpc>
               <a:spcPct val="90000"/>
             </a:lnSpc>
@@ -2750,29 +3032,34 @@
             </a:spcAft>
           </a:pPr>
           <a:r>
-            <a:rPr lang="zh-CN" sz="2200" kern="1200">
+            <a:rPr lang="zh-CN" altLang="en-US" sz="1400" kern="1200" dirty="0" smtClean="0">
               <a:latin typeface="微软雅黑" panose="020B0503020204020204" pitchFamily="34" charset="-122"/>
               <a:ea typeface="微软雅黑" panose="020B0503020204020204" pitchFamily="34" charset="-122"/>
               <a:cs typeface="+mn-cs"/>
             </a:rPr>
-            <a:t>活动标题</a:t>
+            <a:t>专业服务支持</a:t>
           </a:r>
+          <a:endParaRPr lang="zh-CN" sz="1400" kern="1200" dirty="0">
+            <a:latin typeface="微软雅黑" panose="020B0503020204020204" pitchFamily="34" charset="-122"/>
+            <a:ea typeface="微软雅黑" panose="020B0503020204020204" pitchFamily="34" charset="-122"/>
+            <a:cs typeface="+mn-cs"/>
+          </a:endParaRPr>
         </a:p>
       </dsp:txBody>
       <dsp:txXfrm>
-        <a:off x="1201639" y="3492904"/>
-        <a:ext cx="1222645" cy="589513"/>
+        <a:off x="2316384" y="3457987"/>
+        <a:ext cx="1165423" cy="561923"/>
       </dsp:txXfrm>
     </dsp:sp>
-    <dsp:sp modelId="{703A9274-6AA5-4BA7-9F0C-49F5E848C1A2}">
+    <dsp:sp modelId="{47163255-F5AC-461E-9A86-3B86DCAB719C}">
       <dsp:nvSpPr>
         <dsp:cNvPr id="0" name=""/>
         <dsp:cNvSpPr/>
       </dsp:nvSpPr>
       <dsp:spPr>
         <a:xfrm rot="17700000">
-          <a:off x="1967088" y="1850728"/>
-          <a:ext cx="1222645" cy="589513"/>
+          <a:off x="3046008" y="1892667"/>
+          <a:ext cx="1165423" cy="561923"/>
         </a:xfrm>
         <a:prstGeom prst="rect">
           <a:avLst/>
@@ -2803,8 +3090,8 @@
       </dsp:nvSpPr>
       <dsp:spPr>
         <a:xfrm>
-          <a:off x="2576408" y="2398086"/>
-          <a:ext cx="1136974" cy="1136974"/>
+          <a:off x="3626811" y="2414408"/>
+          <a:ext cx="1083762" cy="1083762"/>
         </a:xfrm>
         <a:prstGeom prst="donut">
           <a:avLst>
@@ -2872,8 +3159,8 @@
       </dsp:nvSpPr>
       <dsp:spPr>
         <a:xfrm rot="17700000">
-          <a:off x="2977027" y="1471219"/>
-          <a:ext cx="1413385" cy="681142"/>
+          <a:off x="4008680" y="1530920"/>
+          <a:ext cx="1347236" cy="649264"/>
         </a:xfrm>
         <a:prstGeom prst="rect">
           <a:avLst/>
@@ -2897,12 +3184,12 @@
         <a:fontRef idx="minor"/>
       </dsp:style>
       <dsp:txBody>
-        <a:bodyPr spcFirstLastPara="0" vert="horz" wrap="square" lIns="83820" tIns="0" rIns="0" bIns="0" numCol="1" spcCol="1270" anchor="ctr" anchorCtr="0">
+        <a:bodyPr spcFirstLastPara="0" vert="horz" wrap="square" lIns="58420" tIns="0" rIns="0" bIns="0" numCol="1" spcCol="1270" anchor="ctr" anchorCtr="0">
           <a:noAutofit/>
         </a:bodyPr>
         <a:lstStyle/>
         <a:p>
-          <a:pPr lvl="0" algn="l" defTabSz="1466850">
+          <a:pPr lvl="0" algn="l" defTabSz="1022350">
             <a:lnSpc>
               <a:spcPct val="90000"/>
             </a:lnSpc>
@@ -2914,18 +3201,31 @@
             </a:spcAft>
           </a:pPr>
           <a:r>
-            <a:rPr lang="zh-CN" sz="3300" kern="1200" dirty="0">
+            <a:rPr lang="en-US" altLang="zh-CN" sz="2300" kern="1200" dirty="0" smtClean="0">
               <a:latin typeface="微软雅黑" panose="020B0503020204020204" pitchFamily="34" charset="-122"/>
               <a:ea typeface="微软雅黑" panose="020B0503020204020204" pitchFamily="34" charset="-122"/>
               <a:cs typeface="+mn-cs"/>
             </a:rPr>
-            <a:t>日期</a:t>
+            <a:t>2008</a:t>
           </a:r>
+          <a:r>
+            <a:rPr lang="zh-CN" altLang="en-US" sz="2300" kern="1200" dirty="0" smtClean="0">
+              <a:latin typeface="微软雅黑" panose="020B0503020204020204" pitchFamily="34" charset="-122"/>
+              <a:ea typeface="微软雅黑" panose="020B0503020204020204" pitchFamily="34" charset="-122"/>
+              <a:cs typeface="+mn-cs"/>
+            </a:rPr>
+            <a:t>年</a:t>
+          </a:r>
+          <a:endParaRPr lang="zh-CN" sz="2300" kern="1200" dirty="0">
+            <a:latin typeface="微软雅黑" panose="020B0503020204020204" pitchFamily="34" charset="-122"/>
+            <a:ea typeface="微软雅黑" panose="020B0503020204020204" pitchFamily="34" charset="-122"/>
+            <a:cs typeface="+mn-cs"/>
+          </a:endParaRPr>
         </a:p>
       </dsp:txBody>
       <dsp:txXfrm>
-        <a:off x="2977027" y="1471219"/>
-        <a:ext cx="1413385" cy="681142"/>
+        <a:off x="4008680" y="1530920"/>
+        <a:ext cx="1347236" cy="649264"/>
       </dsp:txXfrm>
     </dsp:sp>
     <dsp:sp modelId="{49AD36DC-D62B-4D81-B989-C0C6E821265F}">
@@ -2935,8 +3235,8 @@
       </dsp:nvSpPr>
       <dsp:spPr>
         <a:xfrm>
-          <a:off x="3799024" y="2671492"/>
-          <a:ext cx="590161" cy="590161"/>
+          <a:off x="4792206" y="2675018"/>
+          <a:ext cx="562541" cy="562541"/>
         </a:xfrm>
         <a:prstGeom prst="ellipse">
           <a:avLst/>
@@ -3002,8 +3302,8 @@
       </dsp:nvSpPr>
       <dsp:spPr>
         <a:xfrm rot="17700000">
-          <a:off x="3100058" y="3492904"/>
-          <a:ext cx="1222645" cy="589513"/>
+          <a:off x="4125953" y="3457987"/>
+          <a:ext cx="1165423" cy="561923"/>
         </a:xfrm>
         <a:prstGeom prst="rect">
           <a:avLst/>
@@ -3027,12 +3327,12 @@
         <a:fontRef idx="minor"/>
       </dsp:style>
       <dsp:txBody>
-        <a:bodyPr spcFirstLastPara="0" vert="horz" wrap="square" lIns="0" tIns="0" rIns="55880" bIns="0" numCol="1" spcCol="1270" anchor="ctr" anchorCtr="0">
+        <a:bodyPr spcFirstLastPara="0" vert="horz" wrap="square" lIns="0" tIns="0" rIns="35560" bIns="0" numCol="1" spcCol="1270" anchor="ctr" anchorCtr="0">
           <a:noAutofit/>
         </a:bodyPr>
         <a:lstStyle/>
         <a:p>
-          <a:pPr lvl="0" algn="r" defTabSz="977900">
+          <a:pPr lvl="0" algn="r" defTabSz="622300">
             <a:lnSpc>
               <a:spcPct val="90000"/>
             </a:lnSpc>
@@ -3044,18 +3344,39 @@
             </a:spcAft>
           </a:pPr>
           <a:r>
-            <a:rPr lang="zh-CN" sz="2200" kern="1200">
+            <a:rPr lang="zh-CN" altLang="en-US" sz="1400" kern="1200" dirty="0" smtClean="0">
               <a:latin typeface="微软雅黑" panose="020B0503020204020204" pitchFamily="34" charset="-122"/>
               <a:ea typeface="微软雅黑" panose="020B0503020204020204" pitchFamily="34" charset="-122"/>
               <a:cs typeface="+mn-cs"/>
             </a:rPr>
-            <a:t>活动标题</a:t>
+            <a:t>建行</a:t>
           </a:r>
+          <a:r>
+            <a:rPr lang="en-US" altLang="zh-CN" sz="1400" kern="1200" dirty="0" smtClean="0">
+              <a:latin typeface="微软雅黑" panose="020B0503020204020204" pitchFamily="34" charset="-122"/>
+              <a:ea typeface="微软雅黑" panose="020B0503020204020204" pitchFamily="34" charset="-122"/>
+              <a:cs typeface="+mn-cs"/>
+            </a:rPr>
+            <a:t>SUP2</a:t>
+          </a:r>
+          <a:r>
+            <a:rPr lang="zh-CN" altLang="en-US" sz="1400" kern="1200" dirty="0" smtClean="0">
+              <a:latin typeface="微软雅黑" panose="020B0503020204020204" pitchFamily="34" charset="-122"/>
+              <a:ea typeface="微软雅黑" panose="020B0503020204020204" pitchFamily="34" charset="-122"/>
+              <a:cs typeface="+mn-cs"/>
+            </a:rPr>
+            <a:t>平台</a:t>
+          </a:r>
+          <a:endParaRPr lang="zh-CN" sz="1400" kern="1200" dirty="0">
+            <a:latin typeface="微软雅黑" panose="020B0503020204020204" pitchFamily="34" charset="-122"/>
+            <a:ea typeface="微软雅黑" panose="020B0503020204020204" pitchFamily="34" charset="-122"/>
+            <a:cs typeface="+mn-cs"/>
+          </a:endParaRPr>
         </a:p>
       </dsp:txBody>
       <dsp:txXfrm>
-        <a:off x="3100058" y="3492904"/>
-        <a:ext cx="1222645" cy="589513"/>
+        <a:off x="4125953" y="3457987"/>
+        <a:ext cx="1165423" cy="561923"/>
       </dsp:txXfrm>
     </dsp:sp>
     <dsp:sp modelId="{C5E960F3-64F7-451A-9F71-5CC76AE5F505}">
@@ -3065,8 +3386,8 @@
       </dsp:nvSpPr>
       <dsp:spPr>
         <a:xfrm rot="17700000">
-          <a:off x="3865506" y="1850728"/>
-          <a:ext cx="1222645" cy="589513"/>
+          <a:off x="4855577" y="1892667"/>
+          <a:ext cx="1165423" cy="561923"/>
         </a:xfrm>
         <a:prstGeom prst="rect">
           <a:avLst/>
@@ -3097,8 +3418,8 @@
       </dsp:nvSpPr>
       <dsp:spPr>
         <a:xfrm>
-          <a:off x="4474827" y="2398086"/>
-          <a:ext cx="1136974" cy="1136974"/>
+          <a:off x="5436380" y="2414408"/>
+          <a:ext cx="1083762" cy="1083762"/>
         </a:xfrm>
         <a:prstGeom prst="donut">
           <a:avLst>
@@ -3166,8 +3487,8 @@
       </dsp:nvSpPr>
       <dsp:spPr>
         <a:xfrm rot="17700000">
-          <a:off x="4875445" y="1471219"/>
-          <a:ext cx="1413385" cy="681142"/>
+          <a:off x="5818249" y="1530920"/>
+          <a:ext cx="1347236" cy="649264"/>
         </a:xfrm>
         <a:prstGeom prst="rect">
           <a:avLst/>
@@ -3191,12 +3512,12 @@
         <a:fontRef idx="minor"/>
       </dsp:style>
       <dsp:txBody>
-        <a:bodyPr spcFirstLastPara="0" vert="horz" wrap="square" lIns="83820" tIns="0" rIns="0" bIns="0" numCol="1" spcCol="1270" anchor="ctr" anchorCtr="0">
+        <a:bodyPr spcFirstLastPara="0" vert="horz" wrap="square" lIns="58420" tIns="0" rIns="0" bIns="0" numCol="1" spcCol="1270" anchor="ctr" anchorCtr="0">
           <a:noAutofit/>
         </a:bodyPr>
         <a:lstStyle/>
         <a:p>
-          <a:pPr lvl="0" algn="l" defTabSz="1466850">
+          <a:pPr lvl="0" algn="l" defTabSz="1022350">
             <a:lnSpc>
               <a:spcPct val="90000"/>
             </a:lnSpc>
@@ -3208,18 +3529,31 @@
             </a:spcAft>
           </a:pPr>
           <a:r>
-            <a:rPr lang="zh-CN" sz="3300" kern="1200" dirty="0">
+            <a:rPr lang="en-US" altLang="zh-CN" sz="2300" kern="1200" dirty="0" smtClean="0">
               <a:latin typeface="微软雅黑" panose="020B0503020204020204" pitchFamily="34" charset="-122"/>
               <a:ea typeface="微软雅黑" panose="020B0503020204020204" pitchFamily="34" charset="-122"/>
               <a:cs typeface="+mn-cs"/>
             </a:rPr>
-            <a:t>日期</a:t>
+            <a:t>2010</a:t>
           </a:r>
+          <a:r>
+            <a:rPr lang="zh-CN" altLang="en-US" sz="2300" kern="1200" dirty="0" smtClean="0">
+              <a:latin typeface="微软雅黑" panose="020B0503020204020204" pitchFamily="34" charset="-122"/>
+              <a:ea typeface="微软雅黑" panose="020B0503020204020204" pitchFamily="34" charset="-122"/>
+              <a:cs typeface="+mn-cs"/>
+            </a:rPr>
+            <a:t>年</a:t>
+          </a:r>
+          <a:endParaRPr lang="zh-CN" sz="2300" kern="1200" dirty="0">
+            <a:latin typeface="微软雅黑" panose="020B0503020204020204" pitchFamily="34" charset="-122"/>
+            <a:ea typeface="微软雅黑" panose="020B0503020204020204" pitchFamily="34" charset="-122"/>
+            <a:cs typeface="+mn-cs"/>
+          </a:endParaRPr>
         </a:p>
       </dsp:txBody>
       <dsp:txXfrm>
-        <a:off x="4875445" y="1471219"/>
-        <a:ext cx="1413385" cy="681142"/>
+        <a:off x="5818249" y="1530920"/>
+        <a:ext cx="1347236" cy="649264"/>
       </dsp:txXfrm>
     </dsp:sp>
     <dsp:sp modelId="{DF89BFF2-B2D4-4325-85A2-579AFC2E967F}">
@@ -3229,8 +3563,8 @@
       </dsp:nvSpPr>
       <dsp:spPr>
         <a:xfrm>
-          <a:off x="5697442" y="2671492"/>
-          <a:ext cx="590161" cy="590161"/>
+          <a:off x="6601775" y="2675018"/>
+          <a:ext cx="562541" cy="562541"/>
         </a:xfrm>
         <a:prstGeom prst="ellipse">
           <a:avLst/>
@@ -3296,8 +3630,8 @@
       </dsp:nvSpPr>
       <dsp:spPr>
         <a:xfrm rot="17700000">
-          <a:off x="4998476" y="3492904"/>
-          <a:ext cx="1222645" cy="589513"/>
+          <a:off x="5935522" y="3457987"/>
+          <a:ext cx="1165423" cy="561923"/>
         </a:xfrm>
         <a:prstGeom prst="rect">
           <a:avLst/>
@@ -3321,12 +3655,12 @@
         <a:fontRef idx="minor"/>
       </dsp:style>
       <dsp:txBody>
-        <a:bodyPr spcFirstLastPara="0" vert="horz" wrap="square" lIns="0" tIns="0" rIns="55880" bIns="0" numCol="1" spcCol="1270" anchor="ctr" anchorCtr="0">
+        <a:bodyPr spcFirstLastPara="0" vert="horz" wrap="square" lIns="0" tIns="0" rIns="35560" bIns="0" numCol="1" spcCol="1270" anchor="ctr" anchorCtr="0">
           <a:noAutofit/>
         </a:bodyPr>
         <a:lstStyle/>
         <a:p>
-          <a:pPr lvl="0" algn="r" defTabSz="977900">
+          <a:pPr lvl="0" algn="r" defTabSz="622300">
             <a:lnSpc>
               <a:spcPct val="90000"/>
             </a:lnSpc>
@@ -3338,18 +3672,39 @@
             </a:spcAft>
           </a:pPr>
           <a:r>
-            <a:rPr lang="zh-CN" sz="2200" kern="1200">
+            <a:rPr lang="zh-CN" altLang="en-US" sz="1400" kern="1200" dirty="0" smtClean="0">
               <a:latin typeface="微软雅黑" panose="020B0503020204020204" pitchFamily="34" charset="-122"/>
               <a:ea typeface="微软雅黑" panose="020B0503020204020204" pitchFamily="34" charset="-122"/>
               <a:cs typeface="+mn-cs"/>
             </a:rPr>
-            <a:t>活动标题</a:t>
+            <a:t>中信</a:t>
           </a:r>
+          <a:r>
+            <a:rPr lang="en-US" altLang="zh-CN" sz="1400" kern="1200" dirty="0" smtClean="0">
+              <a:latin typeface="微软雅黑" panose="020B0503020204020204" pitchFamily="34" charset="-122"/>
+              <a:ea typeface="微软雅黑" panose="020B0503020204020204" pitchFamily="34" charset="-122"/>
+              <a:cs typeface="+mn-cs"/>
+            </a:rPr>
+            <a:t>CBJUP</a:t>
+          </a:r>
+          <a:r>
+            <a:rPr lang="zh-CN" altLang="en-US" sz="1400" kern="1200" dirty="0" smtClean="0">
+              <a:latin typeface="微软雅黑" panose="020B0503020204020204" pitchFamily="34" charset="-122"/>
+              <a:ea typeface="微软雅黑" panose="020B0503020204020204" pitchFamily="34" charset="-122"/>
+              <a:cs typeface="+mn-cs"/>
+            </a:rPr>
+            <a:t>平台</a:t>
+          </a:r>
+          <a:endParaRPr lang="zh-CN" sz="1400" kern="1200" dirty="0">
+            <a:latin typeface="微软雅黑" panose="020B0503020204020204" pitchFamily="34" charset="-122"/>
+            <a:ea typeface="微软雅黑" panose="020B0503020204020204" pitchFamily="34" charset="-122"/>
+            <a:cs typeface="+mn-cs"/>
+          </a:endParaRPr>
         </a:p>
       </dsp:txBody>
       <dsp:txXfrm>
-        <a:off x="4998476" y="3492904"/>
-        <a:ext cx="1222645" cy="589513"/>
+        <a:off x="5935522" y="3457987"/>
+        <a:ext cx="1165423" cy="561923"/>
       </dsp:txXfrm>
     </dsp:sp>
     <dsp:sp modelId="{B929AC72-0696-4EEE-AFB6-7E192A81CD7E}">
@@ -3359,170 +3714,8 @@
       </dsp:nvSpPr>
       <dsp:spPr>
         <a:xfrm rot="17700000">
-          <a:off x="5763925" y="1850728"/>
-          <a:ext cx="1222645" cy="589513"/>
-        </a:xfrm>
-        <a:prstGeom prst="rect">
-          <a:avLst/>
-        </a:prstGeom>
-        <a:noFill/>
-        <a:ln>
-          <a:noFill/>
-        </a:ln>
-        <a:effectLst/>
-      </dsp:spPr>
-      <dsp:style>
-        <a:lnRef idx="0">
-          <a:scrgbClr r="0" g="0" b="0"/>
-        </a:lnRef>
-        <a:fillRef idx="0">
-          <a:scrgbClr r="0" g="0" b="0"/>
-        </a:fillRef>
-        <a:effectRef idx="0">
-          <a:scrgbClr r="0" g="0" b="0"/>
-        </a:effectRef>
-        <a:fontRef idx="minor"/>
-      </dsp:style>
-    </dsp:sp>
-    <dsp:sp modelId="{F624D2FA-8824-4453-8B9E-084D7FB18D3E}">
-      <dsp:nvSpPr>
-        <dsp:cNvPr id="0" name=""/>
-        <dsp:cNvSpPr/>
-      </dsp:nvSpPr>
-      <dsp:spPr>
-        <a:xfrm>
-          <a:off x="6373155" y="2671492"/>
-          <a:ext cx="590161" cy="590161"/>
-        </a:xfrm>
-        <a:prstGeom prst="ellipse">
-          <a:avLst/>
-        </a:prstGeom>
-        <a:gradFill rotWithShape="0">
-          <a:gsLst>
-            <a:gs pos="0">
-              <a:schemeClr val="accent6">
-                <a:hueOff val="0"/>
-                <a:satOff val="0"/>
-                <a:lumOff val="0"/>
-                <a:alphaOff val="0"/>
-                <a:satMod val="103000"/>
-                <a:lumMod val="118000"/>
-              </a:schemeClr>
-            </a:gs>
-            <a:gs pos="50000">
-              <a:schemeClr val="accent6">
-                <a:hueOff val="0"/>
-                <a:satOff val="0"/>
-                <a:lumOff val="0"/>
-                <a:alphaOff val="0"/>
-                <a:satMod val="89000"/>
-                <a:lumMod val="91000"/>
-              </a:schemeClr>
-            </a:gs>
-            <a:gs pos="100000">
-              <a:schemeClr val="accent6">
-                <a:hueOff val="0"/>
-                <a:satOff val="0"/>
-                <a:lumOff val="0"/>
-                <a:alphaOff val="0"/>
-                <a:lumMod val="69000"/>
-              </a:schemeClr>
-            </a:gs>
-          </a:gsLst>
-          <a:lin ang="5400000" scaled="0"/>
-        </a:gradFill>
-        <a:ln>
-          <a:noFill/>
-        </a:ln>
-        <a:effectLst/>
-      </dsp:spPr>
-      <dsp:style>
-        <a:lnRef idx="0">
-          <a:scrgbClr r="0" g="0" b="0"/>
-        </a:lnRef>
-        <a:fillRef idx="3">
-          <a:scrgbClr r="0" g="0" b="0"/>
-        </a:fillRef>
-        <a:effectRef idx="2">
-          <a:scrgbClr r="0" g="0" b="0"/>
-        </a:effectRef>
-        <a:fontRef idx="minor">
-          <a:schemeClr val="lt1"/>
-        </a:fontRef>
-      </dsp:style>
-    </dsp:sp>
-    <dsp:sp modelId="{31799780-C26C-41A7-A8A3-0C5BAE591647}">
-      <dsp:nvSpPr>
-        <dsp:cNvPr id="0" name=""/>
-        <dsp:cNvSpPr/>
-      </dsp:nvSpPr>
-      <dsp:spPr>
-        <a:xfrm rot="17700000">
-          <a:off x="5674188" y="3492904"/>
-          <a:ext cx="1222645" cy="589513"/>
-        </a:xfrm>
-        <a:prstGeom prst="rect">
-          <a:avLst/>
-        </a:prstGeom>
-        <a:noFill/>
-        <a:ln>
-          <a:noFill/>
-        </a:ln>
-        <a:effectLst/>
-      </dsp:spPr>
-      <dsp:style>
-        <a:lnRef idx="0">
-          <a:scrgbClr r="0" g="0" b="0"/>
-        </a:lnRef>
-        <a:fillRef idx="0">
-          <a:scrgbClr r="0" g="0" b="0"/>
-        </a:fillRef>
-        <a:effectRef idx="0">
-          <a:scrgbClr r="0" g="0" b="0"/>
-        </a:effectRef>
-        <a:fontRef idx="minor"/>
-      </dsp:style>
-      <dsp:txBody>
-        <a:bodyPr spcFirstLastPara="0" vert="horz" wrap="square" lIns="0" tIns="0" rIns="55880" bIns="0" numCol="1" spcCol="1270" anchor="ctr" anchorCtr="0">
-          <a:noAutofit/>
-        </a:bodyPr>
-        <a:lstStyle/>
-        <a:p>
-          <a:pPr lvl="0" algn="r" defTabSz="977900">
-            <a:lnSpc>
-              <a:spcPct val="90000"/>
-            </a:lnSpc>
-            <a:spcBef>
-              <a:spcPct val="0"/>
-            </a:spcBef>
-            <a:spcAft>
-              <a:spcPct val="35000"/>
-            </a:spcAft>
-          </a:pPr>
-          <a:r>
-            <a:rPr lang="zh-CN" sz="2200" kern="1200">
-              <a:latin typeface="微软雅黑" panose="020B0503020204020204" pitchFamily="34" charset="-122"/>
-              <a:ea typeface="微软雅黑" panose="020B0503020204020204" pitchFamily="34" charset="-122"/>
-              <a:cs typeface="+mn-cs"/>
-            </a:rPr>
-            <a:t>活动标题</a:t>
-          </a:r>
-        </a:p>
-      </dsp:txBody>
-      <dsp:txXfrm>
-        <a:off x="5674188" y="3492904"/>
-        <a:ext cx="1222645" cy="589513"/>
-      </dsp:txXfrm>
-    </dsp:sp>
-    <dsp:sp modelId="{036BAE8B-0596-41F6-8DFC-775AE3DB2F75}">
-      <dsp:nvSpPr>
-        <dsp:cNvPr id="0" name=""/>
-        <dsp:cNvSpPr/>
-      </dsp:nvSpPr>
-      <dsp:spPr>
-        <a:xfrm rot="17700000">
-          <a:off x="6439637" y="1850728"/>
-          <a:ext cx="1222645" cy="589513"/>
+          <a:off x="6665146" y="1892667"/>
+          <a:ext cx="1165423" cy="561923"/>
         </a:xfrm>
         <a:prstGeom prst="rect">
           <a:avLst/>
@@ -3553,8 +3746,8 @@
       </dsp:nvSpPr>
       <dsp:spPr>
         <a:xfrm>
-          <a:off x="7048957" y="2398086"/>
-          <a:ext cx="1136974" cy="1136974"/>
+          <a:off x="7245949" y="2414408"/>
+          <a:ext cx="1083762" cy="1083762"/>
         </a:xfrm>
         <a:prstGeom prst="donut">
           <a:avLst>
@@ -3622,8 +3815,8 @@
       </dsp:nvSpPr>
       <dsp:spPr>
         <a:xfrm rot="17700000">
-          <a:off x="7449576" y="1471219"/>
-          <a:ext cx="1413385" cy="681142"/>
+          <a:off x="7627818" y="1530920"/>
+          <a:ext cx="1347236" cy="649264"/>
         </a:xfrm>
         <a:prstGeom prst="rect">
           <a:avLst/>
@@ -3647,12 +3840,12 @@
         <a:fontRef idx="minor"/>
       </dsp:style>
       <dsp:txBody>
-        <a:bodyPr spcFirstLastPara="0" vert="horz" wrap="square" lIns="83820" tIns="0" rIns="0" bIns="0" numCol="1" spcCol="1270" anchor="ctr" anchorCtr="0">
+        <a:bodyPr spcFirstLastPara="0" vert="horz" wrap="square" lIns="58420" tIns="0" rIns="0" bIns="0" numCol="1" spcCol="1270" anchor="ctr" anchorCtr="0">
           <a:noAutofit/>
         </a:bodyPr>
         <a:lstStyle/>
         <a:p>
-          <a:pPr lvl="0" algn="l" defTabSz="1466850">
+          <a:pPr lvl="0" algn="l" defTabSz="1022350">
             <a:lnSpc>
               <a:spcPct val="90000"/>
             </a:lnSpc>
@@ -3664,18 +3857,31 @@
             </a:spcAft>
           </a:pPr>
           <a:r>
-            <a:rPr lang="zh-CN" sz="3300" kern="1200" dirty="0">
+            <a:rPr lang="en-US" altLang="zh-CN" sz="2300" kern="1200" dirty="0" smtClean="0">
               <a:latin typeface="微软雅黑" panose="020B0503020204020204" pitchFamily="34" charset="-122"/>
               <a:ea typeface="微软雅黑" panose="020B0503020204020204" pitchFamily="34" charset="-122"/>
               <a:cs typeface="+mn-cs"/>
             </a:rPr>
-            <a:t>日期</a:t>
+            <a:t>2013</a:t>
           </a:r>
+          <a:r>
+            <a:rPr lang="zh-CN" altLang="en-US" sz="2300" kern="1200" dirty="0" smtClean="0">
+              <a:latin typeface="微软雅黑" panose="020B0503020204020204" pitchFamily="34" charset="-122"/>
+              <a:ea typeface="微软雅黑" panose="020B0503020204020204" pitchFamily="34" charset="-122"/>
+              <a:cs typeface="+mn-cs"/>
+            </a:rPr>
+            <a:t>年</a:t>
+          </a:r>
+          <a:endParaRPr lang="zh-CN" sz="2300" kern="1200" dirty="0">
+            <a:latin typeface="微软雅黑" panose="020B0503020204020204" pitchFamily="34" charset="-122"/>
+            <a:ea typeface="微软雅黑" panose="020B0503020204020204" pitchFamily="34" charset="-122"/>
+            <a:cs typeface="+mn-cs"/>
+          </a:endParaRPr>
         </a:p>
       </dsp:txBody>
       <dsp:txXfrm>
-        <a:off x="7449576" y="1471219"/>
-        <a:ext cx="1413385" cy="681142"/>
+        <a:off x="7627818" y="1530920"/>
+        <a:ext cx="1347236" cy="649264"/>
       </dsp:txXfrm>
     </dsp:sp>
     <dsp:sp modelId="{E29272B0-1840-4ADB-9A86-4D800BA7660B}">
@@ -3685,8 +3891,8 @@
       </dsp:nvSpPr>
       <dsp:spPr>
         <a:xfrm>
-          <a:off x="8271573" y="2671492"/>
-          <a:ext cx="590161" cy="590161"/>
+          <a:off x="8411344" y="2675018"/>
+          <a:ext cx="562541" cy="562541"/>
         </a:xfrm>
         <a:prstGeom prst="ellipse">
           <a:avLst/>
@@ -3694,7 +3900,7 @@
         <a:gradFill rotWithShape="0">
           <a:gsLst>
             <a:gs pos="0">
-              <a:schemeClr val="accent2">
+              <a:schemeClr val="accent6">
                 <a:hueOff val="0"/>
                 <a:satOff val="0"/>
                 <a:lumOff val="0"/>
@@ -3704,7 +3910,7 @@
               </a:schemeClr>
             </a:gs>
             <a:gs pos="50000">
-              <a:schemeClr val="accent2">
+              <a:schemeClr val="accent6">
                 <a:hueOff val="0"/>
                 <a:satOff val="0"/>
                 <a:lumOff val="0"/>
@@ -3714,7 +3920,7 @@
               </a:schemeClr>
             </a:gs>
             <a:gs pos="100000">
-              <a:schemeClr val="accent2">
+              <a:schemeClr val="accent6">
                 <a:hueOff val="0"/>
                 <a:satOff val="0"/>
                 <a:lumOff val="0"/>
@@ -3752,8 +3958,8 @@
       </dsp:nvSpPr>
       <dsp:spPr>
         <a:xfrm rot="17700000">
-          <a:off x="7572607" y="3492904"/>
-          <a:ext cx="1222645" cy="589513"/>
+          <a:off x="7745091" y="3457987"/>
+          <a:ext cx="1165423" cy="561923"/>
         </a:xfrm>
         <a:prstGeom prst="rect">
           <a:avLst/>
@@ -3777,12 +3983,12 @@
         <a:fontRef idx="minor"/>
       </dsp:style>
       <dsp:txBody>
-        <a:bodyPr spcFirstLastPara="0" vert="horz" wrap="square" lIns="0" tIns="0" rIns="55880" bIns="0" numCol="1" spcCol="1270" anchor="ctr" anchorCtr="0">
+        <a:bodyPr spcFirstLastPara="0" vert="horz" wrap="square" lIns="0" tIns="0" rIns="35560" bIns="0" numCol="1" spcCol="1270" anchor="ctr" anchorCtr="0">
           <a:noAutofit/>
         </a:bodyPr>
         <a:lstStyle/>
         <a:p>
-          <a:pPr lvl="0" algn="r" defTabSz="977900">
+          <a:pPr lvl="0" algn="r" defTabSz="622300">
             <a:lnSpc>
               <a:spcPct val="90000"/>
             </a:lnSpc>
@@ -3794,18 +4000,39 @@
             </a:spcAft>
           </a:pPr>
           <a:r>
-            <a:rPr lang="zh-CN" sz="2200" kern="1200">
+            <a:rPr lang="zh-CN" altLang="en-US" sz="1400" kern="1200" dirty="0" smtClean="0">
               <a:latin typeface="微软雅黑" panose="020B0503020204020204" pitchFamily="34" charset="-122"/>
               <a:ea typeface="微软雅黑" panose="020B0503020204020204" pitchFamily="34" charset="-122"/>
               <a:cs typeface="+mn-cs"/>
             </a:rPr>
-            <a:t>活动标题</a:t>
+            <a:t>远光</a:t>
           </a:r>
+          <a:r>
+            <a:rPr lang="en-US" altLang="zh-CN" sz="1400" kern="1200" dirty="0" smtClean="0">
+              <a:latin typeface="微软雅黑" panose="020B0503020204020204" pitchFamily="34" charset="-122"/>
+              <a:ea typeface="微软雅黑" panose="020B0503020204020204" pitchFamily="34" charset="-122"/>
+              <a:cs typeface="+mn-cs"/>
+            </a:rPr>
+            <a:t>ECP</a:t>
+          </a:r>
+          <a:r>
+            <a:rPr lang="zh-CN" altLang="en-US" sz="1400" kern="1200" dirty="0" smtClean="0">
+              <a:latin typeface="微软雅黑" panose="020B0503020204020204" pitchFamily="34" charset="-122"/>
+              <a:ea typeface="微软雅黑" panose="020B0503020204020204" pitchFamily="34" charset="-122"/>
+              <a:cs typeface="+mn-cs"/>
+            </a:rPr>
+            <a:t>平台</a:t>
+          </a:r>
+          <a:endParaRPr lang="zh-CN" sz="1400" kern="1200" dirty="0">
+            <a:latin typeface="微软雅黑" panose="020B0503020204020204" pitchFamily="34" charset="-122"/>
+            <a:ea typeface="微软雅黑" panose="020B0503020204020204" pitchFamily="34" charset="-122"/>
+            <a:cs typeface="+mn-cs"/>
+          </a:endParaRPr>
         </a:p>
       </dsp:txBody>
       <dsp:txXfrm>
-        <a:off x="7572607" y="3492904"/>
-        <a:ext cx="1222645" cy="589513"/>
+        <a:off x="7745091" y="3457987"/>
+        <a:ext cx="1165423" cy="561923"/>
       </dsp:txXfrm>
     </dsp:sp>
     <dsp:sp modelId="{C83A00C4-4E87-475C-B373-0648A481D8EB}">
@@ -3815,8 +4042,8 @@
       </dsp:nvSpPr>
       <dsp:spPr>
         <a:xfrm rot="17700000">
-          <a:off x="8338056" y="1850728"/>
-          <a:ext cx="1222645" cy="589513"/>
+          <a:off x="8474715" y="1892667"/>
+          <a:ext cx="1165423" cy="561923"/>
         </a:xfrm>
         <a:prstGeom prst="rect">
           <a:avLst/>
@@ -3847,8 +4074,8 @@
       </dsp:nvSpPr>
       <dsp:spPr>
         <a:xfrm>
-          <a:off x="8947376" y="2398086"/>
-          <a:ext cx="1136974" cy="1136974"/>
+          <a:off x="9055518" y="2414408"/>
+          <a:ext cx="1083762" cy="1083762"/>
         </a:xfrm>
         <a:prstGeom prst="donut">
           <a:avLst>
@@ -3916,8 +4143,8 @@
       </dsp:nvSpPr>
       <dsp:spPr>
         <a:xfrm rot="17700000">
-          <a:off x="9347995" y="1471219"/>
-          <a:ext cx="1413385" cy="681142"/>
+          <a:off x="9437387" y="1530920"/>
+          <a:ext cx="1347236" cy="649264"/>
         </a:xfrm>
         <a:prstGeom prst="rect">
           <a:avLst/>
@@ -3941,12 +4168,12 @@
         <a:fontRef idx="minor"/>
       </dsp:style>
       <dsp:txBody>
-        <a:bodyPr spcFirstLastPara="0" vert="horz" wrap="square" lIns="83820" tIns="0" rIns="0" bIns="0" numCol="1" spcCol="1270" anchor="ctr" anchorCtr="0">
+        <a:bodyPr spcFirstLastPara="0" vert="horz" wrap="square" lIns="58420" tIns="0" rIns="0" bIns="0" numCol="1" spcCol="1270" anchor="ctr" anchorCtr="0">
           <a:noAutofit/>
         </a:bodyPr>
         <a:lstStyle/>
         <a:p>
-          <a:pPr lvl="0" algn="l" defTabSz="1466850">
+          <a:pPr lvl="0" algn="l" defTabSz="1022350">
             <a:lnSpc>
               <a:spcPct val="90000"/>
             </a:lnSpc>
@@ -3958,18 +4185,31 @@
             </a:spcAft>
           </a:pPr>
           <a:r>
-            <a:rPr lang="zh-CN" sz="3300" kern="1200">
+            <a:rPr lang="en-US" altLang="zh-CN" sz="2300" kern="1200" dirty="0" smtClean="0">
               <a:latin typeface="微软雅黑" panose="020B0503020204020204" pitchFamily="34" charset="-122"/>
               <a:ea typeface="微软雅黑" panose="020B0503020204020204" pitchFamily="34" charset="-122"/>
               <a:cs typeface="+mn-cs"/>
             </a:rPr>
-            <a:t>日期</a:t>
+            <a:t>2015</a:t>
           </a:r>
+          <a:r>
+            <a:rPr lang="zh-CN" altLang="en-US" sz="2300" kern="1200" dirty="0" smtClean="0">
+              <a:latin typeface="微软雅黑" panose="020B0503020204020204" pitchFamily="34" charset="-122"/>
+              <a:ea typeface="微软雅黑" panose="020B0503020204020204" pitchFamily="34" charset="-122"/>
+              <a:cs typeface="+mn-cs"/>
+            </a:rPr>
+            <a:t>年</a:t>
+          </a:r>
+          <a:endParaRPr lang="zh-CN" sz="2300" kern="1200" dirty="0">
+            <a:latin typeface="微软雅黑" panose="020B0503020204020204" pitchFamily="34" charset="-122"/>
+            <a:ea typeface="微软雅黑" panose="020B0503020204020204" pitchFamily="34" charset="-122"/>
+            <a:cs typeface="+mn-cs"/>
+          </a:endParaRPr>
         </a:p>
       </dsp:txBody>
       <dsp:txXfrm>
-        <a:off x="9347995" y="1471219"/>
-        <a:ext cx="1413385" cy="681142"/>
+        <a:off x="9437387" y="1530920"/>
+        <a:ext cx="1347236" cy="649264"/>
       </dsp:txXfrm>
     </dsp:sp>
     <dsp:sp modelId="{FA37A83F-DCFE-4930-B762-BA4ACC7C2CF7}">
@@ -3979,8 +4219,8 @@
       </dsp:nvSpPr>
       <dsp:spPr>
         <a:xfrm>
-          <a:off x="10169992" y="2671492"/>
-          <a:ext cx="590161" cy="590161"/>
+          <a:off x="10220913" y="2675018"/>
+          <a:ext cx="562541" cy="562541"/>
         </a:xfrm>
         <a:prstGeom prst="ellipse">
           <a:avLst/>
@@ -3988,7 +4228,7 @@
         <a:gradFill rotWithShape="0">
           <a:gsLst>
             <a:gs pos="0">
-              <a:schemeClr val="accent3">
+              <a:schemeClr val="accent2">
                 <a:hueOff val="0"/>
                 <a:satOff val="0"/>
                 <a:lumOff val="0"/>
@@ -3998,7 +4238,7 @@
               </a:schemeClr>
             </a:gs>
             <a:gs pos="50000">
-              <a:schemeClr val="accent3">
+              <a:schemeClr val="accent2">
                 <a:hueOff val="0"/>
                 <a:satOff val="0"/>
                 <a:lumOff val="0"/>
@@ -4008,7 +4248,7 @@
               </a:schemeClr>
             </a:gs>
             <a:gs pos="100000">
-              <a:schemeClr val="accent3">
+              <a:schemeClr val="accent2">
                 <a:hueOff val="0"/>
                 <a:satOff val="0"/>
                 <a:lumOff val="0"/>
@@ -4046,8 +4286,8 @@
       </dsp:nvSpPr>
       <dsp:spPr>
         <a:xfrm rot="17700000">
-          <a:off x="9471026" y="3492904"/>
-          <a:ext cx="1222645" cy="589513"/>
+          <a:off x="9554660" y="3457987"/>
+          <a:ext cx="1165423" cy="561923"/>
         </a:xfrm>
         <a:prstGeom prst="rect">
           <a:avLst/>
@@ -4071,12 +4311,12 @@
         <a:fontRef idx="minor"/>
       </dsp:style>
       <dsp:txBody>
-        <a:bodyPr spcFirstLastPara="0" vert="horz" wrap="square" lIns="0" tIns="0" rIns="55880" bIns="0" numCol="1" spcCol="1270" anchor="ctr" anchorCtr="0">
+        <a:bodyPr spcFirstLastPara="0" vert="horz" wrap="square" lIns="0" tIns="0" rIns="35560" bIns="0" numCol="1" spcCol="1270" anchor="ctr" anchorCtr="0">
           <a:noAutofit/>
         </a:bodyPr>
         <a:lstStyle/>
         <a:p>
-          <a:pPr lvl="0" algn="r" defTabSz="977900">
+          <a:pPr lvl="0" algn="r" defTabSz="622300">
             <a:lnSpc>
               <a:spcPct val="90000"/>
             </a:lnSpc>
@@ -4088,18 +4328,39 @@
             </a:spcAft>
           </a:pPr>
           <a:r>
-            <a:rPr lang="zh-CN" sz="2200" kern="1200">
+            <a:rPr lang="zh-CN" altLang="en-US" sz="1400" kern="1200" dirty="0" smtClean="0">
               <a:latin typeface="微软雅黑" panose="020B0503020204020204" pitchFamily="34" charset="-122"/>
               <a:ea typeface="微软雅黑" panose="020B0503020204020204" pitchFamily="34" charset="-122"/>
               <a:cs typeface="+mn-cs"/>
             </a:rPr>
-            <a:t>活动标题</a:t>
+            <a:t>普元</a:t>
           </a:r>
+          <a:r>
+            <a:rPr lang="en-US" altLang="zh-CN" sz="1400" kern="1200" dirty="0" smtClean="0">
+              <a:latin typeface="微软雅黑" panose="020B0503020204020204" pitchFamily="34" charset="-122"/>
+              <a:ea typeface="微软雅黑" panose="020B0503020204020204" pitchFamily="34" charset="-122"/>
+              <a:cs typeface="+mn-cs"/>
+            </a:rPr>
+            <a:t>BIIP</a:t>
+          </a:r>
+          <a:r>
+            <a:rPr lang="zh-CN" altLang="en-US" sz="1400" kern="1200" dirty="0" smtClean="0">
+              <a:latin typeface="微软雅黑" panose="020B0503020204020204" pitchFamily="34" charset="-122"/>
+              <a:ea typeface="微软雅黑" panose="020B0503020204020204" pitchFamily="34" charset="-122"/>
+              <a:cs typeface="+mn-cs"/>
+            </a:rPr>
+            <a:t>平台</a:t>
+          </a:r>
+          <a:endParaRPr lang="zh-CN" sz="1400" kern="1200" dirty="0">
+            <a:latin typeface="微软雅黑" panose="020B0503020204020204" pitchFamily="34" charset="-122"/>
+            <a:ea typeface="微软雅黑" panose="020B0503020204020204" pitchFamily="34" charset="-122"/>
+            <a:cs typeface="+mn-cs"/>
+          </a:endParaRPr>
         </a:p>
       </dsp:txBody>
       <dsp:txXfrm>
-        <a:off x="9471026" y="3492904"/>
-        <a:ext cx="1222645" cy="589513"/>
+        <a:off x="9554660" y="3457987"/>
+        <a:ext cx="1165423" cy="561923"/>
       </dsp:txXfrm>
     </dsp:sp>
     <dsp:sp modelId="{FCF7FA09-DF88-4A61-9695-0DC36D268D20}">
@@ -4109,8 +4370,8 @@
       </dsp:nvSpPr>
       <dsp:spPr>
         <a:xfrm rot="17700000">
-          <a:off x="10236474" y="1850728"/>
-          <a:ext cx="1222645" cy="589513"/>
+          <a:off x="10284284" y="1892667"/>
+          <a:ext cx="1165423" cy="561923"/>
         </a:xfrm>
         <a:prstGeom prst="rect">
           <a:avLst/>
@@ -5749,7 +6010,7 @@
           <a:p>
             <a:fld id="{FD13C26D-7501-41EB-9D92-09B4C77D7B37}" type="datetimeFigureOut">
               <a:rPr lang="en-US" altLang="zh-CN"/>
-              <a:t>3/31/2016</a:t>
+              <a:t>4/13/2016</a:t>
             </a:fld>
             <a:endParaRPr lang="zh-CN"/>
           </a:p>
@@ -5913,7 +6174,7 @@
           </a:lstStyle>
           <a:p>
             <a:fld id="{613CAC40-61BA-4CFD-BB18-90E1535C2035}" type="datetimeFigureOut">
-              <a:t>2016-03-31</a:t>
+              <a:t>2016-04-13</a:t>
             </a:fld>
             <a:endParaRPr lang="zh-CN"/>
           </a:p>
@@ -6320,7 +6581,7 @@
           <a:lstStyle/>
           <a:p>
             <a:fld id="{A8224893-DBDA-4BFA-9CE1-4BFE7CD0F8CF}" type="datetime1">
-              <a:t>2016-03-31</a:t>
+              <a:t>2016-04-13</a:t>
             </a:fld>
             <a:endParaRPr lang="zh-CN"/>
           </a:p>
@@ -6488,7 +6749,7 @@
           <a:lstStyle/>
           <a:p>
             <a:fld id="{5F4E5243-F52A-4D37-9694-EB26C6C31910}" type="datetime1">
-              <a:t>2016-03-31</a:t>
+              <a:t>2016-04-13</a:t>
             </a:fld>
             <a:endParaRPr lang="zh-CN"/>
           </a:p>
@@ -6666,7 +6927,7 @@
           <a:lstStyle/>
           <a:p>
             <a:fld id="{3A77B6E1-634A-48DC-9E8B-D894023267EF}" type="datetime1">
-              <a:t>2016-03-31</a:t>
+              <a:t>2016-04-13</a:t>
             </a:fld>
             <a:endParaRPr lang="zh-CN"/>
           </a:p>
@@ -6834,7 +7095,7 @@
           <a:lstStyle/>
           <a:p>
             <a:fld id="{7B2D3E9E-A95C-48F2-B4BF-A71542E0BE9A}" type="datetime1">
-              <a:t>2016-03-31</a:t>
+              <a:t>2016-04-13</a:t>
             </a:fld>
             <a:endParaRPr lang="zh-CN"/>
           </a:p>
@@ -7083,7 +7344,7 @@
           <a:lstStyle/>
           <a:p>
             <a:fld id="{A50F84E2-2D7A-43CF-AC90-352A289A783A}" type="datetime1">
-              <a:t>2016-03-31</a:t>
+              <a:t>2016-04-13</a:t>
             </a:fld>
             <a:endParaRPr lang="zh-CN"/>
           </a:p>
@@ -7369,7 +7630,7 @@
           <a:lstStyle/>
           <a:p>
             <a:fld id="{F12952B5-7A2F-4CC8-B7CE-9234E21C2837}" type="datetime1">
-              <a:t>2016-03-31</a:t>
+              <a:t>2016-04-13</a:t>
             </a:fld>
             <a:endParaRPr lang="zh-CN"/>
           </a:p>
@@ -7771,7 +8032,7 @@
           <a:lstStyle/>
           <a:p>
             <a:fld id="{CE1DA07A-9201-4B4B-BAF2-015AFA30F520}" type="datetime1">
-              <a:t>2016-03-31</a:t>
+              <a:t>2016-04-13</a:t>
             </a:fld>
             <a:endParaRPr lang="zh-CN"/>
           </a:p>
@@ -7894,7 +8155,7 @@
           <a:lstStyle/>
           <a:p>
             <a:fld id="{73D7E00A-486F-4252-8B1D-E32645521F49}" type="datetime1">
-              <a:t>2016-03-31</a:t>
+              <a:t>2016-04-13</a:t>
             </a:fld>
             <a:endParaRPr lang="zh-CN"/>
           </a:p>
@@ -8017,7 +8278,7 @@
           <a:lstStyle/>
           <a:p>
             <a:fld id="{8DDF5F92-E675-4B36-9A60-69A962A68675}" type="datetime1">
-              <a:t>2016-03-31</a:t>
+              <a:t>2016-04-13</a:t>
             </a:fld>
             <a:endParaRPr lang="zh-CN"/>
           </a:p>
@@ -8301,7 +8562,7 @@
           <a:lstStyle/>
           <a:p>
             <a:fld id="{AF6E2C9B-5FA2-460D-9BE7-B0812FC2A6FF}" type="datetime1">
-              <a:t>2016-03-31</a:t>
+              <a:t>2016-04-13</a:t>
             </a:fld>
             <a:endParaRPr lang="zh-CN"/>
           </a:p>
@@ -8572,7 +8833,7 @@
           <a:lstStyle/>
           <a:p>
             <a:fld id="{1D374940-A916-4C8B-9648-02A2D3898F9E}" type="datetime1">
-              <a:t>2016-03-31</a:t>
+              <a:t>2016-04-13</a:t>
             </a:fld>
             <a:endParaRPr lang="zh-CN"/>
           </a:p>
@@ -8793,7 +9054,7 @@
             <a:fld id="{5586B75A-687E-405C-8A0B-8D00578BA2C3}" type="datetime1">
               <a:rPr lang="en-US" altLang="zh-CN" smtClean="0"/>
               <a:pPr/>
-              <a:t>3/31/2016</a:t>
+              <a:t>4/13/2016</a:t>
             </a:fld>
             <a:endParaRPr lang="zh-CN" altLang="en-US"/>
           </a:p>
@@ -9909,7 +10170,7 @@
           <p:nvPr>
             <p:extLst>
               <p:ext uri="{D42A27DB-BD31-4B8C-83A1-F6EECF244321}">
-                <p14:modId xmlns:p14="http://schemas.microsoft.com/office/powerpoint/2010/main" val="1110196871"/>
+                <p14:modId xmlns:p14="http://schemas.microsoft.com/office/powerpoint/2010/main" val="1124679472"/>
               </p:ext>
             </p:extLst>
           </p:nvPr>
@@ -9941,6 +10202,186 @@
       </p:par>
     </p:tnLst>
   </p:timing>
+</p:sld>
+</file>
+
+<file path=ppt/slides/slide4.xml><?xml version="1.0" encoding="utf-8"?>
+<p:sld xmlns:a="http://schemas.openxmlformats.org/drawingml/2006/main" xmlns:r="http://schemas.openxmlformats.org/officeDocument/2006/relationships" xmlns:p="http://schemas.openxmlformats.org/presentationml/2006/main">
+  <p:cSld>
+    <p:spTree>
+      <p:nvGrpSpPr>
+        <p:cNvPr id="1" name=""/>
+        <p:cNvGrpSpPr/>
+        <p:nvPr/>
+      </p:nvGrpSpPr>
+      <p:grpSpPr>
+        <a:xfrm>
+          <a:off x="0" y="0"/>
+          <a:ext cx="0" cy="0"/>
+          <a:chOff x="0" y="0"/>
+          <a:chExt cx="0" cy="0"/>
+        </a:xfrm>
+      </p:grpSpPr>
+    </p:spTree>
+    <p:extLst>
+      <p:ext uri="{BB962C8B-B14F-4D97-AF65-F5344CB8AC3E}">
+        <p14:creationId xmlns:p14="http://schemas.microsoft.com/office/powerpoint/2010/main" val="1778270121"/>
+      </p:ext>
+    </p:extLst>
+  </p:cSld>
+  <p:clrMapOvr>
+    <a:masterClrMapping/>
+  </p:clrMapOvr>
+</p:sld>
+</file>
+
+<file path=ppt/slides/slide5.xml><?xml version="1.0" encoding="utf-8"?>
+<p:sld xmlns:a="http://schemas.openxmlformats.org/drawingml/2006/main" xmlns:r="http://schemas.openxmlformats.org/officeDocument/2006/relationships" xmlns:p="http://schemas.openxmlformats.org/presentationml/2006/main">
+  <p:cSld>
+    <p:spTree>
+      <p:nvGrpSpPr>
+        <p:cNvPr id="1" name=""/>
+        <p:cNvGrpSpPr/>
+        <p:nvPr/>
+      </p:nvGrpSpPr>
+      <p:grpSpPr>
+        <a:xfrm>
+          <a:off x="0" y="0"/>
+          <a:ext cx="0" cy="0"/>
+          <a:chOff x="0" y="0"/>
+          <a:chExt cx="0" cy="0"/>
+        </a:xfrm>
+      </p:grpSpPr>
+    </p:spTree>
+    <p:extLst>
+      <p:ext uri="{BB962C8B-B14F-4D97-AF65-F5344CB8AC3E}">
+        <p14:creationId xmlns:p14="http://schemas.microsoft.com/office/powerpoint/2010/main" val="3550089820"/>
+      </p:ext>
+    </p:extLst>
+  </p:cSld>
+  <p:clrMapOvr>
+    <a:masterClrMapping/>
+  </p:clrMapOvr>
+</p:sld>
+</file>
+
+<file path=ppt/slides/slide6.xml><?xml version="1.0" encoding="utf-8"?>
+<p:sld xmlns:a="http://schemas.openxmlformats.org/drawingml/2006/main" xmlns:r="http://schemas.openxmlformats.org/officeDocument/2006/relationships" xmlns:p="http://schemas.openxmlformats.org/presentationml/2006/main">
+  <p:cSld>
+    <p:spTree>
+      <p:nvGrpSpPr>
+        <p:cNvPr id="1" name=""/>
+        <p:cNvGrpSpPr/>
+        <p:nvPr/>
+      </p:nvGrpSpPr>
+      <p:grpSpPr>
+        <a:xfrm>
+          <a:off x="0" y="0"/>
+          <a:ext cx="0" cy="0"/>
+          <a:chOff x="0" y="0"/>
+          <a:chExt cx="0" cy="0"/>
+        </a:xfrm>
+      </p:grpSpPr>
+    </p:spTree>
+    <p:extLst>
+      <p:ext uri="{BB962C8B-B14F-4D97-AF65-F5344CB8AC3E}">
+        <p14:creationId xmlns:p14="http://schemas.microsoft.com/office/powerpoint/2010/main" val="208474340"/>
+      </p:ext>
+    </p:extLst>
+  </p:cSld>
+  <p:clrMapOvr>
+    <a:masterClrMapping/>
+  </p:clrMapOvr>
+</p:sld>
+</file>
+
+<file path=ppt/slides/slide7.xml><?xml version="1.0" encoding="utf-8"?>
+<p:sld xmlns:a="http://schemas.openxmlformats.org/drawingml/2006/main" xmlns:r="http://schemas.openxmlformats.org/officeDocument/2006/relationships" xmlns:p="http://schemas.openxmlformats.org/presentationml/2006/main">
+  <p:cSld>
+    <p:spTree>
+      <p:nvGrpSpPr>
+        <p:cNvPr id="1" name=""/>
+        <p:cNvGrpSpPr/>
+        <p:nvPr/>
+      </p:nvGrpSpPr>
+      <p:grpSpPr>
+        <a:xfrm>
+          <a:off x="0" y="0"/>
+          <a:ext cx="0" cy="0"/>
+          <a:chOff x="0" y="0"/>
+          <a:chExt cx="0" cy="0"/>
+        </a:xfrm>
+      </p:grpSpPr>
+    </p:spTree>
+    <p:extLst>
+      <p:ext uri="{BB962C8B-B14F-4D97-AF65-F5344CB8AC3E}">
+        <p14:creationId xmlns:p14="http://schemas.microsoft.com/office/powerpoint/2010/main" val="597829249"/>
+      </p:ext>
+    </p:extLst>
+  </p:cSld>
+  <p:clrMapOvr>
+    <a:masterClrMapping/>
+  </p:clrMapOvr>
+</p:sld>
+</file>
+
+<file path=ppt/slides/slide8.xml><?xml version="1.0" encoding="utf-8"?>
+<p:sld xmlns:a="http://schemas.openxmlformats.org/drawingml/2006/main" xmlns:r="http://schemas.openxmlformats.org/officeDocument/2006/relationships" xmlns:p="http://schemas.openxmlformats.org/presentationml/2006/main">
+  <p:cSld>
+    <p:spTree>
+      <p:nvGrpSpPr>
+        <p:cNvPr id="1" name=""/>
+        <p:cNvGrpSpPr/>
+        <p:nvPr/>
+      </p:nvGrpSpPr>
+      <p:grpSpPr>
+        <a:xfrm>
+          <a:off x="0" y="0"/>
+          <a:ext cx="0" cy="0"/>
+          <a:chOff x="0" y="0"/>
+          <a:chExt cx="0" cy="0"/>
+        </a:xfrm>
+      </p:grpSpPr>
+    </p:spTree>
+    <p:extLst>
+      <p:ext uri="{BB962C8B-B14F-4D97-AF65-F5344CB8AC3E}">
+        <p14:creationId xmlns:p14="http://schemas.microsoft.com/office/powerpoint/2010/main" val="2824779173"/>
+      </p:ext>
+    </p:extLst>
+  </p:cSld>
+  <p:clrMapOvr>
+    <a:masterClrMapping/>
+  </p:clrMapOvr>
+</p:sld>
+</file>
+
+<file path=ppt/slides/slide9.xml><?xml version="1.0" encoding="utf-8"?>
+<p:sld xmlns:a="http://schemas.openxmlformats.org/drawingml/2006/main" xmlns:r="http://schemas.openxmlformats.org/officeDocument/2006/relationships" xmlns:p="http://schemas.openxmlformats.org/presentationml/2006/main">
+  <p:cSld>
+    <p:spTree>
+      <p:nvGrpSpPr>
+        <p:cNvPr id="1" name=""/>
+        <p:cNvGrpSpPr/>
+        <p:nvPr/>
+      </p:nvGrpSpPr>
+      <p:grpSpPr>
+        <a:xfrm>
+          <a:off x="0" y="0"/>
+          <a:ext cx="0" cy="0"/>
+          <a:chOff x="0" y="0"/>
+          <a:chExt cx="0" cy="0"/>
+        </a:xfrm>
+      </p:grpSpPr>
+    </p:spTree>
+    <p:extLst>
+      <p:ext uri="{BB962C8B-B14F-4D97-AF65-F5344CB8AC3E}">
+        <p14:creationId xmlns:p14="http://schemas.microsoft.com/office/powerpoint/2010/main" val="2175172372"/>
+      </p:ext>
+    </p:extLst>
+  </p:cSld>
+  <p:clrMapOvr>
+    <a:masterClrMapping/>
+  </p:clrMapOvr>
 </p:sld>
 </file>
 
